--- a/docs/content/05-teaching-resources/slides/specialism/01-design-principles-methodologies-and-verification.pptx
+++ b/docs/content/05-teaching-resources/slides/specialism/01-design-principles-methodologies-and-verification.pptx
@@ -8,12 +8,18 @@
     <p:sldId id="256" r:id="rId7"/>
     <p:sldId id="257" r:id="rId8"/>
     <p:sldId id="258" r:id="rId9"/>
-    <p:sldId id="259" r:id="rId11"/>
+    <p:sldId id="259" r:id="rId10"/>
     <p:sldId id="260" r:id="rId12"/>
     <p:sldId id="261" r:id="rId13"/>
     <p:sldId id="262" r:id="rId14"/>
     <p:sldId id="263" r:id="rId15"/>
     <p:sldId id="264" r:id="rId16"/>
+    <p:sldId id="265" r:id="rId17"/>
+    <p:sldId id="266" r:id="rId18"/>
+    <p:sldId id="267" r:id="rId19"/>
+    <p:sldId id="268" r:id="rId20"/>
+    <p:sldId id="269" r:id="rId21"/>
+    <p:sldId id="270" r:id="rId22"/>
   </p:sldIdLst>
   <p:sldSz cx="12191695" cy="6858000" type="screen4x3"/>
   <p:notesSz cx="6858000" cy="9144000"/>
@@ -580,7 +586,22 @@
           <a:lstStyle/>
           <a:p>
             <a:r>
-              <a:t>Give students a few minutes to answer on mini whiteboards or paper, then reveal the answers on the next slide.</a:t>
+              <a:t>Answers:</a:t>
+            </a:r>
+          </a:p>
+          <a:p>
+            <a:r>
+              <a:t>1. Market research, client interviews or observation, product analysis.</a:t>
+            </a:r>
+          </a:p>
+          <a:p>
+            <a:r>
+              <a:t>2. A detailed, measurable list of requirements.</a:t>
+            </a:r>
+          </a:p>
+          <a:p>
+            <a:r>
+              <a:t>3. So everyone knows exactly what will be delivered.</a:t>
             </a:r>
           </a:p>
         </p:txBody>
@@ -650,7 +671,22 @@
           <a:lstStyle/>
           <a:p>
             <a:r>
-              <a:t>Talk through any answers the class found difficult.</a:t>
+              <a:t>Answers:</a:t>
+            </a:r>
+          </a:p>
+          <a:p>
+            <a:r>
+              <a:t>1. The systems approach.</a:t>
+            </a:r>
+          </a:p>
+          <a:p>
+            <a:r>
+              <a:t>2. Design for assembly: making parts easy to fit together.</a:t>
+            </a:r>
+          </a:p>
+          <a:p>
+            <a:r>
+              <a:t>3. Deliberately limiting a product's life.</a:t>
             </a:r>
           </a:p>
         </p:txBody>
@@ -676,6 +712,231 @@
 </file>
 
 <file path=ppt/notesSlides/notesSlide4.xml><?xml version="1.0" encoding="utf-8"?>
+<p:notes xmlns:a="http://schemas.openxmlformats.org/drawingml/2006/main" xmlns:p="http://schemas.openxmlformats.org/presentationml/2006/main" xmlns:r="http://schemas.openxmlformats.org/officeDocument/2006/relationships">
+  <p:cSld>
+    <p:spTree>
+      <p:nvGrpSpPr>
+        <p:cNvPr id="1" name=""/>
+        <p:cNvGrpSpPr/>
+        <p:nvPr/>
+      </p:nvGrpSpPr>
+      <p:grpSpPr>
+        <a:xfrm>
+          <a:off x="0" y="0"/>
+          <a:ext cx="0" cy="0"/>
+          <a:chOff x="0" y="0"/>
+          <a:chExt cx="0" cy="0"/>
+        </a:xfrm>
+      </p:grpSpPr>
+      <p:sp>
+        <p:nvSpPr>
+          <p:cNvPr id="2" name="Slide Image Placeholder 1"/>
+          <p:cNvSpPr>
+            <a:spLocks noGrp="1"/>
+          </p:cNvSpPr>
+          <p:nvPr>
+            <p:ph type="sldImg" idx="2"/>
+          </p:nvPr>
+        </p:nvSpPr>
+        <p:spPr/>
+      </p:sp>
+      <p:sp>
+        <p:nvSpPr>
+          <p:cNvPr id="3" name="Notes Placeholder 2"/>
+          <p:cNvSpPr>
+            <a:spLocks noGrp="1"/>
+          </p:cNvSpPr>
+          <p:nvPr>
+            <p:ph type="body" idx="3" sz="quarter"/>
+          </p:nvPr>
+        </p:nvSpPr>
+        <p:spPr/>
+        <p:txBody>
+          <a:bodyPr/>
+          <a:lstStyle/>
+          <a:p>
+            <a:r>
+              <a:t>Answers:</a:t>
+            </a:r>
+          </a:p>
+          <a:p>
+            <a:r>
+              <a:t>1. Did we build it right?</a:t>
+            </a:r>
+          </a:p>
+          <a:p>
+            <a:r>
+              <a:t>2. Did we build the right thing?</a:t>
+            </a:r>
+          </a:p>
+          <a:p>
+            <a:r>
+              <a:t>3. E.g. user testing.</a:t>
+            </a:r>
+          </a:p>
+        </p:txBody>
+      </p:sp>
+      <p:sp>
+        <p:nvSpPr>
+          <p:cNvPr id="4" name="Slide Number Placeholder 3"/>
+          <p:cNvSpPr>
+            <a:spLocks noGrp="1"/>
+          </p:cNvSpPr>
+          <p:nvPr>
+            <p:ph type="sldNum" idx="5" sz="quarter"/>
+          </p:nvPr>
+        </p:nvSpPr>
+        <p:spPr/>
+      </p:sp>
+    </p:spTree>
+  </p:cSld>
+  <p:clrMapOvr>
+    <a:masterClrMapping/>
+  </p:clrMapOvr>
+</p:notes>
+</file>
+
+<file path=ppt/notesSlides/notesSlide5.xml><?xml version="1.0" encoding="utf-8"?>
+<p:notes xmlns:a="http://schemas.openxmlformats.org/drawingml/2006/main" xmlns:p="http://schemas.openxmlformats.org/presentationml/2006/main" xmlns:r="http://schemas.openxmlformats.org/officeDocument/2006/relationships">
+  <p:cSld>
+    <p:spTree>
+      <p:nvGrpSpPr>
+        <p:cNvPr id="1" name=""/>
+        <p:cNvGrpSpPr/>
+        <p:nvPr/>
+      </p:nvGrpSpPr>
+      <p:grpSpPr>
+        <a:xfrm>
+          <a:off x="0" y="0"/>
+          <a:ext cx="0" cy="0"/>
+          <a:chOff x="0" y="0"/>
+          <a:chExt cx="0" cy="0"/>
+        </a:xfrm>
+      </p:grpSpPr>
+      <p:sp>
+        <p:nvSpPr>
+          <p:cNvPr id="2" name="Slide Image Placeholder 1"/>
+          <p:cNvSpPr>
+            <a:spLocks noGrp="1"/>
+          </p:cNvSpPr>
+          <p:nvPr>
+            <p:ph type="sldImg" idx="2"/>
+          </p:nvPr>
+        </p:nvSpPr>
+        <p:spPr/>
+      </p:sp>
+      <p:sp>
+        <p:nvSpPr>
+          <p:cNvPr id="3" name="Notes Placeholder 2"/>
+          <p:cNvSpPr>
+            <a:spLocks noGrp="1"/>
+          </p:cNvSpPr>
+          <p:nvPr>
+            <p:ph type="body" idx="3" sz="quarter"/>
+          </p:nvPr>
+        </p:nvSpPr>
+        <p:spPr/>
+        <p:txBody>
+          <a:bodyPr/>
+          <a:lstStyle/>
+          <a:p>
+            <a:r>
+              <a:t>Give students a few minutes to answer on mini whiteboards or paper, then reveal the answers on the next slide.</a:t>
+            </a:r>
+          </a:p>
+        </p:txBody>
+      </p:sp>
+      <p:sp>
+        <p:nvSpPr>
+          <p:cNvPr id="4" name="Slide Number Placeholder 3"/>
+          <p:cNvSpPr>
+            <a:spLocks noGrp="1"/>
+          </p:cNvSpPr>
+          <p:nvPr>
+            <p:ph type="sldNum" idx="5" sz="quarter"/>
+          </p:nvPr>
+        </p:nvSpPr>
+        <p:spPr/>
+      </p:sp>
+    </p:spTree>
+  </p:cSld>
+  <p:clrMapOvr>
+    <a:masterClrMapping/>
+  </p:clrMapOvr>
+</p:notes>
+</file>
+
+<file path=ppt/notesSlides/notesSlide6.xml><?xml version="1.0" encoding="utf-8"?>
+<p:notes xmlns:a="http://schemas.openxmlformats.org/drawingml/2006/main" xmlns:p="http://schemas.openxmlformats.org/presentationml/2006/main" xmlns:r="http://schemas.openxmlformats.org/officeDocument/2006/relationships">
+  <p:cSld>
+    <p:spTree>
+      <p:nvGrpSpPr>
+        <p:cNvPr id="1" name=""/>
+        <p:cNvGrpSpPr/>
+        <p:nvPr/>
+      </p:nvGrpSpPr>
+      <p:grpSpPr>
+        <a:xfrm>
+          <a:off x="0" y="0"/>
+          <a:ext cx="0" cy="0"/>
+          <a:chOff x="0" y="0"/>
+          <a:chExt cx="0" cy="0"/>
+        </a:xfrm>
+      </p:grpSpPr>
+      <p:sp>
+        <p:nvSpPr>
+          <p:cNvPr id="2" name="Slide Image Placeholder 1"/>
+          <p:cNvSpPr>
+            <a:spLocks noGrp="1"/>
+          </p:cNvSpPr>
+          <p:nvPr>
+            <p:ph type="sldImg" idx="2"/>
+          </p:nvPr>
+        </p:nvSpPr>
+        <p:spPr/>
+      </p:sp>
+      <p:sp>
+        <p:nvSpPr>
+          <p:cNvPr id="3" name="Notes Placeholder 2"/>
+          <p:cNvSpPr>
+            <a:spLocks noGrp="1"/>
+          </p:cNvSpPr>
+          <p:nvPr>
+            <p:ph type="body" idx="3" sz="quarter"/>
+          </p:nvPr>
+        </p:nvSpPr>
+        <p:spPr/>
+        <p:txBody>
+          <a:bodyPr/>
+          <a:lstStyle/>
+          <a:p>
+            <a:r>
+              <a:t>Talk through any answers the class found difficult.</a:t>
+            </a:r>
+          </a:p>
+        </p:txBody>
+      </p:sp>
+      <p:sp>
+        <p:nvSpPr>
+          <p:cNvPr id="4" name="Slide Number Placeholder 3"/>
+          <p:cNvSpPr>
+            <a:spLocks noGrp="1"/>
+          </p:cNvSpPr>
+          <p:nvPr>
+            <p:ph type="sldNum" idx="5" sz="quarter"/>
+          </p:nvPr>
+        </p:nvSpPr>
+        <p:spPr/>
+      </p:sp>
+    </p:spTree>
+  </p:cSld>
+  <p:clrMapOvr>
+    <a:masterClrMapping/>
+  </p:clrMapOvr>
+</p:notes>
+</file>
+
+<file path=ppt/notesSlides/notesSlide7.xml><?xml version="1.0" encoding="utf-8"?>
 <p:notes xmlns:a="http://schemas.openxmlformats.org/drawingml/2006/main" xmlns:p="http://schemas.openxmlformats.org/presentationml/2006/main" xmlns:r="http://schemas.openxmlformats.org/officeDocument/2006/relationships">
   <p:cSld>
     <p:spTree>
@@ -4045,6 +4306,3376 @@
 </p:sld>
 </file>
 
+<file path=ppt/slides/slide10.xml><?xml version="1.0" encoding="utf-8"?>
+<p:sld xmlns:a="http://schemas.openxmlformats.org/drawingml/2006/main" xmlns:p="http://schemas.openxmlformats.org/presentationml/2006/main" xmlns:r="http://schemas.openxmlformats.org/officeDocument/2006/relationships">
+  <p:cSld>
+    <p:bg>
+      <p:bgPr>
+        <a:solidFill>
+          <a:srgbClr val="FFFFFF"/>
+        </a:solidFill>
+        <a:effectLst/>
+      </p:bgPr>
+    </p:bg>
+    <p:spTree>
+      <p:nvGrpSpPr>
+        <p:cNvPr id="1" name=""/>
+        <p:cNvGrpSpPr/>
+        <p:nvPr/>
+      </p:nvGrpSpPr>
+      <p:grpSpPr/>
+      <p:sp>
+        <p:nvSpPr>
+          <p:cNvPr id="2" name="TextBox 1"/>
+          <p:cNvSpPr txBox="1"/>
+          <p:nvPr/>
+        </p:nvSpPr>
+        <p:spPr>
+          <a:xfrm>
+            <a:off x="548640" y="320040"/>
+            <a:ext cx="11094415" cy="274320"/>
+          </a:xfrm>
+          <a:prstGeom prst="rect">
+            <a:avLst/>
+          </a:prstGeom>
+          <a:noFill/>
+        </p:spPr>
+        <p:txBody>
+          <a:bodyPr wrap="square" anchor="t" lIns="0" rIns="0" tIns="0" bIns="0"/>
+          <a:lstStyle/>
+          <a:p>
+            <a:pPr algn="l"/>
+            <a:r>
+              <a:rPr sz="1100" b="1" i="0">
+                <a:solidFill>
+                  <a:srgbClr val="54595D"/>
+                </a:solidFill>
+                <a:latin typeface="Calibri"/>
+              </a:rPr>
+              <a:t>MECHANICAL ENGINEERING  ·  Mechanical: Knowledge criteria</a:t>
+            </a:r>
+          </a:p>
+        </p:txBody>
+      </p:sp>
+      <p:sp>
+        <p:nvSpPr>
+          <p:cNvPr id="3" name="TextBox 2"/>
+          <p:cNvSpPr txBox="1"/>
+          <p:nvPr/>
+        </p:nvSpPr>
+        <p:spPr>
+          <a:xfrm>
+            <a:off x="548640" y="566928"/>
+            <a:ext cx="11094415" cy="822960"/>
+          </a:xfrm>
+          <a:prstGeom prst="rect">
+            <a:avLst/>
+          </a:prstGeom>
+          <a:noFill/>
+        </p:spPr>
+        <p:txBody>
+          <a:bodyPr wrap="square" anchor="ctr" lIns="0" rIns="0" tIns="0" bIns="0"/>
+          <a:lstStyle/>
+          <a:p>
+            <a:pPr algn="l"/>
+            <a:r>
+              <a:rPr sz="3200" b="1" i="0">
+                <a:solidFill>
+                  <a:srgbClr val="03306E"/>
+                </a:solidFill>
+                <a:latin typeface="Cambria"/>
+              </a:rPr>
+              <a:t>Verification and validation</a:t>
+            </a:r>
+          </a:p>
+        </p:txBody>
+      </p:sp>
+      <p:sp>
+        <p:nvSpPr>
+          <p:cNvPr id="4" name="TextBox 3"/>
+          <p:cNvSpPr txBox="1"/>
+          <p:nvPr/>
+        </p:nvSpPr>
+        <p:spPr>
+          <a:xfrm>
+            <a:off x="548640" y="6446520"/>
+            <a:ext cx="8229600" cy="274320"/>
+          </a:xfrm>
+          <a:prstGeom prst="rect">
+            <a:avLst/>
+          </a:prstGeom>
+          <a:noFill/>
+        </p:spPr>
+        <p:txBody>
+          <a:bodyPr wrap="square" anchor="t" lIns="0" rIns="0" tIns="0" bIns="0"/>
+          <a:lstStyle/>
+          <a:p>
+            <a:pPr algn="l"/>
+            <a:r>
+              <a:rPr sz="1000" b="0" i="0">
+                <a:solidFill>
+                  <a:srgbClr val="54595D"/>
+                </a:solidFill>
+                <a:latin typeface="Calibri"/>
+              </a:rPr>
+              <a:t>Design and Development for Engineering and Manufacturing T Level  ·  Design Principles, Methodologies and Verification</a:t>
+            </a:r>
+          </a:p>
+        </p:txBody>
+      </p:sp>
+      <p:sp>
+        <p:nvSpPr>
+          <p:cNvPr id="5" name="TextBox 4"/>
+          <p:cNvSpPr txBox="1"/>
+          <p:nvPr/>
+        </p:nvSpPr>
+        <p:spPr>
+          <a:xfrm>
+            <a:off x="10728655" y="6446520"/>
+            <a:ext cx="914400" cy="274320"/>
+          </a:xfrm>
+          <a:prstGeom prst="rect">
+            <a:avLst/>
+          </a:prstGeom>
+          <a:noFill/>
+        </p:spPr>
+        <p:txBody>
+          <a:bodyPr wrap="square" anchor="t" lIns="0" rIns="0" tIns="0" bIns="0"/>
+          <a:lstStyle/>
+          <a:p>
+            <a:pPr algn="r"/>
+            <a:r>
+              <a:rPr sz="1000" b="0" i="0">
+                <a:solidFill>
+                  <a:srgbClr val="54595D"/>
+                </a:solidFill>
+                <a:latin typeface="Calibri"/>
+              </a:rPr>
+              <a:t>10</a:t>
+            </a:r>
+          </a:p>
+        </p:txBody>
+      </p:sp>
+      <p:sp>
+        <p:nvSpPr>
+          <p:cNvPr id="6" name="Rounded Rectangle 5"/>
+          <p:cNvSpPr/>
+          <p:nvPr/>
+        </p:nvSpPr>
+        <p:spPr>
+          <a:xfrm>
+            <a:off x="548640" y="1600200"/>
+            <a:ext cx="5364327" cy="640080"/>
+          </a:xfrm>
+          <a:prstGeom prst="roundRect">
+            <a:avLst>
+              <a:gd name="adj" fmla="val 15000"/>
+            </a:avLst>
+          </a:prstGeom>
+          <a:solidFill>
+            <a:srgbClr val="03306E"/>
+          </a:solidFill>
+          <a:ln>
+            <a:noFill/>
+          </a:ln>
+          <a:effectLst/>
+        </p:spPr>
+        <p:style>
+          <a:lnRef idx="1">
+            <a:schemeClr val="accent1"/>
+          </a:lnRef>
+          <a:fillRef idx="3">
+            <a:schemeClr val="accent1"/>
+          </a:fillRef>
+          <a:effectRef idx="2">
+            <a:schemeClr val="accent1"/>
+          </a:effectRef>
+          <a:fontRef idx="minor">
+            <a:schemeClr val="lt1"/>
+          </a:fontRef>
+        </p:style>
+        <p:txBody>
+          <a:bodyPr rtlCol="0" anchor="ctr"/>
+          <a:lstStyle/>
+          <a:p/>
+        </p:txBody>
+      </p:sp>
+      <p:sp>
+        <p:nvSpPr>
+          <p:cNvPr id="7" name="TextBox 6"/>
+          <p:cNvSpPr txBox="1"/>
+          <p:nvPr/>
+        </p:nvSpPr>
+        <p:spPr>
+          <a:xfrm>
+            <a:off x="777240" y="1600200"/>
+            <a:ext cx="4907127" cy="640080"/>
+          </a:xfrm>
+          <a:prstGeom prst="rect">
+            <a:avLst/>
+          </a:prstGeom>
+          <a:noFill/>
+        </p:spPr>
+        <p:txBody>
+          <a:bodyPr wrap="square" anchor="ctr" lIns="0" rIns="0" tIns="0" bIns="0"/>
+          <a:lstStyle/>
+          <a:p>
+            <a:pPr algn="l"/>
+            <a:r>
+              <a:rPr sz="2000" b="1" i="0">
+                <a:solidFill>
+                  <a:srgbClr val="FFFFFF"/>
+                </a:solidFill>
+                <a:latin typeface="Calibri"/>
+              </a:rPr>
+              <a:t>Verification</a:t>
+            </a:r>
+          </a:p>
+        </p:txBody>
+      </p:sp>
+      <p:sp>
+        <p:nvSpPr>
+          <p:cNvPr id="8" name="Rounded Rectangle 7"/>
+          <p:cNvSpPr/>
+          <p:nvPr/>
+        </p:nvSpPr>
+        <p:spPr>
+          <a:xfrm>
+            <a:off x="548640" y="2377440"/>
+            <a:ext cx="5364327" cy="3794760"/>
+          </a:xfrm>
+          <a:prstGeom prst="roundRect">
+            <a:avLst>
+              <a:gd name="adj" fmla="val 4000"/>
+            </a:avLst>
+          </a:prstGeom>
+          <a:solidFill>
+            <a:srgbClr val="EAF3FF"/>
+          </a:solidFill>
+          <a:ln>
+            <a:noFill/>
+          </a:ln>
+          <a:effectLst/>
+        </p:spPr>
+        <p:style>
+          <a:lnRef idx="1">
+            <a:schemeClr val="accent1"/>
+          </a:lnRef>
+          <a:fillRef idx="3">
+            <a:schemeClr val="accent1"/>
+          </a:fillRef>
+          <a:effectRef idx="2">
+            <a:schemeClr val="accent1"/>
+          </a:effectRef>
+          <a:fontRef idx="minor">
+            <a:schemeClr val="lt1"/>
+          </a:fontRef>
+        </p:style>
+        <p:txBody>
+          <a:bodyPr rtlCol="0" anchor="ctr"/>
+          <a:lstStyle/>
+          <a:p/>
+        </p:txBody>
+      </p:sp>
+      <p:sp>
+        <p:nvSpPr>
+          <p:cNvPr id="9" name="TextBox 8"/>
+          <p:cNvSpPr txBox="1"/>
+          <p:nvPr/>
+        </p:nvSpPr>
+        <p:spPr>
+          <a:xfrm>
+            <a:off x="822959" y="2606040"/>
+            <a:ext cx="4815687" cy="3337560"/>
+          </a:xfrm>
+          <a:prstGeom prst="rect">
+            <a:avLst/>
+          </a:prstGeom>
+          <a:noFill/>
+        </p:spPr>
+        <p:txBody>
+          <a:bodyPr wrap="square" lIns="0" rIns="0" tIns="0" bIns="0">
+            <a:spAutoFit/>
+          </a:bodyPr>
+          <a:lstStyle/>
+          <a:p>
+            <a:pPr marL="274320" indent="-274320">
+              <a:spcAft>
+                <a:spcPts val="990"/>
+              </a:spcAft>
+              <a:buClr>
+                <a:srgbClr val="0645AD"/>
+              </a:buClr>
+              <a:buFont typeface="Arial"/>
+              <a:buChar char="•"/>
+            </a:pPr>
+            <a:r>
+              <a:rPr sz="2200" b="0">
+                <a:solidFill>
+                  <a:srgbClr val="202122"/>
+                </a:solidFill>
+                <a:latin typeface="Calibri"/>
+              </a:rPr>
+              <a:t>Did we build it right?</a:t>
+            </a:r>
+          </a:p>
+          <a:p>
+            <a:pPr marL="274320" indent="-274320">
+              <a:spcAft>
+                <a:spcPts val="990"/>
+              </a:spcAft>
+              <a:buClr>
+                <a:srgbClr val="0645AD"/>
+              </a:buClr>
+              <a:buFont typeface="Arial"/>
+              <a:buChar char="•"/>
+            </a:pPr>
+            <a:r>
+              <a:rPr sz="2200" b="0">
+                <a:solidFill>
+                  <a:srgbClr val="202122"/>
+                </a:solidFill>
+                <a:latin typeface="Calibri"/>
+              </a:rPr>
+              <a:t>Checks the design against the specification</a:t>
+            </a:r>
+          </a:p>
+          <a:p>
+            <a:pPr marL="274320" indent="-274320">
+              <a:spcAft>
+                <a:spcPts val="990"/>
+              </a:spcAft>
+              <a:buClr>
+                <a:srgbClr val="0645AD"/>
+              </a:buClr>
+              <a:buFont typeface="Arial"/>
+              <a:buChar char="•"/>
+            </a:pPr>
+            <a:r>
+              <a:rPr sz="2200" b="0">
+                <a:solidFill>
+                  <a:srgbClr val="202122"/>
+                </a:solidFill>
+                <a:latin typeface="Calibri"/>
+              </a:rPr>
+              <a:t>Comparison matrices, functional tests, measurement</a:t>
+            </a:r>
+          </a:p>
+        </p:txBody>
+      </p:sp>
+      <p:sp>
+        <p:nvSpPr>
+          <p:cNvPr id="10" name="Rounded Rectangle 9"/>
+          <p:cNvSpPr/>
+          <p:nvPr/>
+        </p:nvSpPr>
+        <p:spPr>
+          <a:xfrm>
+            <a:off x="6278727" y="1600200"/>
+            <a:ext cx="5364327" cy="640080"/>
+          </a:xfrm>
+          <a:prstGeom prst="roundRect">
+            <a:avLst>
+              <a:gd name="adj" fmla="val 15000"/>
+            </a:avLst>
+          </a:prstGeom>
+          <a:solidFill>
+            <a:srgbClr val="0645AD"/>
+          </a:solidFill>
+          <a:ln>
+            <a:noFill/>
+          </a:ln>
+          <a:effectLst/>
+        </p:spPr>
+        <p:style>
+          <a:lnRef idx="1">
+            <a:schemeClr val="accent1"/>
+          </a:lnRef>
+          <a:fillRef idx="3">
+            <a:schemeClr val="accent1"/>
+          </a:fillRef>
+          <a:effectRef idx="2">
+            <a:schemeClr val="accent1"/>
+          </a:effectRef>
+          <a:fontRef idx="minor">
+            <a:schemeClr val="lt1"/>
+          </a:fontRef>
+        </p:style>
+        <p:txBody>
+          <a:bodyPr rtlCol="0" anchor="ctr"/>
+          <a:lstStyle/>
+          <a:p/>
+        </p:txBody>
+      </p:sp>
+      <p:sp>
+        <p:nvSpPr>
+          <p:cNvPr id="11" name="TextBox 10"/>
+          <p:cNvSpPr txBox="1"/>
+          <p:nvPr/>
+        </p:nvSpPr>
+        <p:spPr>
+          <a:xfrm>
+            <a:off x="6507327" y="1600200"/>
+            <a:ext cx="4907127" cy="640080"/>
+          </a:xfrm>
+          <a:prstGeom prst="rect">
+            <a:avLst/>
+          </a:prstGeom>
+          <a:noFill/>
+        </p:spPr>
+        <p:txBody>
+          <a:bodyPr wrap="square" anchor="ctr" lIns="0" rIns="0" tIns="0" bIns="0"/>
+          <a:lstStyle/>
+          <a:p>
+            <a:pPr algn="l"/>
+            <a:r>
+              <a:rPr sz="2000" b="1" i="0">
+                <a:solidFill>
+                  <a:srgbClr val="FFFFFF"/>
+                </a:solidFill>
+                <a:latin typeface="Calibri"/>
+              </a:rPr>
+              <a:t>Validation</a:t>
+            </a:r>
+          </a:p>
+        </p:txBody>
+      </p:sp>
+      <p:sp>
+        <p:nvSpPr>
+          <p:cNvPr id="12" name="Rounded Rectangle 11"/>
+          <p:cNvSpPr/>
+          <p:nvPr/>
+        </p:nvSpPr>
+        <p:spPr>
+          <a:xfrm>
+            <a:off x="6278727" y="2377440"/>
+            <a:ext cx="5364327" cy="3794760"/>
+          </a:xfrm>
+          <a:prstGeom prst="roundRect">
+            <a:avLst>
+              <a:gd name="adj" fmla="val 4000"/>
+            </a:avLst>
+          </a:prstGeom>
+          <a:solidFill>
+            <a:srgbClr val="EAF3FF"/>
+          </a:solidFill>
+          <a:ln>
+            <a:noFill/>
+          </a:ln>
+          <a:effectLst/>
+        </p:spPr>
+        <p:style>
+          <a:lnRef idx="1">
+            <a:schemeClr val="accent1"/>
+          </a:lnRef>
+          <a:fillRef idx="3">
+            <a:schemeClr val="accent1"/>
+          </a:fillRef>
+          <a:effectRef idx="2">
+            <a:schemeClr val="accent1"/>
+          </a:effectRef>
+          <a:fontRef idx="minor">
+            <a:schemeClr val="lt1"/>
+          </a:fontRef>
+        </p:style>
+        <p:txBody>
+          <a:bodyPr rtlCol="0" anchor="ctr"/>
+          <a:lstStyle/>
+          <a:p/>
+        </p:txBody>
+      </p:sp>
+      <p:sp>
+        <p:nvSpPr>
+          <p:cNvPr id="13" name="TextBox 12"/>
+          <p:cNvSpPr txBox="1"/>
+          <p:nvPr/>
+        </p:nvSpPr>
+        <p:spPr>
+          <a:xfrm>
+            <a:off x="6553047" y="2606040"/>
+            <a:ext cx="4815687" cy="3337560"/>
+          </a:xfrm>
+          <a:prstGeom prst="rect">
+            <a:avLst/>
+          </a:prstGeom>
+          <a:noFill/>
+        </p:spPr>
+        <p:txBody>
+          <a:bodyPr wrap="square" lIns="0" rIns="0" tIns="0" bIns="0">
+            <a:spAutoFit/>
+          </a:bodyPr>
+          <a:lstStyle/>
+          <a:p>
+            <a:pPr marL="274320" indent="-274320">
+              <a:spcAft>
+                <a:spcPts val="990"/>
+              </a:spcAft>
+              <a:buClr>
+                <a:srgbClr val="0645AD"/>
+              </a:buClr>
+              <a:buFont typeface="Arial"/>
+              <a:buChar char="•"/>
+            </a:pPr>
+            <a:r>
+              <a:rPr sz="2200" b="0">
+                <a:solidFill>
+                  <a:srgbClr val="202122"/>
+                </a:solidFill>
+                <a:latin typeface="Calibri"/>
+              </a:rPr>
+              <a:t>Did we build the right thing?</a:t>
+            </a:r>
+          </a:p>
+          <a:p>
+            <a:pPr marL="274320" indent="-274320">
+              <a:spcAft>
+                <a:spcPts val="990"/>
+              </a:spcAft>
+              <a:buClr>
+                <a:srgbClr val="0645AD"/>
+              </a:buClr>
+              <a:buFont typeface="Arial"/>
+              <a:buChar char="•"/>
+            </a:pPr>
+            <a:r>
+              <a:rPr sz="2200" b="0">
+                <a:solidFill>
+                  <a:srgbClr val="202122"/>
+                </a:solidFill>
+                <a:latin typeface="Calibri"/>
+              </a:rPr>
+              <a:t>Checks it meets the user's real needs</a:t>
+            </a:r>
+          </a:p>
+          <a:p>
+            <a:pPr marL="274320" indent="-274320">
+              <a:spcAft>
+                <a:spcPts val="990"/>
+              </a:spcAft>
+              <a:buClr>
+                <a:srgbClr val="0645AD"/>
+              </a:buClr>
+              <a:buFont typeface="Arial"/>
+              <a:buChar char="•"/>
+            </a:pPr>
+            <a:r>
+              <a:rPr sz="2200" b="0">
+                <a:solidFill>
+                  <a:srgbClr val="202122"/>
+                </a:solidFill>
+                <a:latin typeface="Calibri"/>
+              </a:rPr>
+              <a:t>User testing, ranking, decision trees</a:t>
+            </a:r>
+          </a:p>
+        </p:txBody>
+      </p:sp>
+    </p:spTree>
+  </p:cSld>
+  <p:clrMapOvr>
+    <a:masterClrMapping/>
+  </p:clrMapOvr>
+</p:sld>
+</file>
+
+<file path=ppt/slides/slide11.xml><?xml version="1.0" encoding="utf-8"?>
+<p:sld xmlns:a="http://schemas.openxmlformats.org/drawingml/2006/main" xmlns:p="http://schemas.openxmlformats.org/presentationml/2006/main" xmlns:r="http://schemas.openxmlformats.org/officeDocument/2006/relationships">
+  <p:cSld>
+    <p:bg>
+      <p:bgPr>
+        <a:solidFill>
+          <a:srgbClr val="FFFFFF"/>
+        </a:solidFill>
+        <a:effectLst/>
+      </p:bgPr>
+    </p:bg>
+    <p:spTree>
+      <p:nvGrpSpPr>
+        <p:cNvPr id="1" name=""/>
+        <p:cNvGrpSpPr/>
+        <p:nvPr/>
+      </p:nvGrpSpPr>
+      <p:grpSpPr/>
+      <p:sp>
+        <p:nvSpPr>
+          <p:cNvPr id="2" name="TextBox 1"/>
+          <p:cNvSpPr txBox="1"/>
+          <p:nvPr/>
+        </p:nvSpPr>
+        <p:spPr>
+          <a:xfrm>
+            <a:off x="548640" y="320040"/>
+            <a:ext cx="11094415" cy="274320"/>
+          </a:xfrm>
+          <a:prstGeom prst="rect">
+            <a:avLst/>
+          </a:prstGeom>
+          <a:noFill/>
+        </p:spPr>
+        <p:txBody>
+          <a:bodyPr wrap="square" anchor="t" lIns="0" rIns="0" tIns="0" bIns="0"/>
+          <a:lstStyle/>
+          <a:p>
+            <a:pPr algn="l"/>
+            <a:r>
+              <a:rPr sz="1100" b="1" i="0">
+                <a:solidFill>
+                  <a:srgbClr val="54595D"/>
+                </a:solidFill>
+                <a:latin typeface="Calibri"/>
+              </a:rPr>
+              <a:t>MECHANICAL ENGINEERING  ·  Mechanical: Knowledge criteria</a:t>
+            </a:r>
+          </a:p>
+        </p:txBody>
+      </p:sp>
+      <p:sp>
+        <p:nvSpPr>
+          <p:cNvPr id="3" name="TextBox 2"/>
+          <p:cNvSpPr txBox="1"/>
+          <p:nvPr/>
+        </p:nvSpPr>
+        <p:spPr>
+          <a:xfrm>
+            <a:off x="548640" y="566928"/>
+            <a:ext cx="11094415" cy="822960"/>
+          </a:xfrm>
+          <a:prstGeom prst="rect">
+            <a:avLst/>
+          </a:prstGeom>
+          <a:noFill/>
+        </p:spPr>
+        <p:txBody>
+          <a:bodyPr wrap="square" anchor="ctr" lIns="0" rIns="0" tIns="0" bIns="0"/>
+          <a:lstStyle/>
+          <a:p>
+            <a:pPr algn="l"/>
+            <a:r>
+              <a:rPr sz="3200" b="1" i="0">
+                <a:solidFill>
+                  <a:srgbClr val="03306E"/>
+                </a:solidFill>
+                <a:latin typeface="Cambria"/>
+              </a:rPr>
+              <a:t>Quick check: Verification and validation</a:t>
+            </a:r>
+          </a:p>
+        </p:txBody>
+      </p:sp>
+      <p:sp>
+        <p:nvSpPr>
+          <p:cNvPr id="4" name="TextBox 3"/>
+          <p:cNvSpPr txBox="1"/>
+          <p:nvPr/>
+        </p:nvSpPr>
+        <p:spPr>
+          <a:xfrm>
+            <a:off x="548640" y="6446520"/>
+            <a:ext cx="8229600" cy="274320"/>
+          </a:xfrm>
+          <a:prstGeom prst="rect">
+            <a:avLst/>
+          </a:prstGeom>
+          <a:noFill/>
+        </p:spPr>
+        <p:txBody>
+          <a:bodyPr wrap="square" anchor="t" lIns="0" rIns="0" tIns="0" bIns="0"/>
+          <a:lstStyle/>
+          <a:p>
+            <a:pPr algn="l"/>
+            <a:r>
+              <a:rPr sz="1000" b="0" i="0">
+                <a:solidFill>
+                  <a:srgbClr val="54595D"/>
+                </a:solidFill>
+                <a:latin typeface="Calibri"/>
+              </a:rPr>
+              <a:t>Design and Development for Engineering and Manufacturing T Level  ·  Design Principles, Methodologies and Verification</a:t>
+            </a:r>
+          </a:p>
+        </p:txBody>
+      </p:sp>
+      <p:sp>
+        <p:nvSpPr>
+          <p:cNvPr id="5" name="TextBox 4"/>
+          <p:cNvSpPr txBox="1"/>
+          <p:nvPr/>
+        </p:nvSpPr>
+        <p:spPr>
+          <a:xfrm>
+            <a:off x="10728655" y="6446520"/>
+            <a:ext cx="914400" cy="274320"/>
+          </a:xfrm>
+          <a:prstGeom prst="rect">
+            <a:avLst/>
+          </a:prstGeom>
+          <a:noFill/>
+        </p:spPr>
+        <p:txBody>
+          <a:bodyPr wrap="square" anchor="t" lIns="0" rIns="0" tIns="0" bIns="0"/>
+          <a:lstStyle/>
+          <a:p>
+            <a:pPr algn="r"/>
+            <a:r>
+              <a:rPr sz="1000" b="0" i="0">
+                <a:solidFill>
+                  <a:srgbClr val="54595D"/>
+                </a:solidFill>
+                <a:latin typeface="Calibri"/>
+              </a:rPr>
+              <a:t>11</a:t>
+            </a:r>
+          </a:p>
+        </p:txBody>
+      </p:sp>
+      <p:sp>
+        <p:nvSpPr>
+          <p:cNvPr id="6" name="Oval 5"/>
+          <p:cNvSpPr/>
+          <p:nvPr/>
+        </p:nvSpPr>
+        <p:spPr>
+          <a:xfrm>
+            <a:off x="548640" y="1691640"/>
+            <a:ext cx="502920" cy="502920"/>
+          </a:xfrm>
+          <a:prstGeom prst="ellipse">
+            <a:avLst/>
+          </a:prstGeom>
+          <a:solidFill>
+            <a:srgbClr val="E0463A"/>
+          </a:solidFill>
+          <a:ln>
+            <a:noFill/>
+          </a:ln>
+          <a:effectLst/>
+        </p:spPr>
+        <p:style>
+          <a:lnRef idx="1">
+            <a:schemeClr val="accent1"/>
+          </a:lnRef>
+          <a:fillRef idx="3">
+            <a:schemeClr val="accent1"/>
+          </a:fillRef>
+          <a:effectRef idx="2">
+            <a:schemeClr val="accent1"/>
+          </a:effectRef>
+          <a:fontRef idx="minor">
+            <a:schemeClr val="lt1"/>
+          </a:fontRef>
+        </p:style>
+        <p:txBody>
+          <a:bodyPr rtlCol="0" anchor="ctr" lIns="0" rIns="0" tIns="0" bIns="0"/>
+          <a:lstStyle/>
+          <a:p>
+            <a:pPr algn="ctr"/>
+            <a:r>
+              <a:rPr sz="1600" b="1">
+                <a:solidFill>
+                  <a:srgbClr val="FFFFFF"/>
+                </a:solidFill>
+                <a:latin typeface="Calibri"/>
+              </a:rPr>
+              <a:t>1</a:t>
+            </a:r>
+          </a:p>
+        </p:txBody>
+      </p:sp>
+      <p:sp>
+        <p:nvSpPr>
+          <p:cNvPr id="7" name="TextBox 6"/>
+          <p:cNvSpPr txBox="1"/>
+          <p:nvPr/>
+        </p:nvSpPr>
+        <p:spPr>
+          <a:xfrm>
+            <a:off x="1371600" y="1645920"/>
+            <a:ext cx="10271455" cy="1188720"/>
+          </a:xfrm>
+          <a:prstGeom prst="rect">
+            <a:avLst/>
+          </a:prstGeom>
+          <a:noFill/>
+        </p:spPr>
+        <p:txBody>
+          <a:bodyPr wrap="square" anchor="t" lIns="0" rIns="0" tIns="0" bIns="0"/>
+          <a:lstStyle/>
+          <a:p>
+            <a:pPr algn="l"/>
+            <a:r>
+              <a:rPr sz="2400" b="0" i="0">
+                <a:solidFill>
+                  <a:srgbClr val="202122"/>
+                </a:solidFill>
+                <a:latin typeface="Calibri"/>
+              </a:rPr>
+              <a:t>What question does verification answer?</a:t>
+            </a:r>
+          </a:p>
+        </p:txBody>
+      </p:sp>
+      <p:sp>
+        <p:nvSpPr>
+          <p:cNvPr id="8" name="Oval 7"/>
+          <p:cNvSpPr/>
+          <p:nvPr/>
+        </p:nvSpPr>
+        <p:spPr>
+          <a:xfrm>
+            <a:off x="548640" y="3108960"/>
+            <a:ext cx="502920" cy="502920"/>
+          </a:xfrm>
+          <a:prstGeom prst="ellipse">
+            <a:avLst/>
+          </a:prstGeom>
+          <a:solidFill>
+            <a:srgbClr val="E0463A"/>
+          </a:solidFill>
+          <a:ln>
+            <a:noFill/>
+          </a:ln>
+          <a:effectLst/>
+        </p:spPr>
+        <p:style>
+          <a:lnRef idx="1">
+            <a:schemeClr val="accent1"/>
+          </a:lnRef>
+          <a:fillRef idx="3">
+            <a:schemeClr val="accent1"/>
+          </a:fillRef>
+          <a:effectRef idx="2">
+            <a:schemeClr val="accent1"/>
+          </a:effectRef>
+          <a:fontRef idx="minor">
+            <a:schemeClr val="lt1"/>
+          </a:fontRef>
+        </p:style>
+        <p:txBody>
+          <a:bodyPr rtlCol="0" anchor="ctr" lIns="0" rIns="0" tIns="0" bIns="0"/>
+          <a:lstStyle/>
+          <a:p>
+            <a:pPr algn="ctr"/>
+            <a:r>
+              <a:rPr sz="1600" b="1">
+                <a:solidFill>
+                  <a:srgbClr val="FFFFFF"/>
+                </a:solidFill>
+                <a:latin typeface="Calibri"/>
+              </a:rPr>
+              <a:t>2</a:t>
+            </a:r>
+          </a:p>
+        </p:txBody>
+      </p:sp>
+      <p:sp>
+        <p:nvSpPr>
+          <p:cNvPr id="9" name="TextBox 8"/>
+          <p:cNvSpPr txBox="1"/>
+          <p:nvPr/>
+        </p:nvSpPr>
+        <p:spPr>
+          <a:xfrm>
+            <a:off x="1371600" y="3063240"/>
+            <a:ext cx="10271455" cy="1188720"/>
+          </a:xfrm>
+          <a:prstGeom prst="rect">
+            <a:avLst/>
+          </a:prstGeom>
+          <a:noFill/>
+        </p:spPr>
+        <p:txBody>
+          <a:bodyPr wrap="square" anchor="t" lIns="0" rIns="0" tIns="0" bIns="0"/>
+          <a:lstStyle/>
+          <a:p>
+            <a:pPr algn="l"/>
+            <a:r>
+              <a:rPr sz="2400" b="0" i="0">
+                <a:solidFill>
+                  <a:srgbClr val="202122"/>
+                </a:solidFill>
+                <a:latin typeface="Calibri"/>
+              </a:rPr>
+              <a:t>What question does validation answer?</a:t>
+            </a:r>
+          </a:p>
+        </p:txBody>
+      </p:sp>
+      <p:sp>
+        <p:nvSpPr>
+          <p:cNvPr id="10" name="Oval 9"/>
+          <p:cNvSpPr/>
+          <p:nvPr/>
+        </p:nvSpPr>
+        <p:spPr>
+          <a:xfrm>
+            <a:off x="548640" y="4526280"/>
+            <a:ext cx="502920" cy="502920"/>
+          </a:xfrm>
+          <a:prstGeom prst="ellipse">
+            <a:avLst/>
+          </a:prstGeom>
+          <a:solidFill>
+            <a:srgbClr val="E0463A"/>
+          </a:solidFill>
+          <a:ln>
+            <a:noFill/>
+          </a:ln>
+          <a:effectLst/>
+        </p:spPr>
+        <p:style>
+          <a:lnRef idx="1">
+            <a:schemeClr val="accent1"/>
+          </a:lnRef>
+          <a:fillRef idx="3">
+            <a:schemeClr val="accent1"/>
+          </a:fillRef>
+          <a:effectRef idx="2">
+            <a:schemeClr val="accent1"/>
+          </a:effectRef>
+          <a:fontRef idx="minor">
+            <a:schemeClr val="lt1"/>
+          </a:fontRef>
+        </p:style>
+        <p:txBody>
+          <a:bodyPr rtlCol="0" anchor="ctr" lIns="0" rIns="0" tIns="0" bIns="0"/>
+          <a:lstStyle/>
+          <a:p>
+            <a:pPr algn="ctr"/>
+            <a:r>
+              <a:rPr sz="1600" b="1">
+                <a:solidFill>
+                  <a:srgbClr val="FFFFFF"/>
+                </a:solidFill>
+                <a:latin typeface="Calibri"/>
+              </a:rPr>
+              <a:t>3</a:t>
+            </a:r>
+          </a:p>
+        </p:txBody>
+      </p:sp>
+      <p:sp>
+        <p:nvSpPr>
+          <p:cNvPr id="11" name="TextBox 10"/>
+          <p:cNvSpPr txBox="1"/>
+          <p:nvPr/>
+        </p:nvSpPr>
+        <p:spPr>
+          <a:xfrm>
+            <a:off x="1371600" y="4480560"/>
+            <a:ext cx="10271455" cy="1188720"/>
+          </a:xfrm>
+          <a:prstGeom prst="rect">
+            <a:avLst/>
+          </a:prstGeom>
+          <a:noFill/>
+        </p:spPr>
+        <p:txBody>
+          <a:bodyPr wrap="square" anchor="t" lIns="0" rIns="0" tIns="0" bIns="0"/>
+          <a:lstStyle/>
+          <a:p>
+            <a:pPr algn="l"/>
+            <a:r>
+              <a:rPr sz="2400" b="0" i="0">
+                <a:solidFill>
+                  <a:srgbClr val="202122"/>
+                </a:solidFill>
+                <a:latin typeface="Calibri"/>
+              </a:rPr>
+              <a:t>Give one validation method.</a:t>
+            </a:r>
+          </a:p>
+        </p:txBody>
+      </p:sp>
+      <p:sp>
+        <p:nvSpPr>
+          <p:cNvPr id="12" name="TextBox 11"/>
+          <p:cNvSpPr txBox="1"/>
+          <p:nvPr/>
+        </p:nvSpPr>
+        <p:spPr>
+          <a:xfrm>
+            <a:off x="548640" y="5852160"/>
+            <a:ext cx="11094415" cy="365760"/>
+          </a:xfrm>
+          <a:prstGeom prst="rect">
+            <a:avLst/>
+          </a:prstGeom>
+          <a:noFill/>
+        </p:spPr>
+        <p:txBody>
+          <a:bodyPr wrap="square" anchor="t" lIns="0" rIns="0" tIns="0" bIns="0"/>
+          <a:lstStyle/>
+          <a:p>
+            <a:pPr algn="l"/>
+            <a:r>
+              <a:rPr sz="1300" b="0" i="1">
+                <a:solidFill>
+                  <a:srgbClr val="54595D"/>
+                </a:solidFill>
+                <a:latin typeface="Calibri"/>
+              </a:rPr>
+              <a:t>Answer on mini whiteboards or in your book. Answers are in the speaker notes.</a:t>
+            </a:r>
+          </a:p>
+        </p:txBody>
+      </p:sp>
+    </p:spTree>
+  </p:cSld>
+  <p:clrMapOvr>
+    <a:masterClrMapping/>
+  </p:clrMapOvr>
+</p:sld>
+</file>
+
+<file path=ppt/slides/slide12.xml><?xml version="1.0" encoding="utf-8"?>
+<p:sld xmlns:a="http://schemas.openxmlformats.org/drawingml/2006/main" xmlns:p="http://schemas.openxmlformats.org/presentationml/2006/main" xmlns:r="http://schemas.openxmlformats.org/officeDocument/2006/relationships">
+  <p:cSld>
+    <p:bg>
+      <p:bgPr>
+        <a:solidFill>
+          <a:srgbClr val="FFFFFF"/>
+        </a:solidFill>
+        <a:effectLst/>
+      </p:bgPr>
+    </p:bg>
+    <p:spTree>
+      <p:nvGrpSpPr>
+        <p:cNvPr id="1" name=""/>
+        <p:cNvGrpSpPr/>
+        <p:nvPr/>
+      </p:nvGrpSpPr>
+      <p:grpSpPr/>
+      <p:sp>
+        <p:nvSpPr>
+          <p:cNvPr id="2" name="TextBox 1"/>
+          <p:cNvSpPr txBox="1"/>
+          <p:nvPr/>
+        </p:nvSpPr>
+        <p:spPr>
+          <a:xfrm>
+            <a:off x="548640" y="320040"/>
+            <a:ext cx="11094415" cy="274320"/>
+          </a:xfrm>
+          <a:prstGeom prst="rect">
+            <a:avLst/>
+          </a:prstGeom>
+          <a:noFill/>
+        </p:spPr>
+        <p:txBody>
+          <a:bodyPr wrap="square" anchor="t" lIns="0" rIns="0" tIns="0" bIns="0"/>
+          <a:lstStyle/>
+          <a:p>
+            <a:pPr algn="l"/>
+            <a:r>
+              <a:rPr sz="1100" b="1" i="0">
+                <a:solidFill>
+                  <a:srgbClr val="54595D"/>
+                </a:solidFill>
+                <a:latin typeface="Calibri"/>
+              </a:rPr>
+              <a:t>MECHANICAL ENGINEERING  ·  Mechanical: Knowledge criteria</a:t>
+            </a:r>
+          </a:p>
+        </p:txBody>
+      </p:sp>
+      <p:sp>
+        <p:nvSpPr>
+          <p:cNvPr id="3" name="TextBox 2"/>
+          <p:cNvSpPr txBox="1"/>
+          <p:nvPr/>
+        </p:nvSpPr>
+        <p:spPr>
+          <a:xfrm>
+            <a:off x="548640" y="566928"/>
+            <a:ext cx="11094415" cy="822960"/>
+          </a:xfrm>
+          <a:prstGeom prst="rect">
+            <a:avLst/>
+          </a:prstGeom>
+          <a:noFill/>
+        </p:spPr>
+        <p:txBody>
+          <a:bodyPr wrap="square" anchor="ctr" lIns="0" rIns="0" tIns="0" bIns="0"/>
+          <a:lstStyle/>
+          <a:p>
+            <a:pPr algn="l"/>
+            <a:r>
+              <a:rPr sz="3200" b="1" i="0">
+                <a:solidFill>
+                  <a:srgbClr val="03306E"/>
+                </a:solidFill>
+                <a:latin typeface="Cambria"/>
+              </a:rPr>
+              <a:t>Check your understanding</a:t>
+            </a:r>
+          </a:p>
+        </p:txBody>
+      </p:sp>
+      <p:sp>
+        <p:nvSpPr>
+          <p:cNvPr id="4" name="TextBox 3"/>
+          <p:cNvSpPr txBox="1"/>
+          <p:nvPr/>
+        </p:nvSpPr>
+        <p:spPr>
+          <a:xfrm>
+            <a:off x="548640" y="6446520"/>
+            <a:ext cx="8229600" cy="274320"/>
+          </a:xfrm>
+          <a:prstGeom prst="rect">
+            <a:avLst/>
+          </a:prstGeom>
+          <a:noFill/>
+        </p:spPr>
+        <p:txBody>
+          <a:bodyPr wrap="square" anchor="t" lIns="0" rIns="0" tIns="0" bIns="0"/>
+          <a:lstStyle/>
+          <a:p>
+            <a:pPr algn="l"/>
+            <a:r>
+              <a:rPr sz="1000" b="0" i="0">
+                <a:solidFill>
+                  <a:srgbClr val="54595D"/>
+                </a:solidFill>
+                <a:latin typeface="Calibri"/>
+              </a:rPr>
+              <a:t>Design and Development for Engineering and Manufacturing T Level  ·  Design Principles, Methodologies and Verification</a:t>
+            </a:r>
+          </a:p>
+        </p:txBody>
+      </p:sp>
+      <p:sp>
+        <p:nvSpPr>
+          <p:cNvPr id="5" name="TextBox 4"/>
+          <p:cNvSpPr txBox="1"/>
+          <p:nvPr/>
+        </p:nvSpPr>
+        <p:spPr>
+          <a:xfrm>
+            <a:off x="10728655" y="6446520"/>
+            <a:ext cx="914400" cy="274320"/>
+          </a:xfrm>
+          <a:prstGeom prst="rect">
+            <a:avLst/>
+          </a:prstGeom>
+          <a:noFill/>
+        </p:spPr>
+        <p:txBody>
+          <a:bodyPr wrap="square" anchor="t" lIns="0" rIns="0" tIns="0" bIns="0"/>
+          <a:lstStyle/>
+          <a:p>
+            <a:pPr algn="r"/>
+            <a:r>
+              <a:rPr sz="1000" b="0" i="0">
+                <a:solidFill>
+                  <a:srgbClr val="54595D"/>
+                </a:solidFill>
+                <a:latin typeface="Calibri"/>
+              </a:rPr>
+              <a:t>12</a:t>
+            </a:r>
+          </a:p>
+        </p:txBody>
+      </p:sp>
+      <p:sp>
+        <p:nvSpPr>
+          <p:cNvPr id="6" name="Oval 5"/>
+          <p:cNvSpPr/>
+          <p:nvPr/>
+        </p:nvSpPr>
+        <p:spPr>
+          <a:xfrm>
+            <a:off x="548640" y="1618488"/>
+            <a:ext cx="411480" cy="411480"/>
+          </a:xfrm>
+          <a:prstGeom prst="ellipse">
+            <a:avLst/>
+          </a:prstGeom>
+          <a:solidFill>
+            <a:srgbClr val="E0463A"/>
+          </a:solidFill>
+          <a:ln>
+            <a:noFill/>
+          </a:ln>
+          <a:effectLst/>
+        </p:spPr>
+        <p:style>
+          <a:lnRef idx="1">
+            <a:schemeClr val="accent1"/>
+          </a:lnRef>
+          <a:fillRef idx="3">
+            <a:schemeClr val="accent1"/>
+          </a:fillRef>
+          <a:effectRef idx="2">
+            <a:schemeClr val="accent1"/>
+          </a:effectRef>
+          <a:fontRef idx="minor">
+            <a:schemeClr val="lt1"/>
+          </a:fontRef>
+        </p:style>
+        <p:txBody>
+          <a:bodyPr rtlCol="0" anchor="ctr" lIns="0" rIns="0" tIns="0" bIns="0"/>
+          <a:lstStyle/>
+          <a:p>
+            <a:pPr algn="ctr"/>
+            <a:r>
+              <a:rPr sz="1400" b="1">
+                <a:solidFill>
+                  <a:srgbClr val="FFFFFF"/>
+                </a:solidFill>
+                <a:latin typeface="Calibri"/>
+              </a:rPr>
+              <a:t>1</a:t>
+            </a:r>
+          </a:p>
+        </p:txBody>
+      </p:sp>
+      <p:sp>
+        <p:nvSpPr>
+          <p:cNvPr id="7" name="TextBox 6"/>
+          <p:cNvSpPr txBox="1"/>
+          <p:nvPr/>
+        </p:nvSpPr>
+        <p:spPr>
+          <a:xfrm>
+            <a:off x="1234440" y="1600200"/>
+            <a:ext cx="10408615" cy="1030986"/>
+          </a:xfrm>
+          <a:prstGeom prst="rect">
+            <a:avLst/>
+          </a:prstGeom>
+          <a:noFill/>
+        </p:spPr>
+        <p:txBody>
+          <a:bodyPr wrap="square" anchor="t" lIns="0" rIns="0" tIns="0" bIns="0"/>
+          <a:lstStyle/>
+          <a:p>
+            <a:pPr algn="l"/>
+            <a:r>
+              <a:rPr sz="2200" b="0" i="0">
+                <a:solidFill>
+                  <a:srgbClr val="202122"/>
+                </a:solidFill>
+                <a:latin typeface="Calibri"/>
+              </a:rPr>
+              <a:t>Name three ways to identify client requirements.</a:t>
+            </a:r>
+          </a:p>
+        </p:txBody>
+      </p:sp>
+      <p:sp>
+        <p:nvSpPr>
+          <p:cNvPr id="8" name="Oval 7"/>
+          <p:cNvSpPr/>
+          <p:nvPr/>
+        </p:nvSpPr>
+        <p:spPr>
+          <a:xfrm>
+            <a:off x="548640" y="2814066"/>
+            <a:ext cx="411480" cy="411480"/>
+          </a:xfrm>
+          <a:prstGeom prst="ellipse">
+            <a:avLst/>
+          </a:prstGeom>
+          <a:solidFill>
+            <a:srgbClr val="E0463A"/>
+          </a:solidFill>
+          <a:ln>
+            <a:noFill/>
+          </a:ln>
+          <a:effectLst/>
+        </p:spPr>
+        <p:style>
+          <a:lnRef idx="1">
+            <a:schemeClr val="accent1"/>
+          </a:lnRef>
+          <a:fillRef idx="3">
+            <a:schemeClr val="accent1"/>
+          </a:fillRef>
+          <a:effectRef idx="2">
+            <a:schemeClr val="accent1"/>
+          </a:effectRef>
+          <a:fontRef idx="minor">
+            <a:schemeClr val="lt1"/>
+          </a:fontRef>
+        </p:style>
+        <p:txBody>
+          <a:bodyPr rtlCol="0" anchor="ctr" lIns="0" rIns="0" tIns="0" bIns="0"/>
+          <a:lstStyle/>
+          <a:p>
+            <a:pPr algn="ctr"/>
+            <a:r>
+              <a:rPr sz="1400" b="1">
+                <a:solidFill>
+                  <a:srgbClr val="FFFFFF"/>
+                </a:solidFill>
+                <a:latin typeface="Calibri"/>
+              </a:rPr>
+              <a:t>2</a:t>
+            </a:r>
+          </a:p>
+        </p:txBody>
+      </p:sp>
+      <p:sp>
+        <p:nvSpPr>
+          <p:cNvPr id="9" name="TextBox 8"/>
+          <p:cNvSpPr txBox="1"/>
+          <p:nvPr/>
+        </p:nvSpPr>
+        <p:spPr>
+          <a:xfrm>
+            <a:off x="1234440" y="2795778"/>
+            <a:ext cx="10408615" cy="1030986"/>
+          </a:xfrm>
+          <a:prstGeom prst="rect">
+            <a:avLst/>
+          </a:prstGeom>
+          <a:noFill/>
+        </p:spPr>
+        <p:txBody>
+          <a:bodyPr wrap="square" anchor="t" lIns="0" rIns="0" tIns="0" bIns="0"/>
+          <a:lstStyle/>
+          <a:p>
+            <a:pPr algn="l"/>
+            <a:r>
+              <a:rPr sz="2200" b="0" i="0">
+                <a:solidFill>
+                  <a:srgbClr val="202122"/>
+                </a:solidFill>
+                <a:latin typeface="Calibri"/>
+              </a:rPr>
+              <a:t>What is anthropometric data used for?</a:t>
+            </a:r>
+          </a:p>
+        </p:txBody>
+      </p:sp>
+      <p:sp>
+        <p:nvSpPr>
+          <p:cNvPr id="10" name="Oval 9"/>
+          <p:cNvSpPr/>
+          <p:nvPr/>
+        </p:nvSpPr>
+        <p:spPr>
+          <a:xfrm>
+            <a:off x="548640" y="4009644"/>
+            <a:ext cx="411480" cy="411480"/>
+          </a:xfrm>
+          <a:prstGeom prst="ellipse">
+            <a:avLst/>
+          </a:prstGeom>
+          <a:solidFill>
+            <a:srgbClr val="E0463A"/>
+          </a:solidFill>
+          <a:ln>
+            <a:noFill/>
+          </a:ln>
+          <a:effectLst/>
+        </p:spPr>
+        <p:style>
+          <a:lnRef idx="1">
+            <a:schemeClr val="accent1"/>
+          </a:lnRef>
+          <a:fillRef idx="3">
+            <a:schemeClr val="accent1"/>
+          </a:fillRef>
+          <a:effectRef idx="2">
+            <a:schemeClr val="accent1"/>
+          </a:effectRef>
+          <a:fontRef idx="minor">
+            <a:schemeClr val="lt1"/>
+          </a:fontRef>
+        </p:style>
+        <p:txBody>
+          <a:bodyPr rtlCol="0" anchor="ctr" lIns="0" rIns="0" tIns="0" bIns="0"/>
+          <a:lstStyle/>
+          <a:p>
+            <a:pPr algn="ctr"/>
+            <a:r>
+              <a:rPr sz="1400" b="1">
+                <a:solidFill>
+                  <a:srgbClr val="FFFFFF"/>
+                </a:solidFill>
+                <a:latin typeface="Calibri"/>
+              </a:rPr>
+              <a:t>3</a:t>
+            </a:r>
+          </a:p>
+        </p:txBody>
+      </p:sp>
+      <p:sp>
+        <p:nvSpPr>
+          <p:cNvPr id="11" name="TextBox 10"/>
+          <p:cNvSpPr txBox="1"/>
+          <p:nvPr/>
+        </p:nvSpPr>
+        <p:spPr>
+          <a:xfrm>
+            <a:off x="1234440" y="3991356"/>
+            <a:ext cx="10408615" cy="1030986"/>
+          </a:xfrm>
+          <a:prstGeom prst="rect">
+            <a:avLst/>
+          </a:prstGeom>
+          <a:noFill/>
+        </p:spPr>
+        <p:txBody>
+          <a:bodyPr wrap="square" anchor="t" lIns="0" rIns="0" tIns="0" bIns="0"/>
+          <a:lstStyle/>
+          <a:p>
+            <a:pPr algn="l"/>
+            <a:r>
+              <a:rPr sz="2200" b="0" i="0">
+                <a:solidFill>
+                  <a:srgbClr val="202122"/>
+                </a:solidFill>
+                <a:latin typeface="Calibri"/>
+              </a:rPr>
+              <a:t>What is planned obsolescence?</a:t>
+            </a:r>
+          </a:p>
+        </p:txBody>
+      </p:sp>
+      <p:sp>
+        <p:nvSpPr>
+          <p:cNvPr id="12" name="Oval 11"/>
+          <p:cNvSpPr/>
+          <p:nvPr/>
+        </p:nvSpPr>
+        <p:spPr>
+          <a:xfrm>
+            <a:off x="548640" y="5205221"/>
+            <a:ext cx="411480" cy="411480"/>
+          </a:xfrm>
+          <a:prstGeom prst="ellipse">
+            <a:avLst/>
+          </a:prstGeom>
+          <a:solidFill>
+            <a:srgbClr val="E0463A"/>
+          </a:solidFill>
+          <a:ln>
+            <a:noFill/>
+          </a:ln>
+          <a:effectLst/>
+        </p:spPr>
+        <p:style>
+          <a:lnRef idx="1">
+            <a:schemeClr val="accent1"/>
+          </a:lnRef>
+          <a:fillRef idx="3">
+            <a:schemeClr val="accent1"/>
+          </a:fillRef>
+          <a:effectRef idx="2">
+            <a:schemeClr val="accent1"/>
+          </a:effectRef>
+          <a:fontRef idx="minor">
+            <a:schemeClr val="lt1"/>
+          </a:fontRef>
+        </p:style>
+        <p:txBody>
+          <a:bodyPr rtlCol="0" anchor="ctr" lIns="0" rIns="0" tIns="0" bIns="0"/>
+          <a:lstStyle/>
+          <a:p>
+            <a:pPr algn="ctr"/>
+            <a:r>
+              <a:rPr sz="1400" b="1">
+                <a:solidFill>
+                  <a:srgbClr val="FFFFFF"/>
+                </a:solidFill>
+                <a:latin typeface="Calibri"/>
+              </a:rPr>
+              <a:t>4</a:t>
+            </a:r>
+          </a:p>
+        </p:txBody>
+      </p:sp>
+      <p:sp>
+        <p:nvSpPr>
+          <p:cNvPr id="13" name="TextBox 12"/>
+          <p:cNvSpPr txBox="1"/>
+          <p:nvPr/>
+        </p:nvSpPr>
+        <p:spPr>
+          <a:xfrm>
+            <a:off x="1234440" y="5186933"/>
+            <a:ext cx="10408615" cy="1030986"/>
+          </a:xfrm>
+          <a:prstGeom prst="rect">
+            <a:avLst/>
+          </a:prstGeom>
+          <a:noFill/>
+        </p:spPr>
+        <p:txBody>
+          <a:bodyPr wrap="square" anchor="t" lIns="0" rIns="0" tIns="0" bIns="0"/>
+          <a:lstStyle/>
+          <a:p>
+            <a:pPr algn="l"/>
+            <a:r>
+              <a:rPr sz="2200" b="0" i="0">
+                <a:solidFill>
+                  <a:srgbClr val="202122"/>
+                </a:solidFill>
+                <a:latin typeface="Calibri"/>
+              </a:rPr>
+              <a:t>Is checking a part against its drawing verification or validation?</a:t>
+            </a:r>
+          </a:p>
+        </p:txBody>
+      </p:sp>
+    </p:spTree>
+  </p:cSld>
+  <p:clrMapOvr>
+    <a:masterClrMapping/>
+  </p:clrMapOvr>
+</p:sld>
+</file>
+
+<file path=ppt/slides/slide13.xml><?xml version="1.0" encoding="utf-8"?>
+<p:sld xmlns:a="http://schemas.openxmlformats.org/drawingml/2006/main" xmlns:p="http://schemas.openxmlformats.org/presentationml/2006/main" xmlns:r="http://schemas.openxmlformats.org/officeDocument/2006/relationships">
+  <p:cSld>
+    <p:bg>
+      <p:bgPr>
+        <a:solidFill>
+          <a:srgbClr val="FFFFFF"/>
+        </a:solidFill>
+        <a:effectLst/>
+      </p:bgPr>
+    </p:bg>
+    <p:spTree>
+      <p:nvGrpSpPr>
+        <p:cNvPr id="1" name=""/>
+        <p:cNvGrpSpPr/>
+        <p:nvPr/>
+      </p:nvGrpSpPr>
+      <p:grpSpPr/>
+      <p:sp>
+        <p:nvSpPr>
+          <p:cNvPr id="2" name="TextBox 1"/>
+          <p:cNvSpPr txBox="1"/>
+          <p:nvPr/>
+        </p:nvSpPr>
+        <p:spPr>
+          <a:xfrm>
+            <a:off x="548640" y="320040"/>
+            <a:ext cx="11094415" cy="274320"/>
+          </a:xfrm>
+          <a:prstGeom prst="rect">
+            <a:avLst/>
+          </a:prstGeom>
+          <a:noFill/>
+        </p:spPr>
+        <p:txBody>
+          <a:bodyPr wrap="square" anchor="t" lIns="0" rIns="0" tIns="0" bIns="0"/>
+          <a:lstStyle/>
+          <a:p>
+            <a:pPr algn="l"/>
+            <a:r>
+              <a:rPr sz="1100" b="1" i="0">
+                <a:solidFill>
+                  <a:srgbClr val="54595D"/>
+                </a:solidFill>
+                <a:latin typeface="Calibri"/>
+              </a:rPr>
+              <a:t>MECHANICAL ENGINEERING  ·  Mechanical: Knowledge criteria</a:t>
+            </a:r>
+          </a:p>
+        </p:txBody>
+      </p:sp>
+      <p:sp>
+        <p:nvSpPr>
+          <p:cNvPr id="3" name="TextBox 2"/>
+          <p:cNvSpPr txBox="1"/>
+          <p:nvPr/>
+        </p:nvSpPr>
+        <p:spPr>
+          <a:xfrm>
+            <a:off x="548640" y="566928"/>
+            <a:ext cx="11094415" cy="822960"/>
+          </a:xfrm>
+          <a:prstGeom prst="rect">
+            <a:avLst/>
+          </a:prstGeom>
+          <a:noFill/>
+        </p:spPr>
+        <p:txBody>
+          <a:bodyPr wrap="square" anchor="ctr" lIns="0" rIns="0" tIns="0" bIns="0"/>
+          <a:lstStyle/>
+          <a:p>
+            <a:pPr algn="l"/>
+            <a:r>
+              <a:rPr sz="3200" b="1" i="0">
+                <a:solidFill>
+                  <a:srgbClr val="03306E"/>
+                </a:solidFill>
+                <a:latin typeface="Cambria"/>
+              </a:rPr>
+              <a:t>Answers</a:t>
+            </a:r>
+          </a:p>
+        </p:txBody>
+      </p:sp>
+      <p:sp>
+        <p:nvSpPr>
+          <p:cNvPr id="4" name="TextBox 3"/>
+          <p:cNvSpPr txBox="1"/>
+          <p:nvPr/>
+        </p:nvSpPr>
+        <p:spPr>
+          <a:xfrm>
+            <a:off x="548640" y="6446520"/>
+            <a:ext cx="8229600" cy="274320"/>
+          </a:xfrm>
+          <a:prstGeom prst="rect">
+            <a:avLst/>
+          </a:prstGeom>
+          <a:noFill/>
+        </p:spPr>
+        <p:txBody>
+          <a:bodyPr wrap="square" anchor="t" lIns="0" rIns="0" tIns="0" bIns="0"/>
+          <a:lstStyle/>
+          <a:p>
+            <a:pPr algn="l"/>
+            <a:r>
+              <a:rPr sz="1000" b="0" i="0">
+                <a:solidFill>
+                  <a:srgbClr val="54595D"/>
+                </a:solidFill>
+                <a:latin typeface="Calibri"/>
+              </a:rPr>
+              <a:t>Design and Development for Engineering and Manufacturing T Level  ·  Design Principles, Methodologies and Verification</a:t>
+            </a:r>
+          </a:p>
+        </p:txBody>
+      </p:sp>
+      <p:sp>
+        <p:nvSpPr>
+          <p:cNvPr id="5" name="TextBox 4"/>
+          <p:cNvSpPr txBox="1"/>
+          <p:nvPr/>
+        </p:nvSpPr>
+        <p:spPr>
+          <a:xfrm>
+            <a:off x="10728655" y="6446520"/>
+            <a:ext cx="914400" cy="274320"/>
+          </a:xfrm>
+          <a:prstGeom prst="rect">
+            <a:avLst/>
+          </a:prstGeom>
+          <a:noFill/>
+        </p:spPr>
+        <p:txBody>
+          <a:bodyPr wrap="square" anchor="t" lIns="0" rIns="0" tIns="0" bIns="0"/>
+          <a:lstStyle/>
+          <a:p>
+            <a:pPr algn="r"/>
+            <a:r>
+              <a:rPr sz="1000" b="0" i="0">
+                <a:solidFill>
+                  <a:srgbClr val="54595D"/>
+                </a:solidFill>
+                <a:latin typeface="Calibri"/>
+              </a:rPr>
+              <a:t>13</a:t>
+            </a:r>
+          </a:p>
+        </p:txBody>
+      </p:sp>
+      <p:sp>
+        <p:nvSpPr>
+          <p:cNvPr id="6" name="Oval 5"/>
+          <p:cNvSpPr/>
+          <p:nvPr/>
+        </p:nvSpPr>
+        <p:spPr>
+          <a:xfrm>
+            <a:off x="548640" y="1618488"/>
+            <a:ext cx="411480" cy="411480"/>
+          </a:xfrm>
+          <a:prstGeom prst="ellipse">
+            <a:avLst/>
+          </a:prstGeom>
+          <a:solidFill>
+            <a:srgbClr val="E0463A"/>
+          </a:solidFill>
+          <a:ln>
+            <a:noFill/>
+          </a:ln>
+          <a:effectLst/>
+        </p:spPr>
+        <p:style>
+          <a:lnRef idx="1">
+            <a:schemeClr val="accent1"/>
+          </a:lnRef>
+          <a:fillRef idx="3">
+            <a:schemeClr val="accent1"/>
+          </a:fillRef>
+          <a:effectRef idx="2">
+            <a:schemeClr val="accent1"/>
+          </a:effectRef>
+          <a:fontRef idx="minor">
+            <a:schemeClr val="lt1"/>
+          </a:fontRef>
+        </p:style>
+        <p:txBody>
+          <a:bodyPr rtlCol="0" anchor="ctr" lIns="0" rIns="0" tIns="0" bIns="0"/>
+          <a:lstStyle/>
+          <a:p>
+            <a:pPr algn="ctr"/>
+            <a:r>
+              <a:rPr sz="1400" b="1">
+                <a:solidFill>
+                  <a:srgbClr val="FFFFFF"/>
+                </a:solidFill>
+                <a:latin typeface="Calibri"/>
+              </a:rPr>
+              <a:t>1</a:t>
+            </a:r>
+          </a:p>
+        </p:txBody>
+      </p:sp>
+      <p:sp>
+        <p:nvSpPr>
+          <p:cNvPr id="7" name="TextBox 6"/>
+          <p:cNvSpPr txBox="1"/>
+          <p:nvPr/>
+        </p:nvSpPr>
+        <p:spPr>
+          <a:xfrm>
+            <a:off x="1234440" y="1600200"/>
+            <a:ext cx="10408615" cy="1030986"/>
+          </a:xfrm>
+          <a:prstGeom prst="rect">
+            <a:avLst/>
+          </a:prstGeom>
+          <a:noFill/>
+        </p:spPr>
+        <p:txBody>
+          <a:bodyPr wrap="square" anchor="t" lIns="0" rIns="0" tIns="0" bIns="0"/>
+          <a:lstStyle/>
+          <a:p>
+            <a:pPr algn="l"/>
+            <a:r>
+              <a:rPr sz="1800" b="0" i="0">
+                <a:solidFill>
+                  <a:srgbClr val="54595D"/>
+                </a:solidFill>
+                <a:latin typeface="Calibri"/>
+              </a:rPr>
+              <a:t>Name three ways to identify client requirements.</a:t>
+            </a:r>
+          </a:p>
+          <a:p>
+            <a:r>
+              <a:rPr sz="1800" b="1">
+                <a:solidFill>
+                  <a:srgbClr val="03306E"/>
+                </a:solidFill>
+                <a:latin typeface="Calibri"/>
+              </a:rPr>
+              <a:t>Market research, client interviews/observation, product analysis.</a:t>
+            </a:r>
+          </a:p>
+        </p:txBody>
+      </p:sp>
+      <p:sp>
+        <p:nvSpPr>
+          <p:cNvPr id="8" name="Oval 7"/>
+          <p:cNvSpPr/>
+          <p:nvPr/>
+        </p:nvSpPr>
+        <p:spPr>
+          <a:xfrm>
+            <a:off x="548640" y="2814066"/>
+            <a:ext cx="411480" cy="411480"/>
+          </a:xfrm>
+          <a:prstGeom prst="ellipse">
+            <a:avLst/>
+          </a:prstGeom>
+          <a:solidFill>
+            <a:srgbClr val="E0463A"/>
+          </a:solidFill>
+          <a:ln>
+            <a:noFill/>
+          </a:ln>
+          <a:effectLst/>
+        </p:spPr>
+        <p:style>
+          <a:lnRef idx="1">
+            <a:schemeClr val="accent1"/>
+          </a:lnRef>
+          <a:fillRef idx="3">
+            <a:schemeClr val="accent1"/>
+          </a:fillRef>
+          <a:effectRef idx="2">
+            <a:schemeClr val="accent1"/>
+          </a:effectRef>
+          <a:fontRef idx="minor">
+            <a:schemeClr val="lt1"/>
+          </a:fontRef>
+        </p:style>
+        <p:txBody>
+          <a:bodyPr rtlCol="0" anchor="ctr" lIns="0" rIns="0" tIns="0" bIns="0"/>
+          <a:lstStyle/>
+          <a:p>
+            <a:pPr algn="ctr"/>
+            <a:r>
+              <a:rPr sz="1400" b="1">
+                <a:solidFill>
+                  <a:srgbClr val="FFFFFF"/>
+                </a:solidFill>
+                <a:latin typeface="Calibri"/>
+              </a:rPr>
+              <a:t>2</a:t>
+            </a:r>
+          </a:p>
+        </p:txBody>
+      </p:sp>
+      <p:sp>
+        <p:nvSpPr>
+          <p:cNvPr id="9" name="TextBox 8"/>
+          <p:cNvSpPr txBox="1"/>
+          <p:nvPr/>
+        </p:nvSpPr>
+        <p:spPr>
+          <a:xfrm>
+            <a:off x="1234440" y="2795778"/>
+            <a:ext cx="10408615" cy="1030986"/>
+          </a:xfrm>
+          <a:prstGeom prst="rect">
+            <a:avLst/>
+          </a:prstGeom>
+          <a:noFill/>
+        </p:spPr>
+        <p:txBody>
+          <a:bodyPr wrap="square" anchor="t" lIns="0" rIns="0" tIns="0" bIns="0"/>
+          <a:lstStyle/>
+          <a:p>
+            <a:pPr algn="l"/>
+            <a:r>
+              <a:rPr sz="1800" b="0" i="0">
+                <a:solidFill>
+                  <a:srgbClr val="54595D"/>
+                </a:solidFill>
+                <a:latin typeface="Calibri"/>
+              </a:rPr>
+              <a:t>What is anthropometric data used for?</a:t>
+            </a:r>
+          </a:p>
+          <a:p>
+            <a:r>
+              <a:rPr sz="1800" b="1">
+                <a:solidFill>
+                  <a:srgbClr val="03306E"/>
+                </a:solidFill>
+                <a:latin typeface="Calibri"/>
+              </a:rPr>
+              <a:t>Designing products to fit human body sizes (ergonomics).</a:t>
+            </a:r>
+          </a:p>
+        </p:txBody>
+      </p:sp>
+      <p:sp>
+        <p:nvSpPr>
+          <p:cNvPr id="10" name="Oval 9"/>
+          <p:cNvSpPr/>
+          <p:nvPr/>
+        </p:nvSpPr>
+        <p:spPr>
+          <a:xfrm>
+            <a:off x="548640" y="4009644"/>
+            <a:ext cx="411480" cy="411480"/>
+          </a:xfrm>
+          <a:prstGeom prst="ellipse">
+            <a:avLst/>
+          </a:prstGeom>
+          <a:solidFill>
+            <a:srgbClr val="E0463A"/>
+          </a:solidFill>
+          <a:ln>
+            <a:noFill/>
+          </a:ln>
+          <a:effectLst/>
+        </p:spPr>
+        <p:style>
+          <a:lnRef idx="1">
+            <a:schemeClr val="accent1"/>
+          </a:lnRef>
+          <a:fillRef idx="3">
+            <a:schemeClr val="accent1"/>
+          </a:fillRef>
+          <a:effectRef idx="2">
+            <a:schemeClr val="accent1"/>
+          </a:effectRef>
+          <a:fontRef idx="minor">
+            <a:schemeClr val="lt1"/>
+          </a:fontRef>
+        </p:style>
+        <p:txBody>
+          <a:bodyPr rtlCol="0" anchor="ctr" lIns="0" rIns="0" tIns="0" bIns="0"/>
+          <a:lstStyle/>
+          <a:p>
+            <a:pPr algn="ctr"/>
+            <a:r>
+              <a:rPr sz="1400" b="1">
+                <a:solidFill>
+                  <a:srgbClr val="FFFFFF"/>
+                </a:solidFill>
+                <a:latin typeface="Calibri"/>
+              </a:rPr>
+              <a:t>3</a:t>
+            </a:r>
+          </a:p>
+        </p:txBody>
+      </p:sp>
+      <p:sp>
+        <p:nvSpPr>
+          <p:cNvPr id="11" name="TextBox 10"/>
+          <p:cNvSpPr txBox="1"/>
+          <p:nvPr/>
+        </p:nvSpPr>
+        <p:spPr>
+          <a:xfrm>
+            <a:off x="1234440" y="3991356"/>
+            <a:ext cx="10408615" cy="1030986"/>
+          </a:xfrm>
+          <a:prstGeom prst="rect">
+            <a:avLst/>
+          </a:prstGeom>
+          <a:noFill/>
+        </p:spPr>
+        <p:txBody>
+          <a:bodyPr wrap="square" anchor="t" lIns="0" rIns="0" tIns="0" bIns="0"/>
+          <a:lstStyle/>
+          <a:p>
+            <a:pPr algn="l"/>
+            <a:r>
+              <a:rPr sz="1800" b="0" i="0">
+                <a:solidFill>
+                  <a:srgbClr val="54595D"/>
+                </a:solidFill>
+                <a:latin typeface="Calibri"/>
+              </a:rPr>
+              <a:t>What is planned obsolescence?</a:t>
+            </a:r>
+          </a:p>
+          <a:p>
+            <a:r>
+              <a:rPr sz="1800" b="1">
+                <a:solidFill>
+                  <a:srgbClr val="03306E"/>
+                </a:solidFill>
+                <a:latin typeface="Calibri"/>
+              </a:rPr>
+              <a:t>Designing a product to have a limited life.</a:t>
+            </a:r>
+          </a:p>
+        </p:txBody>
+      </p:sp>
+      <p:sp>
+        <p:nvSpPr>
+          <p:cNvPr id="12" name="Oval 11"/>
+          <p:cNvSpPr/>
+          <p:nvPr/>
+        </p:nvSpPr>
+        <p:spPr>
+          <a:xfrm>
+            <a:off x="548640" y="5205221"/>
+            <a:ext cx="411480" cy="411480"/>
+          </a:xfrm>
+          <a:prstGeom prst="ellipse">
+            <a:avLst/>
+          </a:prstGeom>
+          <a:solidFill>
+            <a:srgbClr val="E0463A"/>
+          </a:solidFill>
+          <a:ln>
+            <a:noFill/>
+          </a:ln>
+          <a:effectLst/>
+        </p:spPr>
+        <p:style>
+          <a:lnRef idx="1">
+            <a:schemeClr val="accent1"/>
+          </a:lnRef>
+          <a:fillRef idx="3">
+            <a:schemeClr val="accent1"/>
+          </a:fillRef>
+          <a:effectRef idx="2">
+            <a:schemeClr val="accent1"/>
+          </a:effectRef>
+          <a:fontRef idx="minor">
+            <a:schemeClr val="lt1"/>
+          </a:fontRef>
+        </p:style>
+        <p:txBody>
+          <a:bodyPr rtlCol="0" anchor="ctr" lIns="0" rIns="0" tIns="0" bIns="0"/>
+          <a:lstStyle/>
+          <a:p>
+            <a:pPr algn="ctr"/>
+            <a:r>
+              <a:rPr sz="1400" b="1">
+                <a:solidFill>
+                  <a:srgbClr val="FFFFFF"/>
+                </a:solidFill>
+                <a:latin typeface="Calibri"/>
+              </a:rPr>
+              <a:t>4</a:t>
+            </a:r>
+          </a:p>
+        </p:txBody>
+      </p:sp>
+      <p:sp>
+        <p:nvSpPr>
+          <p:cNvPr id="13" name="TextBox 12"/>
+          <p:cNvSpPr txBox="1"/>
+          <p:nvPr/>
+        </p:nvSpPr>
+        <p:spPr>
+          <a:xfrm>
+            <a:off x="1234440" y="5186933"/>
+            <a:ext cx="10408615" cy="1030986"/>
+          </a:xfrm>
+          <a:prstGeom prst="rect">
+            <a:avLst/>
+          </a:prstGeom>
+          <a:noFill/>
+        </p:spPr>
+        <p:txBody>
+          <a:bodyPr wrap="square" anchor="t" lIns="0" rIns="0" tIns="0" bIns="0"/>
+          <a:lstStyle/>
+          <a:p>
+            <a:pPr algn="l"/>
+            <a:r>
+              <a:rPr sz="1800" b="0" i="0">
+                <a:solidFill>
+                  <a:srgbClr val="54595D"/>
+                </a:solidFill>
+                <a:latin typeface="Calibri"/>
+              </a:rPr>
+              <a:t>Is checking a part against its drawing verification or validation?</a:t>
+            </a:r>
+          </a:p>
+          <a:p>
+            <a:r>
+              <a:rPr sz="1800" b="1">
+                <a:solidFill>
+                  <a:srgbClr val="03306E"/>
+                </a:solidFill>
+                <a:latin typeface="Calibri"/>
+              </a:rPr>
+              <a:t>Verification.</a:t>
+            </a:r>
+          </a:p>
+        </p:txBody>
+      </p:sp>
+    </p:spTree>
+  </p:cSld>
+  <p:clrMapOvr>
+    <a:masterClrMapping/>
+  </p:clrMapOvr>
+</p:sld>
+</file>
+
+<file path=ppt/slides/slide14.xml><?xml version="1.0" encoding="utf-8"?>
+<p:sld xmlns:a="http://schemas.openxmlformats.org/drawingml/2006/main" xmlns:p="http://schemas.openxmlformats.org/presentationml/2006/main" xmlns:r="http://schemas.openxmlformats.org/officeDocument/2006/relationships">
+  <p:cSld>
+    <p:bg>
+      <p:bgPr>
+        <a:solidFill>
+          <a:srgbClr val="FFFFFF"/>
+        </a:solidFill>
+        <a:effectLst/>
+      </p:bgPr>
+    </p:bg>
+    <p:spTree>
+      <p:nvGrpSpPr>
+        <p:cNvPr id="1" name=""/>
+        <p:cNvGrpSpPr/>
+        <p:nvPr/>
+      </p:nvGrpSpPr>
+      <p:grpSpPr/>
+      <p:sp>
+        <p:nvSpPr>
+          <p:cNvPr id="2" name="TextBox 1"/>
+          <p:cNvSpPr txBox="1"/>
+          <p:nvPr/>
+        </p:nvSpPr>
+        <p:spPr>
+          <a:xfrm>
+            <a:off x="548640" y="320040"/>
+            <a:ext cx="11094415" cy="274320"/>
+          </a:xfrm>
+          <a:prstGeom prst="rect">
+            <a:avLst/>
+          </a:prstGeom>
+          <a:noFill/>
+        </p:spPr>
+        <p:txBody>
+          <a:bodyPr wrap="square" anchor="t" lIns="0" rIns="0" tIns="0" bIns="0"/>
+          <a:lstStyle/>
+          <a:p>
+            <a:pPr algn="l"/>
+            <a:r>
+              <a:rPr sz="1100" b="1" i="0">
+                <a:solidFill>
+                  <a:srgbClr val="54595D"/>
+                </a:solidFill>
+                <a:latin typeface="Calibri"/>
+              </a:rPr>
+              <a:t>MECHANICAL ENGINEERING  ·  Mechanical: Knowledge criteria</a:t>
+            </a:r>
+          </a:p>
+        </p:txBody>
+      </p:sp>
+      <p:sp>
+        <p:nvSpPr>
+          <p:cNvPr id="3" name="TextBox 2"/>
+          <p:cNvSpPr txBox="1"/>
+          <p:nvPr/>
+        </p:nvSpPr>
+        <p:spPr>
+          <a:xfrm>
+            <a:off x="548640" y="566928"/>
+            <a:ext cx="11094415" cy="822960"/>
+          </a:xfrm>
+          <a:prstGeom prst="rect">
+            <a:avLst/>
+          </a:prstGeom>
+          <a:noFill/>
+        </p:spPr>
+        <p:txBody>
+          <a:bodyPr wrap="square" anchor="ctr" lIns="0" rIns="0" tIns="0" bIns="0"/>
+          <a:lstStyle/>
+          <a:p>
+            <a:pPr algn="l"/>
+            <a:r>
+              <a:rPr sz="3200" b="1" i="0">
+                <a:solidFill>
+                  <a:srgbClr val="03306E"/>
+                </a:solidFill>
+                <a:latin typeface="Cambria"/>
+              </a:rPr>
+              <a:t>Activity: Better wheelbarrow</a:t>
+            </a:r>
+          </a:p>
+        </p:txBody>
+      </p:sp>
+      <p:sp>
+        <p:nvSpPr>
+          <p:cNvPr id="4" name="TextBox 3"/>
+          <p:cNvSpPr txBox="1"/>
+          <p:nvPr/>
+        </p:nvSpPr>
+        <p:spPr>
+          <a:xfrm>
+            <a:off x="548640" y="6446520"/>
+            <a:ext cx="8229600" cy="274320"/>
+          </a:xfrm>
+          <a:prstGeom prst="rect">
+            <a:avLst/>
+          </a:prstGeom>
+          <a:noFill/>
+        </p:spPr>
+        <p:txBody>
+          <a:bodyPr wrap="square" anchor="t" lIns="0" rIns="0" tIns="0" bIns="0"/>
+          <a:lstStyle/>
+          <a:p>
+            <a:pPr algn="l"/>
+            <a:r>
+              <a:rPr sz="1000" b="0" i="0">
+                <a:solidFill>
+                  <a:srgbClr val="54595D"/>
+                </a:solidFill>
+                <a:latin typeface="Calibri"/>
+              </a:rPr>
+              <a:t>Design and Development for Engineering and Manufacturing T Level  ·  Design Principles, Methodologies and Verification</a:t>
+            </a:r>
+          </a:p>
+        </p:txBody>
+      </p:sp>
+      <p:sp>
+        <p:nvSpPr>
+          <p:cNvPr id="5" name="TextBox 4"/>
+          <p:cNvSpPr txBox="1"/>
+          <p:nvPr/>
+        </p:nvSpPr>
+        <p:spPr>
+          <a:xfrm>
+            <a:off x="10728655" y="6446520"/>
+            <a:ext cx="914400" cy="274320"/>
+          </a:xfrm>
+          <a:prstGeom prst="rect">
+            <a:avLst/>
+          </a:prstGeom>
+          <a:noFill/>
+        </p:spPr>
+        <p:txBody>
+          <a:bodyPr wrap="square" anchor="t" lIns="0" rIns="0" tIns="0" bIns="0"/>
+          <a:lstStyle/>
+          <a:p>
+            <a:pPr algn="r"/>
+            <a:r>
+              <a:rPr sz="1000" b="0" i="0">
+                <a:solidFill>
+                  <a:srgbClr val="54595D"/>
+                </a:solidFill>
+                <a:latin typeface="Calibri"/>
+              </a:rPr>
+              <a:t>14</a:t>
+            </a:r>
+          </a:p>
+        </p:txBody>
+      </p:sp>
+      <p:sp>
+        <p:nvSpPr>
+          <p:cNvPr id="6" name="Rounded Rectangle 5"/>
+          <p:cNvSpPr/>
+          <p:nvPr/>
+        </p:nvSpPr>
+        <p:spPr>
+          <a:xfrm>
+            <a:off x="548640" y="1508760"/>
+            <a:ext cx="2011680" cy="457200"/>
+          </a:xfrm>
+          <a:prstGeom prst="roundRect">
+            <a:avLst>
+              <a:gd name="adj" fmla="val 50000"/>
+            </a:avLst>
+          </a:prstGeom>
+          <a:solidFill>
+            <a:srgbClr val="E0463A"/>
+          </a:solidFill>
+          <a:ln>
+            <a:noFill/>
+          </a:ln>
+          <a:effectLst/>
+        </p:spPr>
+        <p:style>
+          <a:lnRef idx="1">
+            <a:schemeClr val="accent1"/>
+          </a:lnRef>
+          <a:fillRef idx="3">
+            <a:schemeClr val="accent1"/>
+          </a:fillRef>
+          <a:effectRef idx="2">
+            <a:schemeClr val="accent1"/>
+          </a:effectRef>
+          <a:fontRef idx="minor">
+            <a:schemeClr val="lt1"/>
+          </a:fontRef>
+        </p:style>
+        <p:txBody>
+          <a:bodyPr rtlCol="0" anchor="ctr"/>
+          <a:lstStyle/>
+          <a:p/>
+        </p:txBody>
+      </p:sp>
+      <p:sp>
+        <p:nvSpPr>
+          <p:cNvPr id="7" name="TextBox 6"/>
+          <p:cNvSpPr txBox="1"/>
+          <p:nvPr/>
+        </p:nvSpPr>
+        <p:spPr>
+          <a:xfrm>
+            <a:off x="548640" y="1508760"/>
+            <a:ext cx="2011680" cy="457200"/>
+          </a:xfrm>
+          <a:prstGeom prst="rect">
+            <a:avLst/>
+          </a:prstGeom>
+          <a:noFill/>
+        </p:spPr>
+        <p:txBody>
+          <a:bodyPr wrap="square" anchor="ctr" lIns="0" rIns="0" tIns="0" bIns="0"/>
+          <a:lstStyle/>
+          <a:p>
+            <a:pPr algn="ctr"/>
+            <a:r>
+              <a:rPr sz="1400" b="1" i="0">
+                <a:solidFill>
+                  <a:srgbClr val="FFFFFF"/>
+                </a:solidFill>
+                <a:latin typeface="Calibri"/>
+              </a:rPr>
+              <a:t>30 minutes</a:t>
+            </a:r>
+          </a:p>
+        </p:txBody>
+      </p:sp>
+      <p:sp>
+        <p:nvSpPr>
+          <p:cNvPr id="8" name="TextBox 7"/>
+          <p:cNvSpPr txBox="1"/>
+          <p:nvPr/>
+        </p:nvSpPr>
+        <p:spPr>
+          <a:xfrm>
+            <a:off x="2743200" y="1508760"/>
+            <a:ext cx="4754880" cy="457200"/>
+          </a:xfrm>
+          <a:prstGeom prst="rect">
+            <a:avLst/>
+          </a:prstGeom>
+          <a:noFill/>
+        </p:spPr>
+        <p:txBody>
+          <a:bodyPr wrap="square" anchor="ctr" lIns="0" rIns="0" tIns="0" bIns="0"/>
+          <a:lstStyle/>
+          <a:p>
+            <a:pPr algn="l"/>
+            <a:r>
+              <a:rPr sz="1400" b="0" i="1">
+                <a:solidFill>
+                  <a:srgbClr val="54595D"/>
+                </a:solidFill>
+                <a:latin typeface="Calibri"/>
+              </a:rPr>
+              <a:t>Pairs</a:t>
+            </a:r>
+          </a:p>
+        </p:txBody>
+      </p:sp>
+      <p:sp>
+        <p:nvSpPr>
+          <p:cNvPr id="9" name="Oval 8"/>
+          <p:cNvSpPr/>
+          <p:nvPr/>
+        </p:nvSpPr>
+        <p:spPr>
+          <a:xfrm>
+            <a:off x="548640" y="2482596"/>
+            <a:ext cx="384048" cy="384048"/>
+          </a:xfrm>
+          <a:prstGeom prst="ellipse">
+            <a:avLst/>
+          </a:prstGeom>
+          <a:solidFill>
+            <a:srgbClr val="0645AD"/>
+          </a:solidFill>
+          <a:ln>
+            <a:noFill/>
+          </a:ln>
+          <a:effectLst/>
+        </p:spPr>
+        <p:style>
+          <a:lnRef idx="1">
+            <a:schemeClr val="accent1"/>
+          </a:lnRef>
+          <a:fillRef idx="3">
+            <a:schemeClr val="accent1"/>
+          </a:fillRef>
+          <a:effectRef idx="2">
+            <a:schemeClr val="accent1"/>
+          </a:effectRef>
+          <a:fontRef idx="minor">
+            <a:schemeClr val="lt1"/>
+          </a:fontRef>
+        </p:style>
+        <p:txBody>
+          <a:bodyPr rtlCol="0" anchor="ctr" lIns="0" rIns="0" tIns="0" bIns="0"/>
+          <a:lstStyle/>
+          <a:p>
+            <a:pPr algn="ctr"/>
+            <a:r>
+              <a:rPr sz="1300" b="1">
+                <a:solidFill>
+                  <a:srgbClr val="FFFFFF"/>
+                </a:solidFill>
+                <a:latin typeface="Calibri"/>
+              </a:rPr>
+              <a:t>1</a:t>
+            </a:r>
+          </a:p>
+        </p:txBody>
+      </p:sp>
+      <p:sp>
+        <p:nvSpPr>
+          <p:cNvPr id="10" name="TextBox 9"/>
+          <p:cNvSpPr txBox="1"/>
+          <p:nvPr/>
+        </p:nvSpPr>
+        <p:spPr>
+          <a:xfrm>
+            <a:off x="1143000" y="2240280"/>
+            <a:ext cx="5943600" cy="868680"/>
+          </a:xfrm>
+          <a:prstGeom prst="rect">
+            <a:avLst/>
+          </a:prstGeom>
+          <a:noFill/>
+        </p:spPr>
+        <p:txBody>
+          <a:bodyPr wrap="square" anchor="ctr" lIns="0" rIns="0" tIns="0" bIns="0"/>
+          <a:lstStyle/>
+          <a:p>
+            <a:pPr algn="l"/>
+            <a:r>
+              <a:rPr sz="1700" b="0" i="0">
+                <a:solidFill>
+                  <a:srgbClr val="202122"/>
+                </a:solidFill>
+                <a:latin typeface="Calibri"/>
+              </a:rPr>
+              <a:t>Interview your partner as the client and record their requirements.</a:t>
+            </a:r>
+          </a:p>
+        </p:txBody>
+      </p:sp>
+      <p:sp>
+        <p:nvSpPr>
+          <p:cNvPr id="11" name="Oval 10"/>
+          <p:cNvSpPr/>
+          <p:nvPr/>
+        </p:nvSpPr>
+        <p:spPr>
+          <a:xfrm>
+            <a:off x="548640" y="3461004"/>
+            <a:ext cx="384048" cy="384048"/>
+          </a:xfrm>
+          <a:prstGeom prst="ellipse">
+            <a:avLst/>
+          </a:prstGeom>
+          <a:solidFill>
+            <a:srgbClr val="0645AD"/>
+          </a:solidFill>
+          <a:ln>
+            <a:noFill/>
+          </a:ln>
+          <a:effectLst/>
+        </p:spPr>
+        <p:style>
+          <a:lnRef idx="1">
+            <a:schemeClr val="accent1"/>
+          </a:lnRef>
+          <a:fillRef idx="3">
+            <a:schemeClr val="accent1"/>
+          </a:fillRef>
+          <a:effectRef idx="2">
+            <a:schemeClr val="accent1"/>
+          </a:effectRef>
+          <a:fontRef idx="minor">
+            <a:schemeClr val="lt1"/>
+          </a:fontRef>
+        </p:style>
+        <p:txBody>
+          <a:bodyPr rtlCol="0" anchor="ctr" lIns="0" rIns="0" tIns="0" bIns="0"/>
+          <a:lstStyle/>
+          <a:p>
+            <a:pPr algn="ctr"/>
+            <a:r>
+              <a:rPr sz="1300" b="1">
+                <a:solidFill>
+                  <a:srgbClr val="FFFFFF"/>
+                </a:solidFill>
+                <a:latin typeface="Calibri"/>
+              </a:rPr>
+              <a:t>2</a:t>
+            </a:r>
+          </a:p>
+        </p:txBody>
+      </p:sp>
+      <p:sp>
+        <p:nvSpPr>
+          <p:cNvPr id="12" name="TextBox 11"/>
+          <p:cNvSpPr txBox="1"/>
+          <p:nvPr/>
+        </p:nvSpPr>
+        <p:spPr>
+          <a:xfrm>
+            <a:off x="1143000" y="3218688"/>
+            <a:ext cx="5943600" cy="868680"/>
+          </a:xfrm>
+          <a:prstGeom prst="rect">
+            <a:avLst/>
+          </a:prstGeom>
+          <a:noFill/>
+        </p:spPr>
+        <p:txBody>
+          <a:bodyPr wrap="square" anchor="ctr" lIns="0" rIns="0" tIns="0" bIns="0"/>
+          <a:lstStyle/>
+          <a:p>
+            <a:pPr algn="l"/>
+            <a:r>
+              <a:rPr sz="1700" b="0" i="0">
+                <a:solidFill>
+                  <a:srgbClr val="202122"/>
+                </a:solidFill>
+                <a:latin typeface="Calibri"/>
+              </a:rPr>
+              <a:t>Write a specification with measurable criteria.</a:t>
+            </a:r>
+          </a:p>
+        </p:txBody>
+      </p:sp>
+      <p:sp>
+        <p:nvSpPr>
+          <p:cNvPr id="13" name="Oval 12"/>
+          <p:cNvSpPr/>
+          <p:nvPr/>
+        </p:nvSpPr>
+        <p:spPr>
+          <a:xfrm>
+            <a:off x="548640" y="4439412"/>
+            <a:ext cx="384048" cy="384048"/>
+          </a:xfrm>
+          <a:prstGeom prst="ellipse">
+            <a:avLst/>
+          </a:prstGeom>
+          <a:solidFill>
+            <a:srgbClr val="0645AD"/>
+          </a:solidFill>
+          <a:ln>
+            <a:noFill/>
+          </a:ln>
+          <a:effectLst/>
+        </p:spPr>
+        <p:style>
+          <a:lnRef idx="1">
+            <a:schemeClr val="accent1"/>
+          </a:lnRef>
+          <a:fillRef idx="3">
+            <a:schemeClr val="accent1"/>
+          </a:fillRef>
+          <a:effectRef idx="2">
+            <a:schemeClr val="accent1"/>
+          </a:effectRef>
+          <a:fontRef idx="minor">
+            <a:schemeClr val="lt1"/>
+          </a:fontRef>
+        </p:style>
+        <p:txBody>
+          <a:bodyPr rtlCol="0" anchor="ctr" lIns="0" rIns="0" tIns="0" bIns="0"/>
+          <a:lstStyle/>
+          <a:p>
+            <a:pPr algn="ctr"/>
+            <a:r>
+              <a:rPr sz="1300" b="1">
+                <a:solidFill>
+                  <a:srgbClr val="FFFFFF"/>
+                </a:solidFill>
+                <a:latin typeface="Calibri"/>
+              </a:rPr>
+              <a:t>3</a:t>
+            </a:r>
+          </a:p>
+        </p:txBody>
+      </p:sp>
+      <p:sp>
+        <p:nvSpPr>
+          <p:cNvPr id="14" name="TextBox 13"/>
+          <p:cNvSpPr txBox="1"/>
+          <p:nvPr/>
+        </p:nvSpPr>
+        <p:spPr>
+          <a:xfrm>
+            <a:off x="1143000" y="4197096"/>
+            <a:ext cx="5943600" cy="868680"/>
+          </a:xfrm>
+          <a:prstGeom prst="rect">
+            <a:avLst/>
+          </a:prstGeom>
+          <a:noFill/>
+        </p:spPr>
+        <p:txBody>
+          <a:bodyPr wrap="square" anchor="ctr" lIns="0" rIns="0" tIns="0" bIns="0"/>
+          <a:lstStyle/>
+          <a:p>
+            <a:pPr algn="l"/>
+            <a:r>
+              <a:rPr sz="1700" b="0" i="0">
+                <a:solidFill>
+                  <a:srgbClr val="202122"/>
+                </a:solidFill>
+                <a:latin typeface="Calibri"/>
+              </a:rPr>
+              <a:t>Use an anthropometric table to size the handles.</a:t>
+            </a:r>
+          </a:p>
+        </p:txBody>
+      </p:sp>
+      <p:sp>
+        <p:nvSpPr>
+          <p:cNvPr id="15" name="Oval 14"/>
+          <p:cNvSpPr/>
+          <p:nvPr/>
+        </p:nvSpPr>
+        <p:spPr>
+          <a:xfrm>
+            <a:off x="548640" y="5417820"/>
+            <a:ext cx="384048" cy="384048"/>
+          </a:xfrm>
+          <a:prstGeom prst="ellipse">
+            <a:avLst/>
+          </a:prstGeom>
+          <a:solidFill>
+            <a:srgbClr val="0645AD"/>
+          </a:solidFill>
+          <a:ln>
+            <a:noFill/>
+          </a:ln>
+          <a:effectLst/>
+        </p:spPr>
+        <p:style>
+          <a:lnRef idx="1">
+            <a:schemeClr val="accent1"/>
+          </a:lnRef>
+          <a:fillRef idx="3">
+            <a:schemeClr val="accent1"/>
+          </a:fillRef>
+          <a:effectRef idx="2">
+            <a:schemeClr val="accent1"/>
+          </a:effectRef>
+          <a:fontRef idx="minor">
+            <a:schemeClr val="lt1"/>
+          </a:fontRef>
+        </p:style>
+        <p:txBody>
+          <a:bodyPr rtlCol="0" anchor="ctr" lIns="0" rIns="0" tIns="0" bIns="0"/>
+          <a:lstStyle/>
+          <a:p>
+            <a:pPr algn="ctr"/>
+            <a:r>
+              <a:rPr sz="1300" b="1">
+                <a:solidFill>
+                  <a:srgbClr val="FFFFFF"/>
+                </a:solidFill>
+                <a:latin typeface="Calibri"/>
+              </a:rPr>
+              <a:t>4</a:t>
+            </a:r>
+          </a:p>
+        </p:txBody>
+      </p:sp>
+      <p:sp>
+        <p:nvSpPr>
+          <p:cNvPr id="16" name="TextBox 15"/>
+          <p:cNvSpPr txBox="1"/>
+          <p:nvPr/>
+        </p:nvSpPr>
+        <p:spPr>
+          <a:xfrm>
+            <a:off x="1143000" y="5175504"/>
+            <a:ext cx="5943600" cy="868680"/>
+          </a:xfrm>
+          <a:prstGeom prst="rect">
+            <a:avLst/>
+          </a:prstGeom>
+          <a:noFill/>
+        </p:spPr>
+        <p:txBody>
+          <a:bodyPr wrap="square" anchor="ctr" lIns="0" rIns="0" tIns="0" bIns="0"/>
+          <a:lstStyle/>
+          <a:p>
+            <a:pPr algn="l"/>
+            <a:r>
+              <a:rPr sz="1700" b="0" i="0">
+                <a:solidFill>
+                  <a:srgbClr val="202122"/>
+                </a:solidFill>
+                <a:latin typeface="Calibri"/>
+              </a:rPr>
+              <a:t>Build a comparison matrix to verify one concept against the specification.</a:t>
+            </a:r>
+          </a:p>
+        </p:txBody>
+      </p:sp>
+      <p:sp>
+        <p:nvSpPr>
+          <p:cNvPr id="17" name="Rounded Rectangle 16"/>
+          <p:cNvSpPr/>
+          <p:nvPr/>
+        </p:nvSpPr>
+        <p:spPr>
+          <a:xfrm>
+            <a:off x="7772400" y="1508760"/>
+            <a:ext cx="3867912" cy="4572000"/>
+          </a:xfrm>
+          <a:prstGeom prst="roundRect">
+            <a:avLst>
+              <a:gd name="adj" fmla="val 8000"/>
+            </a:avLst>
+          </a:prstGeom>
+          <a:solidFill>
+            <a:srgbClr val="EAF3FF"/>
+          </a:solidFill>
+          <a:ln>
+            <a:noFill/>
+          </a:ln>
+          <a:effectLst/>
+        </p:spPr>
+        <p:style>
+          <a:lnRef idx="1">
+            <a:schemeClr val="accent1"/>
+          </a:lnRef>
+          <a:fillRef idx="3">
+            <a:schemeClr val="accent1"/>
+          </a:fillRef>
+          <a:effectRef idx="2">
+            <a:schemeClr val="accent1"/>
+          </a:effectRef>
+          <a:fontRef idx="minor">
+            <a:schemeClr val="lt1"/>
+          </a:fontRef>
+        </p:style>
+        <p:txBody>
+          <a:bodyPr rtlCol="0" anchor="ctr"/>
+          <a:lstStyle/>
+          <a:p/>
+        </p:txBody>
+      </p:sp>
+      <p:sp>
+        <p:nvSpPr>
+          <p:cNvPr id="18" name="TextBox 17"/>
+          <p:cNvSpPr txBox="1"/>
+          <p:nvPr/>
+        </p:nvSpPr>
+        <p:spPr>
+          <a:xfrm>
+            <a:off x="8046720" y="1737360"/>
+            <a:ext cx="3291840" cy="365760"/>
+          </a:xfrm>
+          <a:prstGeom prst="rect">
+            <a:avLst/>
+          </a:prstGeom>
+          <a:noFill/>
+        </p:spPr>
+        <p:txBody>
+          <a:bodyPr wrap="square" anchor="t" lIns="0" rIns="0" tIns="0" bIns="0"/>
+          <a:lstStyle/>
+          <a:p>
+            <a:pPr algn="l"/>
+            <a:r>
+              <a:rPr sz="1300" b="1" i="0">
+                <a:solidFill>
+                  <a:srgbClr val="0645AD"/>
+                </a:solidFill>
+                <a:latin typeface="Calibri"/>
+              </a:rPr>
+              <a:t>SUCCESS CRITERIA</a:t>
+            </a:r>
+          </a:p>
+        </p:txBody>
+      </p:sp>
+      <p:sp>
+        <p:nvSpPr>
+          <p:cNvPr id="19" name="TextBox 18"/>
+          <p:cNvSpPr txBox="1"/>
+          <p:nvPr/>
+        </p:nvSpPr>
+        <p:spPr>
+          <a:xfrm>
+            <a:off x="8046720" y="2240280"/>
+            <a:ext cx="3337560" cy="3657600"/>
+          </a:xfrm>
+          <a:prstGeom prst="rect">
+            <a:avLst/>
+          </a:prstGeom>
+          <a:noFill/>
+        </p:spPr>
+        <p:txBody>
+          <a:bodyPr wrap="square" lIns="0" rIns="0" tIns="0" bIns="0">
+            <a:spAutoFit/>
+          </a:bodyPr>
+          <a:lstStyle/>
+          <a:p>
+            <a:pPr marL="274320" indent="-274320">
+              <a:spcAft>
+                <a:spcPts val="810"/>
+              </a:spcAft>
+              <a:buClr>
+                <a:srgbClr val="0645AD"/>
+              </a:buClr>
+              <a:buFont typeface="Arial"/>
+              <a:buChar char="•"/>
+            </a:pPr>
+            <a:r>
+              <a:rPr sz="1800" b="0">
+                <a:solidFill>
+                  <a:srgbClr val="202122"/>
+                </a:solidFill>
+                <a:latin typeface="Calibri"/>
+              </a:rPr>
+              <a:t>Requirements are measurable</a:t>
+            </a:r>
+          </a:p>
+          <a:p>
+            <a:pPr marL="274320" indent="-274320">
+              <a:spcAft>
+                <a:spcPts val="810"/>
+              </a:spcAft>
+              <a:buClr>
+                <a:srgbClr val="0645AD"/>
+              </a:buClr>
+              <a:buFont typeface="Arial"/>
+              <a:buChar char="•"/>
+            </a:pPr>
+            <a:r>
+              <a:rPr sz="1800" b="0">
+                <a:solidFill>
+                  <a:srgbClr val="202122"/>
+                </a:solidFill>
+                <a:latin typeface="Calibri"/>
+              </a:rPr>
+              <a:t>Anthropometric data used correctly</a:t>
+            </a:r>
+          </a:p>
+          <a:p>
+            <a:pPr marL="274320" indent="-274320">
+              <a:spcAft>
+                <a:spcPts val="810"/>
+              </a:spcAft>
+              <a:buClr>
+                <a:srgbClr val="0645AD"/>
+              </a:buClr>
+              <a:buFont typeface="Arial"/>
+              <a:buChar char="•"/>
+            </a:pPr>
+            <a:r>
+              <a:rPr sz="1800" b="0">
+                <a:solidFill>
+                  <a:srgbClr val="202122"/>
+                </a:solidFill>
+                <a:latin typeface="Calibri"/>
+              </a:rPr>
+              <a:t>Matrix scores justified</a:t>
+            </a:r>
+          </a:p>
+        </p:txBody>
+      </p:sp>
+    </p:spTree>
+  </p:cSld>
+  <p:clrMapOvr>
+    <a:masterClrMapping/>
+  </p:clrMapOvr>
+</p:sld>
+</file>
+
+<file path=ppt/slides/slide15.xml><?xml version="1.0" encoding="utf-8"?>
+<p:sld xmlns:a="http://schemas.openxmlformats.org/drawingml/2006/main" xmlns:p="http://schemas.openxmlformats.org/presentationml/2006/main" xmlns:r="http://schemas.openxmlformats.org/officeDocument/2006/relationships">
+  <p:cSld>
+    <p:bg>
+      <p:bgPr>
+        <a:solidFill>
+          <a:srgbClr val="03306E"/>
+        </a:solidFill>
+        <a:effectLst/>
+      </p:bgPr>
+    </p:bg>
+    <p:spTree>
+      <p:nvGrpSpPr>
+        <p:cNvPr id="1" name=""/>
+        <p:cNvGrpSpPr/>
+        <p:nvPr/>
+      </p:nvGrpSpPr>
+      <p:grpSpPr/>
+      <p:sp>
+        <p:nvSpPr>
+          <p:cNvPr id="2" name="TextBox 1"/>
+          <p:cNvSpPr txBox="1"/>
+          <p:nvPr/>
+        </p:nvSpPr>
+        <p:spPr>
+          <a:xfrm>
+            <a:off x="548640" y="320040"/>
+            <a:ext cx="11094415" cy="274320"/>
+          </a:xfrm>
+          <a:prstGeom prst="rect">
+            <a:avLst/>
+          </a:prstGeom>
+          <a:noFill/>
+        </p:spPr>
+        <p:txBody>
+          <a:bodyPr wrap="square" anchor="t" lIns="0" rIns="0" tIns="0" bIns="0"/>
+          <a:lstStyle/>
+          <a:p>
+            <a:pPr algn="l"/>
+            <a:r>
+              <a:rPr sz="1100" b="1" i="0">
+                <a:solidFill>
+                  <a:srgbClr val="A9C8F0"/>
+                </a:solidFill>
+                <a:latin typeface="Calibri"/>
+              </a:rPr>
+              <a:t>MECHANICAL ENGINEERING  ·  Mechanical: Knowledge criteria</a:t>
+            </a:r>
+          </a:p>
+        </p:txBody>
+      </p:sp>
+      <p:sp>
+        <p:nvSpPr>
+          <p:cNvPr id="3" name="TextBox 2"/>
+          <p:cNvSpPr txBox="1"/>
+          <p:nvPr/>
+        </p:nvSpPr>
+        <p:spPr>
+          <a:xfrm>
+            <a:off x="548640" y="566928"/>
+            <a:ext cx="11094415" cy="822960"/>
+          </a:xfrm>
+          <a:prstGeom prst="rect">
+            <a:avLst/>
+          </a:prstGeom>
+          <a:noFill/>
+        </p:spPr>
+        <p:txBody>
+          <a:bodyPr wrap="square" anchor="ctr" lIns="0" rIns="0" tIns="0" bIns="0"/>
+          <a:lstStyle/>
+          <a:p>
+            <a:pPr algn="l"/>
+            <a:r>
+              <a:rPr sz="3200" b="1" i="0">
+                <a:solidFill>
+                  <a:srgbClr val="FFFFFF"/>
+                </a:solidFill>
+                <a:latin typeface="Cambria"/>
+              </a:rPr>
+              <a:t>Exit ticket</a:t>
+            </a:r>
+          </a:p>
+        </p:txBody>
+      </p:sp>
+      <p:sp>
+        <p:nvSpPr>
+          <p:cNvPr id="4" name="Oval 3"/>
+          <p:cNvSpPr/>
+          <p:nvPr/>
+        </p:nvSpPr>
+        <p:spPr>
+          <a:xfrm>
+            <a:off x="548640" y="1737360"/>
+            <a:ext cx="502920" cy="502920"/>
+          </a:xfrm>
+          <a:prstGeom prst="ellipse">
+            <a:avLst/>
+          </a:prstGeom>
+          <a:solidFill>
+            <a:srgbClr val="E0463A"/>
+          </a:solidFill>
+          <a:ln>
+            <a:noFill/>
+          </a:ln>
+          <a:effectLst/>
+        </p:spPr>
+        <p:style>
+          <a:lnRef idx="1">
+            <a:schemeClr val="accent1"/>
+          </a:lnRef>
+          <a:fillRef idx="3">
+            <a:schemeClr val="accent1"/>
+          </a:fillRef>
+          <a:effectRef idx="2">
+            <a:schemeClr val="accent1"/>
+          </a:effectRef>
+          <a:fontRef idx="minor">
+            <a:schemeClr val="lt1"/>
+          </a:fontRef>
+        </p:style>
+        <p:txBody>
+          <a:bodyPr rtlCol="0" anchor="ctr" lIns="0" rIns="0" tIns="0" bIns="0"/>
+          <a:lstStyle/>
+          <a:p>
+            <a:pPr algn="ctr"/>
+            <a:r>
+              <a:rPr sz="1700" b="1">
+                <a:solidFill>
+                  <a:srgbClr val="FFFFFF"/>
+                </a:solidFill>
+                <a:latin typeface="Calibri"/>
+              </a:rPr>
+              <a:t>1</a:t>
+            </a:r>
+          </a:p>
+        </p:txBody>
+      </p:sp>
+      <p:sp>
+        <p:nvSpPr>
+          <p:cNvPr id="5" name="TextBox 4"/>
+          <p:cNvSpPr txBox="1"/>
+          <p:nvPr/>
+        </p:nvSpPr>
+        <p:spPr>
+          <a:xfrm>
+            <a:off x="1325880" y="1645920"/>
+            <a:ext cx="6583680" cy="822960"/>
+          </a:xfrm>
+          <a:prstGeom prst="rect">
+            <a:avLst/>
+          </a:prstGeom>
+          <a:noFill/>
+        </p:spPr>
+        <p:txBody>
+          <a:bodyPr wrap="square" anchor="ctr" lIns="0" rIns="0" tIns="0" bIns="0"/>
+          <a:lstStyle/>
+          <a:p>
+            <a:pPr algn="l"/>
+            <a:r>
+              <a:rPr sz="2000" b="0" i="0">
+                <a:solidFill>
+                  <a:srgbClr val="FFFFFF"/>
+                </a:solidFill>
+                <a:latin typeface="Calibri"/>
+              </a:rPr>
+              <a:t>Which methodology suits a gearbox, and why?</a:t>
+            </a:r>
+          </a:p>
+        </p:txBody>
+      </p:sp>
+      <p:sp>
+        <p:nvSpPr>
+          <p:cNvPr id="6" name="Oval 5"/>
+          <p:cNvSpPr/>
+          <p:nvPr/>
+        </p:nvSpPr>
+        <p:spPr>
+          <a:xfrm>
+            <a:off x="548640" y="2697480"/>
+            <a:ext cx="502920" cy="502920"/>
+          </a:xfrm>
+          <a:prstGeom prst="ellipse">
+            <a:avLst/>
+          </a:prstGeom>
+          <a:solidFill>
+            <a:srgbClr val="E0463A"/>
+          </a:solidFill>
+          <a:ln>
+            <a:noFill/>
+          </a:ln>
+          <a:effectLst/>
+        </p:spPr>
+        <p:style>
+          <a:lnRef idx="1">
+            <a:schemeClr val="accent1"/>
+          </a:lnRef>
+          <a:fillRef idx="3">
+            <a:schemeClr val="accent1"/>
+          </a:fillRef>
+          <a:effectRef idx="2">
+            <a:schemeClr val="accent1"/>
+          </a:effectRef>
+          <a:fontRef idx="minor">
+            <a:schemeClr val="lt1"/>
+          </a:fontRef>
+        </p:style>
+        <p:txBody>
+          <a:bodyPr rtlCol="0" anchor="ctr" lIns="0" rIns="0" tIns="0" bIns="0"/>
+          <a:lstStyle/>
+          <a:p>
+            <a:pPr algn="ctr"/>
+            <a:r>
+              <a:rPr sz="1700" b="1">
+                <a:solidFill>
+                  <a:srgbClr val="FFFFFF"/>
+                </a:solidFill>
+                <a:latin typeface="Calibri"/>
+              </a:rPr>
+              <a:t>2</a:t>
+            </a:r>
+          </a:p>
+        </p:txBody>
+      </p:sp>
+      <p:sp>
+        <p:nvSpPr>
+          <p:cNvPr id="7" name="TextBox 6"/>
+          <p:cNvSpPr txBox="1"/>
+          <p:nvPr/>
+        </p:nvSpPr>
+        <p:spPr>
+          <a:xfrm>
+            <a:off x="1325880" y="2606040"/>
+            <a:ext cx="6583680" cy="822960"/>
+          </a:xfrm>
+          <a:prstGeom prst="rect">
+            <a:avLst/>
+          </a:prstGeom>
+          <a:noFill/>
+        </p:spPr>
+        <p:txBody>
+          <a:bodyPr wrap="square" anchor="ctr" lIns="0" rIns="0" tIns="0" bIns="0"/>
+          <a:lstStyle/>
+          <a:p>
+            <a:pPr algn="l"/>
+            <a:r>
+              <a:rPr sz="2000" b="0" i="0">
+                <a:solidFill>
+                  <a:srgbClr val="FFFFFF"/>
+                </a:solidFill>
+                <a:latin typeface="Calibri"/>
+              </a:rPr>
+              <a:t>Why can't you skip validation?</a:t>
+            </a:r>
+          </a:p>
+        </p:txBody>
+      </p:sp>
+      <p:sp>
+        <p:nvSpPr>
+          <p:cNvPr id="8" name="Oval 7"/>
+          <p:cNvSpPr/>
+          <p:nvPr/>
+        </p:nvSpPr>
+        <p:spPr>
+          <a:xfrm>
+            <a:off x="548640" y="3657600"/>
+            <a:ext cx="502920" cy="502920"/>
+          </a:xfrm>
+          <a:prstGeom prst="ellipse">
+            <a:avLst/>
+          </a:prstGeom>
+          <a:solidFill>
+            <a:srgbClr val="E0463A"/>
+          </a:solidFill>
+          <a:ln>
+            <a:noFill/>
+          </a:ln>
+          <a:effectLst/>
+        </p:spPr>
+        <p:style>
+          <a:lnRef idx="1">
+            <a:schemeClr val="accent1"/>
+          </a:lnRef>
+          <a:fillRef idx="3">
+            <a:schemeClr val="accent1"/>
+          </a:fillRef>
+          <a:effectRef idx="2">
+            <a:schemeClr val="accent1"/>
+          </a:effectRef>
+          <a:fontRef idx="minor">
+            <a:schemeClr val="lt1"/>
+          </a:fontRef>
+        </p:style>
+        <p:txBody>
+          <a:bodyPr rtlCol="0" anchor="ctr" lIns="0" rIns="0" tIns="0" bIns="0"/>
+          <a:lstStyle/>
+          <a:p>
+            <a:pPr algn="ctr"/>
+            <a:r>
+              <a:rPr sz="1700" b="1">
+                <a:solidFill>
+                  <a:srgbClr val="FFFFFF"/>
+                </a:solidFill>
+                <a:latin typeface="Calibri"/>
+              </a:rPr>
+              <a:t>3</a:t>
+            </a:r>
+          </a:p>
+        </p:txBody>
+      </p:sp>
+      <p:sp>
+        <p:nvSpPr>
+          <p:cNvPr id="9" name="TextBox 8"/>
+          <p:cNvSpPr txBox="1"/>
+          <p:nvPr/>
+        </p:nvSpPr>
+        <p:spPr>
+          <a:xfrm>
+            <a:off x="1325880" y="3566160"/>
+            <a:ext cx="6583680" cy="822960"/>
+          </a:xfrm>
+          <a:prstGeom prst="rect">
+            <a:avLst/>
+          </a:prstGeom>
+          <a:noFill/>
+        </p:spPr>
+        <p:txBody>
+          <a:bodyPr wrap="square" anchor="ctr" lIns="0" rIns="0" tIns="0" bIns="0"/>
+          <a:lstStyle/>
+          <a:p>
+            <a:pPr algn="l"/>
+            <a:r>
+              <a:rPr sz="2000" b="0" i="0">
+                <a:solidFill>
+                  <a:srgbClr val="FFFFFF"/>
+                </a:solidFill>
+                <a:latin typeface="Calibri"/>
+              </a:rPr>
+              <a:t>How do tolerances affect DFA?</a:t>
+            </a:r>
+          </a:p>
+        </p:txBody>
+      </p:sp>
+      <p:sp>
+        <p:nvSpPr>
+          <p:cNvPr id="10" name="Rounded Rectangle 9"/>
+          <p:cNvSpPr/>
+          <p:nvPr/>
+        </p:nvSpPr>
+        <p:spPr>
+          <a:xfrm>
+            <a:off x="8229600" y="1645920"/>
+            <a:ext cx="3410712" cy="2926080"/>
+          </a:xfrm>
+          <a:prstGeom prst="roundRect">
+            <a:avLst>
+              <a:gd name="adj" fmla="val 8000"/>
+            </a:avLst>
+          </a:prstGeom>
+          <a:solidFill>
+            <a:srgbClr val="0645AD"/>
+          </a:solidFill>
+          <a:ln>
+            <a:noFill/>
+          </a:ln>
+          <a:effectLst/>
+        </p:spPr>
+        <p:style>
+          <a:lnRef idx="1">
+            <a:schemeClr val="accent1"/>
+          </a:lnRef>
+          <a:fillRef idx="3">
+            <a:schemeClr val="accent1"/>
+          </a:fillRef>
+          <a:effectRef idx="2">
+            <a:schemeClr val="accent1"/>
+          </a:effectRef>
+          <a:fontRef idx="minor">
+            <a:schemeClr val="lt1"/>
+          </a:fontRef>
+        </p:style>
+        <p:txBody>
+          <a:bodyPr rtlCol="0" anchor="ctr"/>
+          <a:lstStyle/>
+          <a:p/>
+        </p:txBody>
+      </p:sp>
+      <p:sp>
+        <p:nvSpPr>
+          <p:cNvPr id="11" name="TextBox 10"/>
+          <p:cNvSpPr txBox="1"/>
+          <p:nvPr/>
+        </p:nvSpPr>
+        <p:spPr>
+          <a:xfrm>
+            <a:off x="8503920" y="1874519"/>
+            <a:ext cx="2926080" cy="365760"/>
+          </a:xfrm>
+          <a:prstGeom prst="rect">
+            <a:avLst/>
+          </a:prstGeom>
+          <a:noFill/>
+        </p:spPr>
+        <p:txBody>
+          <a:bodyPr wrap="square" anchor="t" lIns="0" rIns="0" tIns="0" bIns="0"/>
+          <a:lstStyle/>
+          <a:p>
+            <a:pPr algn="l"/>
+            <a:r>
+              <a:rPr sz="1300" b="1" i="0">
+                <a:solidFill>
+                  <a:srgbClr val="A9C8F0"/>
+                </a:solidFill>
+                <a:latin typeface="Calibri"/>
+              </a:rPr>
+              <a:t>REVISE THIS TOPIC</a:t>
+            </a:r>
+          </a:p>
+        </p:txBody>
+      </p:sp>
+      <p:sp>
+        <p:nvSpPr>
+          <p:cNvPr id="12" name="TextBox 11"/>
+          <p:cNvSpPr txBox="1"/>
+          <p:nvPr/>
+        </p:nvSpPr>
+        <p:spPr>
+          <a:xfrm>
+            <a:off x="8503920" y="2286000"/>
+            <a:ext cx="2926080" cy="548640"/>
+          </a:xfrm>
+          <a:prstGeom prst="rect">
+            <a:avLst/>
+          </a:prstGeom>
+          <a:noFill/>
+        </p:spPr>
+        <p:txBody>
+          <a:bodyPr wrap="square" anchor="t" lIns="0" rIns="0" tIns="0" bIns="0"/>
+          <a:lstStyle/>
+          <a:p>
+            <a:pPr algn="l"/>
+            <a:r>
+              <a:rPr sz="1400" b="0" i="0">
+                <a:solidFill>
+                  <a:srgbClr val="FFFFFF"/>
+                </a:solidFill>
+                <a:latin typeface="Calibri"/>
+              </a:rPr>
+              <a:t>Revision notes for this lesson are on the study wiki:</a:t>
+            </a:r>
+          </a:p>
+        </p:txBody>
+      </p:sp>
+      <p:sp>
+        <p:nvSpPr>
+          <p:cNvPr id="13" name="TextBox 12"/>
+          <p:cNvSpPr txBox="1"/>
+          <p:nvPr/>
+        </p:nvSpPr>
+        <p:spPr>
+          <a:xfrm>
+            <a:off x="8503920" y="2926080"/>
+            <a:ext cx="2926080" cy="1463040"/>
+          </a:xfrm>
+          <a:prstGeom prst="rect">
+            <a:avLst/>
+          </a:prstGeom>
+          <a:noFill/>
+        </p:spPr>
+        <p:txBody>
+          <a:bodyPr wrap="square" anchor="t" lIns="0" rIns="0" tIns="0" bIns="0"/>
+          <a:lstStyle/>
+          <a:p>
+            <a:pPr algn="l"/>
+            <a:r>
+              <a:rPr sz="2000" b="1" i="0">
+                <a:solidFill>
+                  <a:srgbClr val="FFFFFF"/>
+                </a:solidFill>
+                <a:latin typeface="Cambria"/>
+              </a:rPr>
+              <a:t>Knowledge Criteria</a:t>
+            </a:r>
+          </a:p>
+        </p:txBody>
+      </p:sp>
+      <p:sp>
+        <p:nvSpPr>
+          <p:cNvPr id="14" name="TextBox 13"/>
+          <p:cNvSpPr txBox="1"/>
+          <p:nvPr/>
+        </p:nvSpPr>
+        <p:spPr>
+          <a:xfrm>
+            <a:off x="548640" y="5669280"/>
+            <a:ext cx="11094415" cy="548640"/>
+          </a:xfrm>
+          <a:prstGeom prst="rect">
+            <a:avLst/>
+          </a:prstGeom>
+          <a:noFill/>
+        </p:spPr>
+        <p:txBody>
+          <a:bodyPr wrap="square" anchor="t" lIns="0" rIns="0" tIns="0" bIns="0"/>
+          <a:lstStyle/>
+          <a:p>
+            <a:pPr algn="l"/>
+            <a:r>
+              <a:rPr sz="1200" b="0" i="0">
+                <a:solidFill>
+                  <a:srgbClr val="A9C8F0"/>
+                </a:solidFill>
+                <a:latin typeface="Calibri"/>
+              </a:rPr>
+              <a:t>https://lana6478.github.io/T-level-Design-Development-Engineering-Manufacturing/#/02-occupational-specialism/01-knowledge-criteria.md</a:t>
+            </a:r>
+          </a:p>
+        </p:txBody>
+      </p:sp>
+    </p:spTree>
+  </p:cSld>
+  <p:clrMapOvr>
+    <a:masterClrMapping/>
+  </p:clrMapOvr>
+</p:sld>
+</file>
+
 <file path=ppt/slides/slide2.xml><?xml version="1.0" encoding="utf-8"?>
 <p:sld xmlns:a="http://schemas.openxmlformats.org/drawingml/2006/main" xmlns:p="http://schemas.openxmlformats.org/presentationml/2006/main" xmlns:r="http://schemas.openxmlformats.org/officeDocument/2006/relationships">
   <p:cSld>
@@ -4842,22 +8473,102 @@
       </p:sp>
       <p:sp>
         <p:nvSpPr>
-          <p:cNvPr id="6" name="Rounded Rectangle 5"/>
+          <p:cNvPr id="6" name="TextBox 5"/>
+          <p:cNvSpPr txBox="1"/>
+          <p:nvPr/>
+        </p:nvSpPr>
+        <p:spPr>
+          <a:xfrm>
+            <a:off x="548640" y="1554480"/>
+            <a:ext cx="6720840" cy="4617720"/>
+          </a:xfrm>
+          <a:prstGeom prst="rect">
+            <a:avLst/>
+          </a:prstGeom>
+          <a:noFill/>
+        </p:spPr>
+        <p:txBody>
+          <a:bodyPr wrap="square" lIns="0" rIns="0" tIns="0" bIns="0">
+            <a:spAutoFit/>
+          </a:bodyPr>
+          <a:lstStyle/>
+          <a:p>
+            <a:pPr>
+              <a:spcAft>
+                <a:spcPts val="1260"/>
+              </a:spcAft>
+            </a:pPr>
+            <a:r>
+              <a:rPr sz="2100" b="1">
+                <a:solidFill>
+                  <a:srgbClr val="202122"/>
+                </a:solidFill>
+                <a:latin typeface="Calibri"/>
+              </a:rPr>
+              <a:t>Every design starts with requirements:</a:t>
+            </a:r>
+            <a:r>
+              <a:rPr sz="2100" b="0">
+                <a:solidFill>
+                  <a:srgbClr val="202122"/>
+                </a:solidFill>
+                <a:latin typeface="Calibri"/>
+              </a:rPr>
+              <a:t> function, aesthetics, dimensions, ergonomics, safety, sustainability, cost and materials.</a:t>
+            </a:r>
+          </a:p>
+          <a:p>
+            <a:pPr>
+              <a:spcAft>
+                <a:spcPts val="1260"/>
+              </a:spcAft>
+            </a:pPr>
+            <a:r>
+              <a:rPr sz="2100" b="0">
+                <a:solidFill>
+                  <a:srgbClr val="202122"/>
+                </a:solidFill>
+                <a:latin typeface="Calibri"/>
+              </a:rPr>
+              <a:t>Requirements are found through market research, interviewing and observing the client, and analysing existing products. They're recorded in a design brief, a specification, questionnaires and observation records, then agreed with the client so the project scope is clear.</a:t>
+            </a:r>
+          </a:p>
+          <a:p>
+            <a:pPr>
+              <a:spcAft>
+                <a:spcPts val="1260"/>
+              </a:spcAft>
+            </a:pPr>
+            <a:r>
+              <a:rPr sz="2100" b="0">
+                <a:solidFill>
+                  <a:srgbClr val="202122"/>
+                </a:solidFill>
+                <a:latin typeface="Calibri"/>
+              </a:rPr>
+              <a:t>Designs are communicated with orthographic drawings, virtual models and physical models. Factors such as the product life cycle, sustainability and safety shape every decision.</a:t>
+            </a:r>
+          </a:p>
+        </p:txBody>
+      </p:sp>
+      <p:sp>
+        <p:nvSpPr>
+          <p:cNvPr id="7" name="Rounded Rectangle 6"/>
           <p:cNvSpPr/>
           <p:nvPr/>
         </p:nvSpPr>
         <p:spPr>
           <a:xfrm>
-            <a:off x="548640" y="1600200"/>
-            <a:ext cx="5410047" cy="2148840"/>
+            <a:off x="7772400" y="1554480"/>
+            <a:ext cx="3867912" cy="4526280"/>
           </a:xfrm>
           <a:prstGeom prst="roundRect">
             <a:avLst>
-              <a:gd name="adj" fmla="val 6000"/>
+              <a:gd name="adj" fmla="val 8000"/>
             </a:avLst>
           </a:prstGeom>
           <a:solidFill>
-            <a:srgbClr val="EAF3FF"/>
+            <a:srgbClr val="03306E"/>
           </a:solidFill>
           <a:ln>
             <a:noFill/>
@@ -4886,14 +8597,14 @@
       </p:sp>
       <p:sp>
         <p:nvSpPr>
-          <p:cNvPr id="7" name="Oval 6"/>
+          <p:cNvPr id="8" name="Oval 7"/>
           <p:cNvSpPr/>
           <p:nvPr/>
         </p:nvSpPr>
         <p:spPr>
           <a:xfrm>
-            <a:off x="777240" y="1828800"/>
-            <a:ext cx="457200" cy="457200"/>
+            <a:off x="8046720" y="1828800"/>
+            <a:ext cx="548640" cy="548640"/>
           </a:xfrm>
           <a:prstGeom prst="ellipse">
             <a:avLst/>
@@ -4926,46 +8637,13 @@
           <a:p>
             <a:pPr algn="ctr"/>
             <a:r>
-              <a:rPr sz="1500" b="1">
+              <a:rPr sz="1300" b="1">
                 <a:solidFill>
                   <a:srgbClr val="FFFFFF"/>
                 </a:solidFill>
                 <a:latin typeface="Calibri"/>
               </a:rPr>
-              <a:t>1</a:t>
-            </a:r>
-          </a:p>
-        </p:txBody>
-      </p:sp>
-      <p:sp>
-        <p:nvSpPr>
-          <p:cNvPr id="8" name="TextBox 7"/>
-          <p:cNvSpPr txBox="1"/>
-          <p:nvPr/>
-        </p:nvSpPr>
-        <p:spPr>
-          <a:xfrm>
-            <a:off x="1371600" y="1801368"/>
-            <a:ext cx="4404207" cy="512064"/>
-          </a:xfrm>
-          <a:prstGeom prst="rect">
-            <a:avLst/>
-          </a:prstGeom>
-          <a:noFill/>
-        </p:spPr>
-        <p:txBody>
-          <a:bodyPr wrap="square" anchor="ctr" lIns="0" rIns="0" tIns="0" bIns="0"/>
-          <a:lstStyle/>
-          <a:p>
-            <a:pPr algn="l"/>
-            <a:r>
-              <a:rPr sz="1900" b="1" i="0">
-                <a:solidFill>
-                  <a:srgbClr val="03306E"/>
-                </a:solidFill>
-                <a:latin typeface="Calibri"/>
-              </a:rPr>
-              <a:t>Requirements</a:t>
+              <a:t>e.g.</a:t>
             </a:r>
           </a:p>
         </p:txBody>
@@ -4978,8 +8656,8 @@
         </p:nvSpPr>
         <p:spPr>
           <a:xfrm>
-            <a:off x="777240" y="2468880"/>
-            <a:ext cx="4952847" cy="1143000"/>
+            <a:off x="8046720" y="2560320"/>
+            <a:ext cx="3291840" cy="365760"/>
           </a:xfrm>
           <a:prstGeom prst="rect">
             <a:avLst/>
@@ -4992,502 +8670,46 @@
           <a:p>
             <a:pPr algn="l"/>
             <a:r>
-              <a:rPr sz="2000" b="0" i="0">
-                <a:solidFill>
-                  <a:srgbClr val="202122"/>
-                </a:solidFill>
-                <a:latin typeface="Calibri"/>
-              </a:rPr>
-              <a:t>Function, aesthetics, dimensions, ergonomics, safety, sustainability, cost, materials.</a:t>
-            </a:r>
-          </a:p>
-        </p:txBody>
-      </p:sp>
-      <p:sp>
-        <p:nvSpPr>
-          <p:cNvPr id="10" name="Rounded Rectangle 9"/>
-          <p:cNvSpPr/>
-          <p:nvPr/>
-        </p:nvSpPr>
-        <p:spPr>
-          <a:xfrm>
-            <a:off x="6233007" y="1600200"/>
-            <a:ext cx="5410047" cy="2148840"/>
-          </a:xfrm>
-          <a:prstGeom prst="roundRect">
-            <a:avLst>
-              <a:gd name="adj" fmla="val 6000"/>
-            </a:avLst>
-          </a:prstGeom>
-          <a:solidFill>
-            <a:srgbClr val="EAF3FF"/>
-          </a:solidFill>
-          <a:ln>
-            <a:noFill/>
-          </a:ln>
-          <a:effectLst/>
-        </p:spPr>
-        <p:style>
-          <a:lnRef idx="1">
-            <a:schemeClr val="accent1"/>
-          </a:lnRef>
-          <a:fillRef idx="3">
-            <a:schemeClr val="accent1"/>
-          </a:fillRef>
-          <a:effectRef idx="2">
-            <a:schemeClr val="accent1"/>
-          </a:effectRef>
-          <a:fontRef idx="minor">
-            <a:schemeClr val="lt1"/>
-          </a:fontRef>
-        </p:style>
-        <p:txBody>
-          <a:bodyPr rtlCol="0" anchor="ctr"/>
-          <a:lstStyle/>
-          <a:p/>
-        </p:txBody>
-      </p:sp>
-      <p:sp>
-        <p:nvSpPr>
-          <p:cNvPr id="11" name="Oval 10"/>
-          <p:cNvSpPr/>
-          <p:nvPr/>
-        </p:nvSpPr>
-        <p:spPr>
-          <a:xfrm>
-            <a:off x="6461607" y="1828800"/>
-            <a:ext cx="457200" cy="457200"/>
-          </a:xfrm>
-          <a:prstGeom prst="ellipse">
-            <a:avLst/>
-          </a:prstGeom>
-          <a:solidFill>
-            <a:srgbClr val="E0463A"/>
-          </a:solidFill>
-          <a:ln>
-            <a:noFill/>
-          </a:ln>
-          <a:effectLst/>
-        </p:spPr>
-        <p:style>
-          <a:lnRef idx="1">
-            <a:schemeClr val="accent1"/>
-          </a:lnRef>
-          <a:fillRef idx="3">
-            <a:schemeClr val="accent1"/>
-          </a:fillRef>
-          <a:effectRef idx="2">
-            <a:schemeClr val="accent1"/>
-          </a:effectRef>
-          <a:fontRef idx="minor">
-            <a:schemeClr val="lt1"/>
-          </a:fontRef>
-        </p:style>
-        <p:txBody>
-          <a:bodyPr rtlCol="0" anchor="ctr" lIns="0" rIns="0" tIns="0" bIns="0"/>
-          <a:lstStyle/>
-          <a:p>
-            <a:pPr algn="ctr"/>
-            <a:r>
-              <a:rPr sz="1500" b="1">
+              <a:rPr sz="1300" b="1" i="0">
+                <a:solidFill>
+                  <a:srgbClr val="A9C8F0"/>
+                </a:solidFill>
+                <a:latin typeface="Calibri"/>
+              </a:rPr>
+              <a:t>EXAMPLE</a:t>
+            </a:r>
+          </a:p>
+        </p:txBody>
+      </p:sp>
+      <p:sp>
+        <p:nvSpPr>
+          <p:cNvPr id="10" name="TextBox 9"/>
+          <p:cNvSpPr txBox="1"/>
+          <p:nvPr/>
+        </p:nvSpPr>
+        <p:spPr>
+          <a:xfrm>
+            <a:off x="8046720" y="2971800"/>
+            <a:ext cx="3291840" cy="2971800"/>
+          </a:xfrm>
+          <a:prstGeom prst="rect">
+            <a:avLst/>
+          </a:prstGeom>
+          <a:noFill/>
+        </p:spPr>
+        <p:txBody>
+          <a:bodyPr wrap="square" anchor="t" lIns="0" rIns="0" tIns="0" bIns="0"/>
+          <a:lstStyle/>
+          <a:p>
+            <a:pPr algn="l"/>
+            <a:r>
+              <a:rPr sz="1900" b="0" i="0">
                 <a:solidFill>
                   <a:srgbClr val="FFFFFF"/>
                 </a:solidFill>
-                <a:latin typeface="Calibri"/>
-              </a:rPr>
-              <a:t>2</a:t>
-            </a:r>
-          </a:p>
-        </p:txBody>
-      </p:sp>
-      <p:sp>
-        <p:nvSpPr>
-          <p:cNvPr id="12" name="TextBox 11"/>
-          <p:cNvSpPr txBox="1"/>
-          <p:nvPr/>
-        </p:nvSpPr>
-        <p:spPr>
-          <a:xfrm>
-            <a:off x="7055967" y="1801368"/>
-            <a:ext cx="4404207" cy="512064"/>
-          </a:xfrm>
-          <a:prstGeom prst="rect">
-            <a:avLst/>
-          </a:prstGeom>
-          <a:noFill/>
-        </p:spPr>
-        <p:txBody>
-          <a:bodyPr wrap="square" anchor="ctr" lIns="0" rIns="0" tIns="0" bIns="0"/>
-          <a:lstStyle/>
-          <a:p>
-            <a:pPr algn="l"/>
-            <a:r>
-              <a:rPr sz="1900" b="1" i="0">
-                <a:solidFill>
-                  <a:srgbClr val="03306E"/>
-                </a:solidFill>
-                <a:latin typeface="Calibri"/>
-              </a:rPr>
-              <a:t>Identifying them</a:t>
-            </a:r>
-          </a:p>
-        </p:txBody>
-      </p:sp>
-      <p:sp>
-        <p:nvSpPr>
-          <p:cNvPr id="13" name="TextBox 12"/>
-          <p:cNvSpPr txBox="1"/>
-          <p:nvPr/>
-        </p:nvSpPr>
-        <p:spPr>
-          <a:xfrm>
-            <a:off x="6461607" y="2468880"/>
-            <a:ext cx="4952847" cy="1143000"/>
-          </a:xfrm>
-          <a:prstGeom prst="rect">
-            <a:avLst/>
-          </a:prstGeom>
-          <a:noFill/>
-        </p:spPr>
-        <p:txBody>
-          <a:bodyPr wrap="square" anchor="t" lIns="0" rIns="0" tIns="0" bIns="0"/>
-          <a:lstStyle/>
-          <a:p>
-            <a:pPr algn="l"/>
-            <a:r>
-              <a:rPr sz="2000" b="0" i="0">
-                <a:solidFill>
-                  <a:srgbClr val="202122"/>
-                </a:solidFill>
-                <a:latin typeface="Calibri"/>
-              </a:rPr>
-              <a:t>Market research, client interviews and observation, product analysis.</a:t>
-            </a:r>
-          </a:p>
-        </p:txBody>
-      </p:sp>
-      <p:sp>
-        <p:nvSpPr>
-          <p:cNvPr id="14" name="Rounded Rectangle 13"/>
-          <p:cNvSpPr/>
-          <p:nvPr/>
-        </p:nvSpPr>
-        <p:spPr>
-          <a:xfrm>
-            <a:off x="548640" y="4023360"/>
-            <a:ext cx="5410047" cy="2148840"/>
-          </a:xfrm>
-          <a:prstGeom prst="roundRect">
-            <a:avLst>
-              <a:gd name="adj" fmla="val 6000"/>
-            </a:avLst>
-          </a:prstGeom>
-          <a:solidFill>
-            <a:srgbClr val="EAF3FF"/>
-          </a:solidFill>
-          <a:ln>
-            <a:noFill/>
-          </a:ln>
-          <a:effectLst/>
-        </p:spPr>
-        <p:style>
-          <a:lnRef idx="1">
-            <a:schemeClr val="accent1"/>
-          </a:lnRef>
-          <a:fillRef idx="3">
-            <a:schemeClr val="accent1"/>
-          </a:fillRef>
-          <a:effectRef idx="2">
-            <a:schemeClr val="accent1"/>
-          </a:effectRef>
-          <a:fontRef idx="minor">
-            <a:schemeClr val="lt1"/>
-          </a:fontRef>
-        </p:style>
-        <p:txBody>
-          <a:bodyPr rtlCol="0" anchor="ctr"/>
-          <a:lstStyle/>
-          <a:p/>
-        </p:txBody>
-      </p:sp>
-      <p:sp>
-        <p:nvSpPr>
-          <p:cNvPr id="15" name="Oval 14"/>
-          <p:cNvSpPr/>
-          <p:nvPr/>
-        </p:nvSpPr>
-        <p:spPr>
-          <a:xfrm>
-            <a:off x="777240" y="4251960"/>
-            <a:ext cx="457200" cy="457200"/>
-          </a:xfrm>
-          <a:prstGeom prst="ellipse">
-            <a:avLst/>
-          </a:prstGeom>
-          <a:solidFill>
-            <a:srgbClr val="E0463A"/>
-          </a:solidFill>
-          <a:ln>
-            <a:noFill/>
-          </a:ln>
-          <a:effectLst/>
-        </p:spPr>
-        <p:style>
-          <a:lnRef idx="1">
-            <a:schemeClr val="accent1"/>
-          </a:lnRef>
-          <a:fillRef idx="3">
-            <a:schemeClr val="accent1"/>
-          </a:fillRef>
-          <a:effectRef idx="2">
-            <a:schemeClr val="accent1"/>
-          </a:effectRef>
-          <a:fontRef idx="minor">
-            <a:schemeClr val="lt1"/>
-          </a:fontRef>
-        </p:style>
-        <p:txBody>
-          <a:bodyPr rtlCol="0" anchor="ctr" lIns="0" rIns="0" tIns="0" bIns="0"/>
-          <a:lstStyle/>
-          <a:p>
-            <a:pPr algn="ctr"/>
-            <a:r>
-              <a:rPr sz="1500" b="1">
-                <a:solidFill>
-                  <a:srgbClr val="FFFFFF"/>
-                </a:solidFill>
-                <a:latin typeface="Calibri"/>
-              </a:rPr>
-              <a:t>3</a:t>
-            </a:r>
-          </a:p>
-        </p:txBody>
-      </p:sp>
-      <p:sp>
-        <p:nvSpPr>
-          <p:cNvPr id="16" name="TextBox 15"/>
-          <p:cNvSpPr txBox="1"/>
-          <p:nvPr/>
-        </p:nvSpPr>
-        <p:spPr>
-          <a:xfrm>
-            <a:off x="1371600" y="4224528"/>
-            <a:ext cx="4404207" cy="512064"/>
-          </a:xfrm>
-          <a:prstGeom prst="rect">
-            <a:avLst/>
-          </a:prstGeom>
-          <a:noFill/>
-        </p:spPr>
-        <p:txBody>
-          <a:bodyPr wrap="square" anchor="ctr" lIns="0" rIns="0" tIns="0" bIns="0"/>
-          <a:lstStyle/>
-          <a:p>
-            <a:pPr algn="l"/>
-            <a:r>
-              <a:rPr sz="1900" b="1" i="0">
-                <a:solidFill>
-                  <a:srgbClr val="03306E"/>
-                </a:solidFill>
-                <a:latin typeface="Calibri"/>
-              </a:rPr>
-              <a:t>Recording them</a:t>
-            </a:r>
-          </a:p>
-        </p:txBody>
-      </p:sp>
-      <p:sp>
-        <p:nvSpPr>
-          <p:cNvPr id="17" name="TextBox 16"/>
-          <p:cNvSpPr txBox="1"/>
-          <p:nvPr/>
-        </p:nvSpPr>
-        <p:spPr>
-          <a:xfrm>
-            <a:off x="777240" y="4892040"/>
-            <a:ext cx="4952847" cy="1143000"/>
-          </a:xfrm>
-          <a:prstGeom prst="rect">
-            <a:avLst/>
-          </a:prstGeom>
-          <a:noFill/>
-        </p:spPr>
-        <p:txBody>
-          <a:bodyPr wrap="square" anchor="t" lIns="0" rIns="0" tIns="0" bIns="0"/>
-          <a:lstStyle/>
-          <a:p>
-            <a:pPr algn="l"/>
-            <a:r>
-              <a:rPr sz="2000" b="0" i="0">
-                <a:solidFill>
-                  <a:srgbClr val="202122"/>
-                </a:solidFill>
-                <a:latin typeface="Calibri"/>
-              </a:rPr>
-              <a:t>Design briefs, specifications, questionnaires, observational records.</a:t>
-            </a:r>
-          </a:p>
-        </p:txBody>
-      </p:sp>
-      <p:sp>
-        <p:nvSpPr>
-          <p:cNvPr id="18" name="Rounded Rectangle 17"/>
-          <p:cNvSpPr/>
-          <p:nvPr/>
-        </p:nvSpPr>
-        <p:spPr>
-          <a:xfrm>
-            <a:off x="6233007" y="4023360"/>
-            <a:ext cx="5410047" cy="2148840"/>
-          </a:xfrm>
-          <a:prstGeom prst="roundRect">
-            <a:avLst>
-              <a:gd name="adj" fmla="val 6000"/>
-            </a:avLst>
-          </a:prstGeom>
-          <a:solidFill>
-            <a:srgbClr val="EAF3FF"/>
-          </a:solidFill>
-          <a:ln>
-            <a:noFill/>
-          </a:ln>
-          <a:effectLst/>
-        </p:spPr>
-        <p:style>
-          <a:lnRef idx="1">
-            <a:schemeClr val="accent1"/>
-          </a:lnRef>
-          <a:fillRef idx="3">
-            <a:schemeClr val="accent1"/>
-          </a:fillRef>
-          <a:effectRef idx="2">
-            <a:schemeClr val="accent1"/>
-          </a:effectRef>
-          <a:fontRef idx="minor">
-            <a:schemeClr val="lt1"/>
-          </a:fontRef>
-        </p:style>
-        <p:txBody>
-          <a:bodyPr rtlCol="0" anchor="ctr"/>
-          <a:lstStyle/>
-          <a:p/>
-        </p:txBody>
-      </p:sp>
-      <p:sp>
-        <p:nvSpPr>
-          <p:cNvPr id="19" name="Oval 18"/>
-          <p:cNvSpPr/>
-          <p:nvPr/>
-        </p:nvSpPr>
-        <p:spPr>
-          <a:xfrm>
-            <a:off x="6461607" y="4251960"/>
-            <a:ext cx="457200" cy="457200"/>
-          </a:xfrm>
-          <a:prstGeom prst="ellipse">
-            <a:avLst/>
-          </a:prstGeom>
-          <a:solidFill>
-            <a:srgbClr val="E0463A"/>
-          </a:solidFill>
-          <a:ln>
-            <a:noFill/>
-          </a:ln>
-          <a:effectLst/>
-        </p:spPr>
-        <p:style>
-          <a:lnRef idx="1">
-            <a:schemeClr val="accent1"/>
-          </a:lnRef>
-          <a:fillRef idx="3">
-            <a:schemeClr val="accent1"/>
-          </a:fillRef>
-          <a:effectRef idx="2">
-            <a:schemeClr val="accent1"/>
-          </a:effectRef>
-          <a:fontRef idx="minor">
-            <a:schemeClr val="lt1"/>
-          </a:fontRef>
-        </p:style>
-        <p:txBody>
-          <a:bodyPr rtlCol="0" anchor="ctr" lIns="0" rIns="0" tIns="0" bIns="0"/>
-          <a:lstStyle/>
-          <a:p>
-            <a:pPr algn="ctr"/>
-            <a:r>
-              <a:rPr sz="1500" b="1">
-                <a:solidFill>
-                  <a:srgbClr val="FFFFFF"/>
-                </a:solidFill>
-                <a:latin typeface="Calibri"/>
-              </a:rPr>
-              <a:t>4</a:t>
-            </a:r>
-          </a:p>
-        </p:txBody>
-      </p:sp>
-      <p:sp>
-        <p:nvSpPr>
-          <p:cNvPr id="20" name="TextBox 19"/>
-          <p:cNvSpPr txBox="1"/>
-          <p:nvPr/>
-        </p:nvSpPr>
-        <p:spPr>
-          <a:xfrm>
-            <a:off x="7055967" y="4224528"/>
-            <a:ext cx="4404207" cy="512064"/>
-          </a:xfrm>
-          <a:prstGeom prst="rect">
-            <a:avLst/>
-          </a:prstGeom>
-          <a:noFill/>
-        </p:spPr>
-        <p:txBody>
-          <a:bodyPr wrap="square" anchor="ctr" lIns="0" rIns="0" tIns="0" bIns="0"/>
-          <a:lstStyle/>
-          <a:p>
-            <a:pPr algn="l"/>
-            <a:r>
-              <a:rPr sz="1900" b="1" i="0">
-                <a:solidFill>
-                  <a:srgbClr val="03306E"/>
-                </a:solidFill>
-                <a:latin typeface="Calibri"/>
-              </a:rPr>
-              <a:t>Communicating designs</a:t>
-            </a:r>
-          </a:p>
-        </p:txBody>
-      </p:sp>
-      <p:sp>
-        <p:nvSpPr>
-          <p:cNvPr id="21" name="TextBox 20"/>
-          <p:cNvSpPr txBox="1"/>
-          <p:nvPr/>
-        </p:nvSpPr>
-        <p:spPr>
-          <a:xfrm>
-            <a:off x="6461607" y="4892040"/>
-            <a:ext cx="4952847" cy="1143000"/>
-          </a:xfrm>
-          <a:prstGeom prst="rect">
-            <a:avLst/>
-          </a:prstGeom>
-          <a:noFill/>
-        </p:spPr>
-        <p:txBody>
-          <a:bodyPr wrap="square" anchor="t" lIns="0" rIns="0" tIns="0" bIns="0"/>
-          <a:lstStyle/>
-          <a:p>
-            <a:pPr algn="l"/>
-            <a:r>
-              <a:rPr sz="2000" b="0" i="0">
-                <a:solidFill>
-                  <a:srgbClr val="202122"/>
-                </a:solidFill>
-                <a:latin typeface="Calibri"/>
-              </a:rPr>
-              <a:t>Orthographic drawings, virtual models, physical models.</a:t>
+                <a:latin typeface="Cambria"/>
+              </a:rPr>
+              <a:t>A specification for a wheelbarrow: carry 100 kg, tip easily, handles 850 to 950 mm high, weigh under 15 kg, cost under 60 pounds to make.</a:t>
             </a:r>
           </a:p>
         </p:txBody>
@@ -5579,7 +8801,7 @@
                 </a:solidFill>
                 <a:latin typeface="Cambria"/>
               </a:rPr>
-              <a:t>Design methodologies</a:t>
+              <a:t>Principles of engineering design</a:t>
             </a:r>
           </a:p>
         </p:txBody>
@@ -5646,6 +8868,1657 @@
                 <a:latin typeface="Calibri"/>
               </a:rPr>
               <a:t>4</a:t>
+            </a:r>
+          </a:p>
+        </p:txBody>
+      </p:sp>
+      <p:sp>
+        <p:nvSpPr>
+          <p:cNvPr id="6" name="Rounded Rectangle 5"/>
+          <p:cNvSpPr/>
+          <p:nvPr/>
+        </p:nvSpPr>
+        <p:spPr>
+          <a:xfrm>
+            <a:off x="548640" y="1600200"/>
+            <a:ext cx="5410047" cy="2148840"/>
+          </a:xfrm>
+          <a:prstGeom prst="roundRect">
+            <a:avLst>
+              <a:gd name="adj" fmla="val 6000"/>
+            </a:avLst>
+          </a:prstGeom>
+          <a:solidFill>
+            <a:srgbClr val="EAF3FF"/>
+          </a:solidFill>
+          <a:ln>
+            <a:noFill/>
+          </a:ln>
+          <a:effectLst/>
+        </p:spPr>
+        <p:style>
+          <a:lnRef idx="1">
+            <a:schemeClr val="accent1"/>
+          </a:lnRef>
+          <a:fillRef idx="3">
+            <a:schemeClr val="accent1"/>
+          </a:fillRef>
+          <a:effectRef idx="2">
+            <a:schemeClr val="accent1"/>
+          </a:effectRef>
+          <a:fontRef idx="minor">
+            <a:schemeClr val="lt1"/>
+          </a:fontRef>
+        </p:style>
+        <p:txBody>
+          <a:bodyPr rtlCol="0" anchor="ctr"/>
+          <a:lstStyle/>
+          <a:p/>
+        </p:txBody>
+      </p:sp>
+      <p:sp>
+        <p:nvSpPr>
+          <p:cNvPr id="7" name="Oval 6"/>
+          <p:cNvSpPr/>
+          <p:nvPr/>
+        </p:nvSpPr>
+        <p:spPr>
+          <a:xfrm>
+            <a:off x="777240" y="1828800"/>
+            <a:ext cx="457200" cy="457200"/>
+          </a:xfrm>
+          <a:prstGeom prst="ellipse">
+            <a:avLst/>
+          </a:prstGeom>
+          <a:solidFill>
+            <a:srgbClr val="E0463A"/>
+          </a:solidFill>
+          <a:ln>
+            <a:noFill/>
+          </a:ln>
+          <a:effectLst/>
+        </p:spPr>
+        <p:style>
+          <a:lnRef idx="1">
+            <a:schemeClr val="accent1"/>
+          </a:lnRef>
+          <a:fillRef idx="3">
+            <a:schemeClr val="accent1"/>
+          </a:fillRef>
+          <a:effectRef idx="2">
+            <a:schemeClr val="accent1"/>
+          </a:effectRef>
+          <a:fontRef idx="minor">
+            <a:schemeClr val="lt1"/>
+          </a:fontRef>
+        </p:style>
+        <p:txBody>
+          <a:bodyPr rtlCol="0" anchor="ctr" lIns="0" rIns="0" tIns="0" bIns="0"/>
+          <a:lstStyle/>
+          <a:p>
+            <a:pPr algn="ctr"/>
+            <a:r>
+              <a:rPr sz="1500" b="1">
+                <a:solidFill>
+                  <a:srgbClr val="FFFFFF"/>
+                </a:solidFill>
+                <a:latin typeface="Calibri"/>
+              </a:rPr>
+              <a:t>1</a:t>
+            </a:r>
+          </a:p>
+        </p:txBody>
+      </p:sp>
+      <p:sp>
+        <p:nvSpPr>
+          <p:cNvPr id="8" name="TextBox 7"/>
+          <p:cNvSpPr txBox="1"/>
+          <p:nvPr/>
+        </p:nvSpPr>
+        <p:spPr>
+          <a:xfrm>
+            <a:off x="1371600" y="1801368"/>
+            <a:ext cx="4404207" cy="512064"/>
+          </a:xfrm>
+          <a:prstGeom prst="rect">
+            <a:avLst/>
+          </a:prstGeom>
+          <a:noFill/>
+        </p:spPr>
+        <p:txBody>
+          <a:bodyPr wrap="square" anchor="ctr" lIns="0" rIns="0" tIns="0" bIns="0"/>
+          <a:lstStyle/>
+          <a:p>
+            <a:pPr algn="l"/>
+            <a:r>
+              <a:rPr sz="1900" b="1" i="0">
+                <a:solidFill>
+                  <a:srgbClr val="03306E"/>
+                </a:solidFill>
+                <a:latin typeface="Calibri"/>
+              </a:rPr>
+              <a:t>Requirements</a:t>
+            </a:r>
+          </a:p>
+        </p:txBody>
+      </p:sp>
+      <p:sp>
+        <p:nvSpPr>
+          <p:cNvPr id="9" name="TextBox 8"/>
+          <p:cNvSpPr txBox="1"/>
+          <p:nvPr/>
+        </p:nvSpPr>
+        <p:spPr>
+          <a:xfrm>
+            <a:off x="777240" y="2468880"/>
+            <a:ext cx="4952847" cy="1143000"/>
+          </a:xfrm>
+          <a:prstGeom prst="rect">
+            <a:avLst/>
+          </a:prstGeom>
+          <a:noFill/>
+        </p:spPr>
+        <p:txBody>
+          <a:bodyPr wrap="square" anchor="t" lIns="0" rIns="0" tIns="0" bIns="0"/>
+          <a:lstStyle/>
+          <a:p>
+            <a:pPr algn="l"/>
+            <a:r>
+              <a:rPr sz="2000" b="0" i="0">
+                <a:solidFill>
+                  <a:srgbClr val="202122"/>
+                </a:solidFill>
+                <a:latin typeface="Calibri"/>
+              </a:rPr>
+              <a:t>Function, aesthetics, dimensions, ergonomics, safety, sustainability, cost, materials.</a:t>
+            </a:r>
+          </a:p>
+        </p:txBody>
+      </p:sp>
+      <p:sp>
+        <p:nvSpPr>
+          <p:cNvPr id="10" name="Rounded Rectangle 9"/>
+          <p:cNvSpPr/>
+          <p:nvPr/>
+        </p:nvSpPr>
+        <p:spPr>
+          <a:xfrm>
+            <a:off x="6233007" y="1600200"/>
+            <a:ext cx="5410047" cy="2148840"/>
+          </a:xfrm>
+          <a:prstGeom prst="roundRect">
+            <a:avLst>
+              <a:gd name="adj" fmla="val 6000"/>
+            </a:avLst>
+          </a:prstGeom>
+          <a:solidFill>
+            <a:srgbClr val="EAF3FF"/>
+          </a:solidFill>
+          <a:ln>
+            <a:noFill/>
+          </a:ln>
+          <a:effectLst/>
+        </p:spPr>
+        <p:style>
+          <a:lnRef idx="1">
+            <a:schemeClr val="accent1"/>
+          </a:lnRef>
+          <a:fillRef idx="3">
+            <a:schemeClr val="accent1"/>
+          </a:fillRef>
+          <a:effectRef idx="2">
+            <a:schemeClr val="accent1"/>
+          </a:effectRef>
+          <a:fontRef idx="minor">
+            <a:schemeClr val="lt1"/>
+          </a:fontRef>
+        </p:style>
+        <p:txBody>
+          <a:bodyPr rtlCol="0" anchor="ctr"/>
+          <a:lstStyle/>
+          <a:p/>
+        </p:txBody>
+      </p:sp>
+      <p:sp>
+        <p:nvSpPr>
+          <p:cNvPr id="11" name="Oval 10"/>
+          <p:cNvSpPr/>
+          <p:nvPr/>
+        </p:nvSpPr>
+        <p:spPr>
+          <a:xfrm>
+            <a:off x="6461607" y="1828800"/>
+            <a:ext cx="457200" cy="457200"/>
+          </a:xfrm>
+          <a:prstGeom prst="ellipse">
+            <a:avLst/>
+          </a:prstGeom>
+          <a:solidFill>
+            <a:srgbClr val="E0463A"/>
+          </a:solidFill>
+          <a:ln>
+            <a:noFill/>
+          </a:ln>
+          <a:effectLst/>
+        </p:spPr>
+        <p:style>
+          <a:lnRef idx="1">
+            <a:schemeClr val="accent1"/>
+          </a:lnRef>
+          <a:fillRef idx="3">
+            <a:schemeClr val="accent1"/>
+          </a:fillRef>
+          <a:effectRef idx="2">
+            <a:schemeClr val="accent1"/>
+          </a:effectRef>
+          <a:fontRef idx="minor">
+            <a:schemeClr val="lt1"/>
+          </a:fontRef>
+        </p:style>
+        <p:txBody>
+          <a:bodyPr rtlCol="0" anchor="ctr" lIns="0" rIns="0" tIns="0" bIns="0"/>
+          <a:lstStyle/>
+          <a:p>
+            <a:pPr algn="ctr"/>
+            <a:r>
+              <a:rPr sz="1500" b="1">
+                <a:solidFill>
+                  <a:srgbClr val="FFFFFF"/>
+                </a:solidFill>
+                <a:latin typeface="Calibri"/>
+              </a:rPr>
+              <a:t>2</a:t>
+            </a:r>
+          </a:p>
+        </p:txBody>
+      </p:sp>
+      <p:sp>
+        <p:nvSpPr>
+          <p:cNvPr id="12" name="TextBox 11"/>
+          <p:cNvSpPr txBox="1"/>
+          <p:nvPr/>
+        </p:nvSpPr>
+        <p:spPr>
+          <a:xfrm>
+            <a:off x="7055967" y="1801368"/>
+            <a:ext cx="4404207" cy="512064"/>
+          </a:xfrm>
+          <a:prstGeom prst="rect">
+            <a:avLst/>
+          </a:prstGeom>
+          <a:noFill/>
+        </p:spPr>
+        <p:txBody>
+          <a:bodyPr wrap="square" anchor="ctr" lIns="0" rIns="0" tIns="0" bIns="0"/>
+          <a:lstStyle/>
+          <a:p>
+            <a:pPr algn="l"/>
+            <a:r>
+              <a:rPr sz="1900" b="1" i="0">
+                <a:solidFill>
+                  <a:srgbClr val="03306E"/>
+                </a:solidFill>
+                <a:latin typeface="Calibri"/>
+              </a:rPr>
+              <a:t>Identifying them</a:t>
+            </a:r>
+          </a:p>
+        </p:txBody>
+      </p:sp>
+      <p:sp>
+        <p:nvSpPr>
+          <p:cNvPr id="13" name="TextBox 12"/>
+          <p:cNvSpPr txBox="1"/>
+          <p:nvPr/>
+        </p:nvSpPr>
+        <p:spPr>
+          <a:xfrm>
+            <a:off x="6461607" y="2468880"/>
+            <a:ext cx="4952847" cy="1143000"/>
+          </a:xfrm>
+          <a:prstGeom prst="rect">
+            <a:avLst/>
+          </a:prstGeom>
+          <a:noFill/>
+        </p:spPr>
+        <p:txBody>
+          <a:bodyPr wrap="square" anchor="t" lIns="0" rIns="0" tIns="0" bIns="0"/>
+          <a:lstStyle/>
+          <a:p>
+            <a:pPr algn="l"/>
+            <a:r>
+              <a:rPr sz="2000" b="0" i="0">
+                <a:solidFill>
+                  <a:srgbClr val="202122"/>
+                </a:solidFill>
+                <a:latin typeface="Calibri"/>
+              </a:rPr>
+              <a:t>Market research, client interviews and observation, product analysis.</a:t>
+            </a:r>
+          </a:p>
+        </p:txBody>
+      </p:sp>
+      <p:sp>
+        <p:nvSpPr>
+          <p:cNvPr id="14" name="Rounded Rectangle 13"/>
+          <p:cNvSpPr/>
+          <p:nvPr/>
+        </p:nvSpPr>
+        <p:spPr>
+          <a:xfrm>
+            <a:off x="548640" y="4023360"/>
+            <a:ext cx="5410047" cy="2148840"/>
+          </a:xfrm>
+          <a:prstGeom prst="roundRect">
+            <a:avLst>
+              <a:gd name="adj" fmla="val 6000"/>
+            </a:avLst>
+          </a:prstGeom>
+          <a:solidFill>
+            <a:srgbClr val="EAF3FF"/>
+          </a:solidFill>
+          <a:ln>
+            <a:noFill/>
+          </a:ln>
+          <a:effectLst/>
+        </p:spPr>
+        <p:style>
+          <a:lnRef idx="1">
+            <a:schemeClr val="accent1"/>
+          </a:lnRef>
+          <a:fillRef idx="3">
+            <a:schemeClr val="accent1"/>
+          </a:fillRef>
+          <a:effectRef idx="2">
+            <a:schemeClr val="accent1"/>
+          </a:effectRef>
+          <a:fontRef idx="minor">
+            <a:schemeClr val="lt1"/>
+          </a:fontRef>
+        </p:style>
+        <p:txBody>
+          <a:bodyPr rtlCol="0" anchor="ctr"/>
+          <a:lstStyle/>
+          <a:p/>
+        </p:txBody>
+      </p:sp>
+      <p:sp>
+        <p:nvSpPr>
+          <p:cNvPr id="15" name="Oval 14"/>
+          <p:cNvSpPr/>
+          <p:nvPr/>
+        </p:nvSpPr>
+        <p:spPr>
+          <a:xfrm>
+            <a:off x="777240" y="4251960"/>
+            <a:ext cx="457200" cy="457200"/>
+          </a:xfrm>
+          <a:prstGeom prst="ellipse">
+            <a:avLst/>
+          </a:prstGeom>
+          <a:solidFill>
+            <a:srgbClr val="E0463A"/>
+          </a:solidFill>
+          <a:ln>
+            <a:noFill/>
+          </a:ln>
+          <a:effectLst/>
+        </p:spPr>
+        <p:style>
+          <a:lnRef idx="1">
+            <a:schemeClr val="accent1"/>
+          </a:lnRef>
+          <a:fillRef idx="3">
+            <a:schemeClr val="accent1"/>
+          </a:fillRef>
+          <a:effectRef idx="2">
+            <a:schemeClr val="accent1"/>
+          </a:effectRef>
+          <a:fontRef idx="minor">
+            <a:schemeClr val="lt1"/>
+          </a:fontRef>
+        </p:style>
+        <p:txBody>
+          <a:bodyPr rtlCol="0" anchor="ctr" lIns="0" rIns="0" tIns="0" bIns="0"/>
+          <a:lstStyle/>
+          <a:p>
+            <a:pPr algn="ctr"/>
+            <a:r>
+              <a:rPr sz="1500" b="1">
+                <a:solidFill>
+                  <a:srgbClr val="FFFFFF"/>
+                </a:solidFill>
+                <a:latin typeface="Calibri"/>
+              </a:rPr>
+              <a:t>3</a:t>
+            </a:r>
+          </a:p>
+        </p:txBody>
+      </p:sp>
+      <p:sp>
+        <p:nvSpPr>
+          <p:cNvPr id="16" name="TextBox 15"/>
+          <p:cNvSpPr txBox="1"/>
+          <p:nvPr/>
+        </p:nvSpPr>
+        <p:spPr>
+          <a:xfrm>
+            <a:off x="1371600" y="4224528"/>
+            <a:ext cx="4404207" cy="512064"/>
+          </a:xfrm>
+          <a:prstGeom prst="rect">
+            <a:avLst/>
+          </a:prstGeom>
+          <a:noFill/>
+        </p:spPr>
+        <p:txBody>
+          <a:bodyPr wrap="square" anchor="ctr" lIns="0" rIns="0" tIns="0" bIns="0"/>
+          <a:lstStyle/>
+          <a:p>
+            <a:pPr algn="l"/>
+            <a:r>
+              <a:rPr sz="1900" b="1" i="0">
+                <a:solidFill>
+                  <a:srgbClr val="03306E"/>
+                </a:solidFill>
+                <a:latin typeface="Calibri"/>
+              </a:rPr>
+              <a:t>Recording them</a:t>
+            </a:r>
+          </a:p>
+        </p:txBody>
+      </p:sp>
+      <p:sp>
+        <p:nvSpPr>
+          <p:cNvPr id="17" name="TextBox 16"/>
+          <p:cNvSpPr txBox="1"/>
+          <p:nvPr/>
+        </p:nvSpPr>
+        <p:spPr>
+          <a:xfrm>
+            <a:off x="777240" y="4892040"/>
+            <a:ext cx="4952847" cy="1143000"/>
+          </a:xfrm>
+          <a:prstGeom prst="rect">
+            <a:avLst/>
+          </a:prstGeom>
+          <a:noFill/>
+        </p:spPr>
+        <p:txBody>
+          <a:bodyPr wrap="square" anchor="t" lIns="0" rIns="0" tIns="0" bIns="0"/>
+          <a:lstStyle/>
+          <a:p>
+            <a:pPr algn="l"/>
+            <a:r>
+              <a:rPr sz="2000" b="0" i="0">
+                <a:solidFill>
+                  <a:srgbClr val="202122"/>
+                </a:solidFill>
+                <a:latin typeface="Calibri"/>
+              </a:rPr>
+              <a:t>Design briefs, specifications, questionnaires, observational records.</a:t>
+            </a:r>
+          </a:p>
+        </p:txBody>
+      </p:sp>
+      <p:sp>
+        <p:nvSpPr>
+          <p:cNvPr id="18" name="Rounded Rectangle 17"/>
+          <p:cNvSpPr/>
+          <p:nvPr/>
+        </p:nvSpPr>
+        <p:spPr>
+          <a:xfrm>
+            <a:off x="6233007" y="4023360"/>
+            <a:ext cx="5410047" cy="2148840"/>
+          </a:xfrm>
+          <a:prstGeom prst="roundRect">
+            <a:avLst>
+              <a:gd name="adj" fmla="val 6000"/>
+            </a:avLst>
+          </a:prstGeom>
+          <a:solidFill>
+            <a:srgbClr val="EAF3FF"/>
+          </a:solidFill>
+          <a:ln>
+            <a:noFill/>
+          </a:ln>
+          <a:effectLst/>
+        </p:spPr>
+        <p:style>
+          <a:lnRef idx="1">
+            <a:schemeClr val="accent1"/>
+          </a:lnRef>
+          <a:fillRef idx="3">
+            <a:schemeClr val="accent1"/>
+          </a:fillRef>
+          <a:effectRef idx="2">
+            <a:schemeClr val="accent1"/>
+          </a:effectRef>
+          <a:fontRef idx="minor">
+            <a:schemeClr val="lt1"/>
+          </a:fontRef>
+        </p:style>
+        <p:txBody>
+          <a:bodyPr rtlCol="0" anchor="ctr"/>
+          <a:lstStyle/>
+          <a:p/>
+        </p:txBody>
+      </p:sp>
+      <p:sp>
+        <p:nvSpPr>
+          <p:cNvPr id="19" name="Oval 18"/>
+          <p:cNvSpPr/>
+          <p:nvPr/>
+        </p:nvSpPr>
+        <p:spPr>
+          <a:xfrm>
+            <a:off x="6461607" y="4251960"/>
+            <a:ext cx="457200" cy="457200"/>
+          </a:xfrm>
+          <a:prstGeom prst="ellipse">
+            <a:avLst/>
+          </a:prstGeom>
+          <a:solidFill>
+            <a:srgbClr val="E0463A"/>
+          </a:solidFill>
+          <a:ln>
+            <a:noFill/>
+          </a:ln>
+          <a:effectLst/>
+        </p:spPr>
+        <p:style>
+          <a:lnRef idx="1">
+            <a:schemeClr val="accent1"/>
+          </a:lnRef>
+          <a:fillRef idx="3">
+            <a:schemeClr val="accent1"/>
+          </a:fillRef>
+          <a:effectRef idx="2">
+            <a:schemeClr val="accent1"/>
+          </a:effectRef>
+          <a:fontRef idx="minor">
+            <a:schemeClr val="lt1"/>
+          </a:fontRef>
+        </p:style>
+        <p:txBody>
+          <a:bodyPr rtlCol="0" anchor="ctr" lIns="0" rIns="0" tIns="0" bIns="0"/>
+          <a:lstStyle/>
+          <a:p>
+            <a:pPr algn="ctr"/>
+            <a:r>
+              <a:rPr sz="1500" b="1">
+                <a:solidFill>
+                  <a:srgbClr val="FFFFFF"/>
+                </a:solidFill>
+                <a:latin typeface="Calibri"/>
+              </a:rPr>
+              <a:t>4</a:t>
+            </a:r>
+          </a:p>
+        </p:txBody>
+      </p:sp>
+      <p:sp>
+        <p:nvSpPr>
+          <p:cNvPr id="20" name="TextBox 19"/>
+          <p:cNvSpPr txBox="1"/>
+          <p:nvPr/>
+        </p:nvSpPr>
+        <p:spPr>
+          <a:xfrm>
+            <a:off x="7055967" y="4224528"/>
+            <a:ext cx="4404207" cy="512064"/>
+          </a:xfrm>
+          <a:prstGeom prst="rect">
+            <a:avLst/>
+          </a:prstGeom>
+          <a:noFill/>
+        </p:spPr>
+        <p:txBody>
+          <a:bodyPr wrap="square" anchor="ctr" lIns="0" rIns="0" tIns="0" bIns="0"/>
+          <a:lstStyle/>
+          <a:p>
+            <a:pPr algn="l"/>
+            <a:r>
+              <a:rPr sz="1900" b="1" i="0">
+                <a:solidFill>
+                  <a:srgbClr val="03306E"/>
+                </a:solidFill>
+                <a:latin typeface="Calibri"/>
+              </a:rPr>
+              <a:t>Communicating designs</a:t>
+            </a:r>
+          </a:p>
+        </p:txBody>
+      </p:sp>
+      <p:sp>
+        <p:nvSpPr>
+          <p:cNvPr id="21" name="TextBox 20"/>
+          <p:cNvSpPr txBox="1"/>
+          <p:nvPr/>
+        </p:nvSpPr>
+        <p:spPr>
+          <a:xfrm>
+            <a:off x="6461607" y="4892040"/>
+            <a:ext cx="4952847" cy="1143000"/>
+          </a:xfrm>
+          <a:prstGeom prst="rect">
+            <a:avLst/>
+          </a:prstGeom>
+          <a:noFill/>
+        </p:spPr>
+        <p:txBody>
+          <a:bodyPr wrap="square" anchor="t" lIns="0" rIns="0" tIns="0" bIns="0"/>
+          <a:lstStyle/>
+          <a:p>
+            <a:pPr algn="l"/>
+            <a:r>
+              <a:rPr sz="2000" b="0" i="0">
+                <a:solidFill>
+                  <a:srgbClr val="202122"/>
+                </a:solidFill>
+                <a:latin typeface="Calibri"/>
+              </a:rPr>
+              <a:t>Orthographic drawings, virtual models, physical models.</a:t>
+            </a:r>
+          </a:p>
+        </p:txBody>
+      </p:sp>
+    </p:spTree>
+  </p:cSld>
+  <p:clrMapOvr>
+    <a:masterClrMapping/>
+  </p:clrMapOvr>
+</p:sld>
+</file>
+
+<file path=ppt/slides/slide5.xml><?xml version="1.0" encoding="utf-8"?>
+<p:sld xmlns:a="http://schemas.openxmlformats.org/drawingml/2006/main" xmlns:p="http://schemas.openxmlformats.org/presentationml/2006/main" xmlns:r="http://schemas.openxmlformats.org/officeDocument/2006/relationships">
+  <p:cSld>
+    <p:bg>
+      <p:bgPr>
+        <a:solidFill>
+          <a:srgbClr val="FFFFFF"/>
+        </a:solidFill>
+        <a:effectLst/>
+      </p:bgPr>
+    </p:bg>
+    <p:spTree>
+      <p:nvGrpSpPr>
+        <p:cNvPr id="1" name=""/>
+        <p:cNvGrpSpPr/>
+        <p:nvPr/>
+      </p:nvGrpSpPr>
+      <p:grpSpPr/>
+      <p:sp>
+        <p:nvSpPr>
+          <p:cNvPr id="2" name="TextBox 1"/>
+          <p:cNvSpPr txBox="1"/>
+          <p:nvPr/>
+        </p:nvSpPr>
+        <p:spPr>
+          <a:xfrm>
+            <a:off x="548640" y="320040"/>
+            <a:ext cx="11094415" cy="274320"/>
+          </a:xfrm>
+          <a:prstGeom prst="rect">
+            <a:avLst/>
+          </a:prstGeom>
+          <a:noFill/>
+        </p:spPr>
+        <p:txBody>
+          <a:bodyPr wrap="square" anchor="t" lIns="0" rIns="0" tIns="0" bIns="0"/>
+          <a:lstStyle/>
+          <a:p>
+            <a:pPr algn="l"/>
+            <a:r>
+              <a:rPr sz="1100" b="1" i="0">
+                <a:solidFill>
+                  <a:srgbClr val="54595D"/>
+                </a:solidFill>
+                <a:latin typeface="Calibri"/>
+              </a:rPr>
+              <a:t>MECHANICAL ENGINEERING  ·  Mechanical: Knowledge criteria</a:t>
+            </a:r>
+          </a:p>
+        </p:txBody>
+      </p:sp>
+      <p:sp>
+        <p:nvSpPr>
+          <p:cNvPr id="3" name="TextBox 2"/>
+          <p:cNvSpPr txBox="1"/>
+          <p:nvPr/>
+        </p:nvSpPr>
+        <p:spPr>
+          <a:xfrm>
+            <a:off x="548640" y="566928"/>
+            <a:ext cx="11094415" cy="822960"/>
+          </a:xfrm>
+          <a:prstGeom prst="rect">
+            <a:avLst/>
+          </a:prstGeom>
+          <a:noFill/>
+        </p:spPr>
+        <p:txBody>
+          <a:bodyPr wrap="square" anchor="ctr" lIns="0" rIns="0" tIns="0" bIns="0"/>
+          <a:lstStyle/>
+          <a:p>
+            <a:pPr algn="l"/>
+            <a:r>
+              <a:rPr sz="3200" b="1" i="0">
+                <a:solidFill>
+                  <a:srgbClr val="03306E"/>
+                </a:solidFill>
+                <a:latin typeface="Cambria"/>
+              </a:rPr>
+              <a:t>Quick check: Principles of engineering design</a:t>
+            </a:r>
+          </a:p>
+        </p:txBody>
+      </p:sp>
+      <p:sp>
+        <p:nvSpPr>
+          <p:cNvPr id="4" name="TextBox 3"/>
+          <p:cNvSpPr txBox="1"/>
+          <p:nvPr/>
+        </p:nvSpPr>
+        <p:spPr>
+          <a:xfrm>
+            <a:off x="548640" y="6446520"/>
+            <a:ext cx="8229600" cy="274320"/>
+          </a:xfrm>
+          <a:prstGeom prst="rect">
+            <a:avLst/>
+          </a:prstGeom>
+          <a:noFill/>
+        </p:spPr>
+        <p:txBody>
+          <a:bodyPr wrap="square" anchor="t" lIns="0" rIns="0" tIns="0" bIns="0"/>
+          <a:lstStyle/>
+          <a:p>
+            <a:pPr algn="l"/>
+            <a:r>
+              <a:rPr sz="1000" b="0" i="0">
+                <a:solidFill>
+                  <a:srgbClr val="54595D"/>
+                </a:solidFill>
+                <a:latin typeface="Calibri"/>
+              </a:rPr>
+              <a:t>Design and Development for Engineering and Manufacturing T Level  ·  Design Principles, Methodologies and Verification</a:t>
+            </a:r>
+          </a:p>
+        </p:txBody>
+      </p:sp>
+      <p:sp>
+        <p:nvSpPr>
+          <p:cNvPr id="5" name="TextBox 4"/>
+          <p:cNvSpPr txBox="1"/>
+          <p:nvPr/>
+        </p:nvSpPr>
+        <p:spPr>
+          <a:xfrm>
+            <a:off x="10728655" y="6446520"/>
+            <a:ext cx="914400" cy="274320"/>
+          </a:xfrm>
+          <a:prstGeom prst="rect">
+            <a:avLst/>
+          </a:prstGeom>
+          <a:noFill/>
+        </p:spPr>
+        <p:txBody>
+          <a:bodyPr wrap="square" anchor="t" lIns="0" rIns="0" tIns="0" bIns="0"/>
+          <a:lstStyle/>
+          <a:p>
+            <a:pPr algn="r"/>
+            <a:r>
+              <a:rPr sz="1000" b="0" i="0">
+                <a:solidFill>
+                  <a:srgbClr val="54595D"/>
+                </a:solidFill>
+                <a:latin typeface="Calibri"/>
+              </a:rPr>
+              <a:t>5</a:t>
+            </a:r>
+          </a:p>
+        </p:txBody>
+      </p:sp>
+      <p:sp>
+        <p:nvSpPr>
+          <p:cNvPr id="6" name="Oval 5"/>
+          <p:cNvSpPr/>
+          <p:nvPr/>
+        </p:nvSpPr>
+        <p:spPr>
+          <a:xfrm>
+            <a:off x="548640" y="1691640"/>
+            <a:ext cx="502920" cy="502920"/>
+          </a:xfrm>
+          <a:prstGeom prst="ellipse">
+            <a:avLst/>
+          </a:prstGeom>
+          <a:solidFill>
+            <a:srgbClr val="E0463A"/>
+          </a:solidFill>
+          <a:ln>
+            <a:noFill/>
+          </a:ln>
+          <a:effectLst/>
+        </p:spPr>
+        <p:style>
+          <a:lnRef idx="1">
+            <a:schemeClr val="accent1"/>
+          </a:lnRef>
+          <a:fillRef idx="3">
+            <a:schemeClr val="accent1"/>
+          </a:fillRef>
+          <a:effectRef idx="2">
+            <a:schemeClr val="accent1"/>
+          </a:effectRef>
+          <a:fontRef idx="minor">
+            <a:schemeClr val="lt1"/>
+          </a:fontRef>
+        </p:style>
+        <p:txBody>
+          <a:bodyPr rtlCol="0" anchor="ctr" lIns="0" rIns="0" tIns="0" bIns="0"/>
+          <a:lstStyle/>
+          <a:p>
+            <a:pPr algn="ctr"/>
+            <a:r>
+              <a:rPr sz="1600" b="1">
+                <a:solidFill>
+                  <a:srgbClr val="FFFFFF"/>
+                </a:solidFill>
+                <a:latin typeface="Calibri"/>
+              </a:rPr>
+              <a:t>1</a:t>
+            </a:r>
+          </a:p>
+        </p:txBody>
+      </p:sp>
+      <p:sp>
+        <p:nvSpPr>
+          <p:cNvPr id="7" name="TextBox 6"/>
+          <p:cNvSpPr txBox="1"/>
+          <p:nvPr/>
+        </p:nvSpPr>
+        <p:spPr>
+          <a:xfrm>
+            <a:off x="1371600" y="1645920"/>
+            <a:ext cx="10271455" cy="1188720"/>
+          </a:xfrm>
+          <a:prstGeom prst="rect">
+            <a:avLst/>
+          </a:prstGeom>
+          <a:noFill/>
+        </p:spPr>
+        <p:txBody>
+          <a:bodyPr wrap="square" anchor="t" lIns="0" rIns="0" tIns="0" bIns="0"/>
+          <a:lstStyle/>
+          <a:p>
+            <a:pPr algn="l"/>
+            <a:r>
+              <a:rPr sz="2400" b="0" i="0">
+                <a:solidFill>
+                  <a:srgbClr val="202122"/>
+                </a:solidFill>
+                <a:latin typeface="Calibri"/>
+              </a:rPr>
+              <a:t>Name three ways to identify requirements.</a:t>
+            </a:r>
+          </a:p>
+        </p:txBody>
+      </p:sp>
+      <p:sp>
+        <p:nvSpPr>
+          <p:cNvPr id="8" name="Oval 7"/>
+          <p:cNvSpPr/>
+          <p:nvPr/>
+        </p:nvSpPr>
+        <p:spPr>
+          <a:xfrm>
+            <a:off x="548640" y="3108960"/>
+            <a:ext cx="502920" cy="502920"/>
+          </a:xfrm>
+          <a:prstGeom prst="ellipse">
+            <a:avLst/>
+          </a:prstGeom>
+          <a:solidFill>
+            <a:srgbClr val="E0463A"/>
+          </a:solidFill>
+          <a:ln>
+            <a:noFill/>
+          </a:ln>
+          <a:effectLst/>
+        </p:spPr>
+        <p:style>
+          <a:lnRef idx="1">
+            <a:schemeClr val="accent1"/>
+          </a:lnRef>
+          <a:fillRef idx="3">
+            <a:schemeClr val="accent1"/>
+          </a:fillRef>
+          <a:effectRef idx="2">
+            <a:schemeClr val="accent1"/>
+          </a:effectRef>
+          <a:fontRef idx="minor">
+            <a:schemeClr val="lt1"/>
+          </a:fontRef>
+        </p:style>
+        <p:txBody>
+          <a:bodyPr rtlCol="0" anchor="ctr" lIns="0" rIns="0" tIns="0" bIns="0"/>
+          <a:lstStyle/>
+          <a:p>
+            <a:pPr algn="ctr"/>
+            <a:r>
+              <a:rPr sz="1600" b="1">
+                <a:solidFill>
+                  <a:srgbClr val="FFFFFF"/>
+                </a:solidFill>
+                <a:latin typeface="Calibri"/>
+              </a:rPr>
+              <a:t>2</a:t>
+            </a:r>
+          </a:p>
+        </p:txBody>
+      </p:sp>
+      <p:sp>
+        <p:nvSpPr>
+          <p:cNvPr id="9" name="TextBox 8"/>
+          <p:cNvSpPr txBox="1"/>
+          <p:nvPr/>
+        </p:nvSpPr>
+        <p:spPr>
+          <a:xfrm>
+            <a:off x="1371600" y="3063240"/>
+            <a:ext cx="10271455" cy="1188720"/>
+          </a:xfrm>
+          <a:prstGeom prst="rect">
+            <a:avLst/>
+          </a:prstGeom>
+          <a:noFill/>
+        </p:spPr>
+        <p:txBody>
+          <a:bodyPr wrap="square" anchor="t" lIns="0" rIns="0" tIns="0" bIns="0"/>
+          <a:lstStyle/>
+          <a:p>
+            <a:pPr algn="l"/>
+            <a:r>
+              <a:rPr sz="2400" b="0" i="0">
+                <a:solidFill>
+                  <a:srgbClr val="202122"/>
+                </a:solidFill>
+                <a:latin typeface="Calibri"/>
+              </a:rPr>
+              <a:t>What is a specification?</a:t>
+            </a:r>
+          </a:p>
+        </p:txBody>
+      </p:sp>
+      <p:sp>
+        <p:nvSpPr>
+          <p:cNvPr id="10" name="Oval 9"/>
+          <p:cNvSpPr/>
+          <p:nvPr/>
+        </p:nvSpPr>
+        <p:spPr>
+          <a:xfrm>
+            <a:off x="548640" y="4526280"/>
+            <a:ext cx="502920" cy="502920"/>
+          </a:xfrm>
+          <a:prstGeom prst="ellipse">
+            <a:avLst/>
+          </a:prstGeom>
+          <a:solidFill>
+            <a:srgbClr val="E0463A"/>
+          </a:solidFill>
+          <a:ln>
+            <a:noFill/>
+          </a:ln>
+          <a:effectLst/>
+        </p:spPr>
+        <p:style>
+          <a:lnRef idx="1">
+            <a:schemeClr val="accent1"/>
+          </a:lnRef>
+          <a:fillRef idx="3">
+            <a:schemeClr val="accent1"/>
+          </a:fillRef>
+          <a:effectRef idx="2">
+            <a:schemeClr val="accent1"/>
+          </a:effectRef>
+          <a:fontRef idx="minor">
+            <a:schemeClr val="lt1"/>
+          </a:fontRef>
+        </p:style>
+        <p:txBody>
+          <a:bodyPr rtlCol="0" anchor="ctr" lIns="0" rIns="0" tIns="0" bIns="0"/>
+          <a:lstStyle/>
+          <a:p>
+            <a:pPr algn="ctr"/>
+            <a:r>
+              <a:rPr sz="1600" b="1">
+                <a:solidFill>
+                  <a:srgbClr val="FFFFFF"/>
+                </a:solidFill>
+                <a:latin typeface="Calibri"/>
+              </a:rPr>
+              <a:t>3</a:t>
+            </a:r>
+          </a:p>
+        </p:txBody>
+      </p:sp>
+      <p:sp>
+        <p:nvSpPr>
+          <p:cNvPr id="11" name="TextBox 10"/>
+          <p:cNvSpPr txBox="1"/>
+          <p:nvPr/>
+        </p:nvSpPr>
+        <p:spPr>
+          <a:xfrm>
+            <a:off x="1371600" y="4480560"/>
+            <a:ext cx="10271455" cy="1188720"/>
+          </a:xfrm>
+          <a:prstGeom prst="rect">
+            <a:avLst/>
+          </a:prstGeom>
+          <a:noFill/>
+        </p:spPr>
+        <p:txBody>
+          <a:bodyPr wrap="square" anchor="t" lIns="0" rIns="0" tIns="0" bIns="0"/>
+          <a:lstStyle/>
+          <a:p>
+            <a:pPr algn="l"/>
+            <a:r>
+              <a:rPr sz="2400" b="0" i="0">
+                <a:solidFill>
+                  <a:srgbClr val="202122"/>
+                </a:solidFill>
+                <a:latin typeface="Calibri"/>
+              </a:rPr>
+              <a:t>Why agree the scope with the client?</a:t>
+            </a:r>
+          </a:p>
+        </p:txBody>
+      </p:sp>
+      <p:sp>
+        <p:nvSpPr>
+          <p:cNvPr id="12" name="TextBox 11"/>
+          <p:cNvSpPr txBox="1"/>
+          <p:nvPr/>
+        </p:nvSpPr>
+        <p:spPr>
+          <a:xfrm>
+            <a:off x="548640" y="5852160"/>
+            <a:ext cx="11094415" cy="365760"/>
+          </a:xfrm>
+          <a:prstGeom prst="rect">
+            <a:avLst/>
+          </a:prstGeom>
+          <a:noFill/>
+        </p:spPr>
+        <p:txBody>
+          <a:bodyPr wrap="square" anchor="t" lIns="0" rIns="0" tIns="0" bIns="0"/>
+          <a:lstStyle/>
+          <a:p>
+            <a:pPr algn="l"/>
+            <a:r>
+              <a:rPr sz="1300" b="0" i="1">
+                <a:solidFill>
+                  <a:srgbClr val="54595D"/>
+                </a:solidFill>
+                <a:latin typeface="Calibri"/>
+              </a:rPr>
+              <a:t>Answer on mini whiteboards or in your book. Answers are in the speaker notes.</a:t>
+            </a:r>
+          </a:p>
+        </p:txBody>
+      </p:sp>
+    </p:spTree>
+  </p:cSld>
+  <p:clrMapOvr>
+    <a:masterClrMapping/>
+  </p:clrMapOvr>
+</p:sld>
+</file>
+
+<file path=ppt/slides/slide6.xml><?xml version="1.0" encoding="utf-8"?>
+<p:sld xmlns:a="http://schemas.openxmlformats.org/drawingml/2006/main" xmlns:p="http://schemas.openxmlformats.org/presentationml/2006/main" xmlns:r="http://schemas.openxmlformats.org/officeDocument/2006/relationships">
+  <p:cSld>
+    <p:bg>
+      <p:bgPr>
+        <a:solidFill>
+          <a:srgbClr val="FFFFFF"/>
+        </a:solidFill>
+        <a:effectLst/>
+      </p:bgPr>
+    </p:bg>
+    <p:spTree>
+      <p:nvGrpSpPr>
+        <p:cNvPr id="1" name=""/>
+        <p:cNvGrpSpPr/>
+        <p:nvPr/>
+      </p:nvGrpSpPr>
+      <p:grpSpPr/>
+      <p:sp>
+        <p:nvSpPr>
+          <p:cNvPr id="2" name="TextBox 1"/>
+          <p:cNvSpPr txBox="1"/>
+          <p:nvPr/>
+        </p:nvSpPr>
+        <p:spPr>
+          <a:xfrm>
+            <a:off x="548640" y="320040"/>
+            <a:ext cx="11094415" cy="274320"/>
+          </a:xfrm>
+          <a:prstGeom prst="rect">
+            <a:avLst/>
+          </a:prstGeom>
+          <a:noFill/>
+        </p:spPr>
+        <p:txBody>
+          <a:bodyPr wrap="square" anchor="t" lIns="0" rIns="0" tIns="0" bIns="0"/>
+          <a:lstStyle/>
+          <a:p>
+            <a:pPr algn="l"/>
+            <a:r>
+              <a:rPr sz="1100" b="1" i="0">
+                <a:solidFill>
+                  <a:srgbClr val="54595D"/>
+                </a:solidFill>
+                <a:latin typeface="Calibri"/>
+              </a:rPr>
+              <a:t>MECHANICAL ENGINEERING  ·  Mechanical: Knowledge criteria</a:t>
+            </a:r>
+          </a:p>
+        </p:txBody>
+      </p:sp>
+      <p:sp>
+        <p:nvSpPr>
+          <p:cNvPr id="3" name="TextBox 2"/>
+          <p:cNvSpPr txBox="1"/>
+          <p:nvPr/>
+        </p:nvSpPr>
+        <p:spPr>
+          <a:xfrm>
+            <a:off x="548640" y="566928"/>
+            <a:ext cx="11094415" cy="822960"/>
+          </a:xfrm>
+          <a:prstGeom prst="rect">
+            <a:avLst/>
+          </a:prstGeom>
+          <a:noFill/>
+        </p:spPr>
+        <p:txBody>
+          <a:bodyPr wrap="square" anchor="ctr" lIns="0" rIns="0" tIns="0" bIns="0"/>
+          <a:lstStyle/>
+          <a:p>
+            <a:pPr algn="l"/>
+            <a:r>
+              <a:rPr sz="3200" b="1" i="0">
+                <a:solidFill>
+                  <a:srgbClr val="03306E"/>
+                </a:solidFill>
+                <a:latin typeface="Cambria"/>
+              </a:rPr>
+              <a:t>Design methodologies</a:t>
+            </a:r>
+          </a:p>
+        </p:txBody>
+      </p:sp>
+      <p:sp>
+        <p:nvSpPr>
+          <p:cNvPr id="4" name="TextBox 3"/>
+          <p:cNvSpPr txBox="1"/>
+          <p:nvPr/>
+        </p:nvSpPr>
+        <p:spPr>
+          <a:xfrm>
+            <a:off x="548640" y="6446520"/>
+            <a:ext cx="8229600" cy="274320"/>
+          </a:xfrm>
+          <a:prstGeom prst="rect">
+            <a:avLst/>
+          </a:prstGeom>
+          <a:noFill/>
+        </p:spPr>
+        <p:txBody>
+          <a:bodyPr wrap="square" anchor="t" lIns="0" rIns="0" tIns="0" bIns="0"/>
+          <a:lstStyle/>
+          <a:p>
+            <a:pPr algn="l"/>
+            <a:r>
+              <a:rPr sz="1000" b="0" i="0">
+                <a:solidFill>
+                  <a:srgbClr val="54595D"/>
+                </a:solidFill>
+                <a:latin typeface="Calibri"/>
+              </a:rPr>
+              <a:t>Design and Development for Engineering and Manufacturing T Level  ·  Design Principles, Methodologies and Verification</a:t>
+            </a:r>
+          </a:p>
+        </p:txBody>
+      </p:sp>
+      <p:sp>
+        <p:nvSpPr>
+          <p:cNvPr id="5" name="TextBox 4"/>
+          <p:cNvSpPr txBox="1"/>
+          <p:nvPr/>
+        </p:nvSpPr>
+        <p:spPr>
+          <a:xfrm>
+            <a:off x="10728655" y="6446520"/>
+            <a:ext cx="914400" cy="274320"/>
+          </a:xfrm>
+          <a:prstGeom prst="rect">
+            <a:avLst/>
+          </a:prstGeom>
+          <a:noFill/>
+        </p:spPr>
+        <p:txBody>
+          <a:bodyPr wrap="square" anchor="t" lIns="0" rIns="0" tIns="0" bIns="0"/>
+          <a:lstStyle/>
+          <a:p>
+            <a:pPr algn="r"/>
+            <a:r>
+              <a:rPr sz="1000" b="0" i="0">
+                <a:solidFill>
+                  <a:srgbClr val="54595D"/>
+                </a:solidFill>
+                <a:latin typeface="Calibri"/>
+              </a:rPr>
+              <a:t>6</a:t>
+            </a:r>
+          </a:p>
+        </p:txBody>
+      </p:sp>
+      <p:sp>
+        <p:nvSpPr>
+          <p:cNvPr id="6" name="TextBox 5"/>
+          <p:cNvSpPr txBox="1"/>
+          <p:nvPr/>
+        </p:nvSpPr>
+        <p:spPr>
+          <a:xfrm>
+            <a:off x="548640" y="1554480"/>
+            <a:ext cx="6720840" cy="4617720"/>
+          </a:xfrm>
+          <a:prstGeom prst="rect">
+            <a:avLst/>
+          </a:prstGeom>
+          <a:noFill/>
+        </p:spPr>
+        <p:txBody>
+          <a:bodyPr wrap="square" lIns="0" rIns="0" tIns="0" bIns="0">
+            <a:spAutoFit/>
+          </a:bodyPr>
+          <a:lstStyle/>
+          <a:p>
+            <a:pPr>
+              <a:spcAft>
+                <a:spcPts val="1260"/>
+              </a:spcAft>
+            </a:pPr>
+            <a:r>
+              <a:rPr sz="2100" b="0">
+                <a:solidFill>
+                  <a:srgbClr val="202122"/>
+                </a:solidFill>
+                <a:latin typeface="Calibri"/>
+              </a:rPr>
+              <a:t>The systems approach designs the whole product and how its parts interact, suiting complex products such as gearboxes. The sub-assembly approach designs groups of parts as units, suiting modular products. Component-by-component design works on each part individually, suiting simple or bespoke items.</a:t>
+            </a:r>
+          </a:p>
+          <a:p>
+            <a:pPr>
+              <a:spcAft>
+                <a:spcPts val="1260"/>
+              </a:spcAft>
+            </a:pPr>
+            <a:r>
+              <a:rPr sz="2100" b="0">
+                <a:solidFill>
+                  <a:srgbClr val="202122"/>
+                </a:solidFill>
+                <a:latin typeface="Calibri"/>
+              </a:rPr>
+              <a:t>Design for manufacture and assembly (DFM/DFA) makes parts easy and cheap to make and fit together, within the process's capability and tolerances.</a:t>
+            </a:r>
+          </a:p>
+          <a:p>
+            <a:pPr>
+              <a:spcAft>
+                <a:spcPts val="1260"/>
+              </a:spcAft>
+            </a:pPr>
+            <a:r>
+              <a:rPr sz="2100" b="0">
+                <a:solidFill>
+                  <a:srgbClr val="202122"/>
+                </a:solidFill>
+                <a:latin typeface="Calibri"/>
+              </a:rPr>
+              <a:t>Planned obsolescence deliberately limits a product's life. Anthropometric tables help size products to people.</a:t>
+            </a:r>
+          </a:p>
+        </p:txBody>
+      </p:sp>
+      <p:sp>
+        <p:nvSpPr>
+          <p:cNvPr id="7" name="Rounded Rectangle 6"/>
+          <p:cNvSpPr/>
+          <p:nvPr/>
+        </p:nvSpPr>
+        <p:spPr>
+          <a:xfrm>
+            <a:off x="7772400" y="1554480"/>
+            <a:ext cx="3867912" cy="4526280"/>
+          </a:xfrm>
+          <a:prstGeom prst="roundRect">
+            <a:avLst>
+              <a:gd name="adj" fmla="val 8000"/>
+            </a:avLst>
+          </a:prstGeom>
+          <a:solidFill>
+            <a:srgbClr val="03306E"/>
+          </a:solidFill>
+          <a:ln>
+            <a:noFill/>
+          </a:ln>
+          <a:effectLst/>
+        </p:spPr>
+        <p:style>
+          <a:lnRef idx="1">
+            <a:schemeClr val="accent1"/>
+          </a:lnRef>
+          <a:fillRef idx="3">
+            <a:schemeClr val="accent1"/>
+          </a:fillRef>
+          <a:effectRef idx="2">
+            <a:schemeClr val="accent1"/>
+          </a:effectRef>
+          <a:fontRef idx="minor">
+            <a:schemeClr val="lt1"/>
+          </a:fontRef>
+        </p:style>
+        <p:txBody>
+          <a:bodyPr rtlCol="0" anchor="ctr"/>
+          <a:lstStyle/>
+          <a:p/>
+        </p:txBody>
+      </p:sp>
+      <p:sp>
+        <p:nvSpPr>
+          <p:cNvPr id="8" name="Oval 7"/>
+          <p:cNvSpPr/>
+          <p:nvPr/>
+        </p:nvSpPr>
+        <p:spPr>
+          <a:xfrm>
+            <a:off x="8046720" y="1828800"/>
+            <a:ext cx="548640" cy="548640"/>
+          </a:xfrm>
+          <a:prstGeom prst="ellipse">
+            <a:avLst/>
+          </a:prstGeom>
+          <a:solidFill>
+            <a:srgbClr val="E0463A"/>
+          </a:solidFill>
+          <a:ln>
+            <a:noFill/>
+          </a:ln>
+          <a:effectLst/>
+        </p:spPr>
+        <p:style>
+          <a:lnRef idx="1">
+            <a:schemeClr val="accent1"/>
+          </a:lnRef>
+          <a:fillRef idx="3">
+            <a:schemeClr val="accent1"/>
+          </a:fillRef>
+          <a:effectRef idx="2">
+            <a:schemeClr val="accent1"/>
+          </a:effectRef>
+          <a:fontRef idx="minor">
+            <a:schemeClr val="lt1"/>
+          </a:fontRef>
+        </p:style>
+        <p:txBody>
+          <a:bodyPr rtlCol="0" anchor="ctr" lIns="0" rIns="0" tIns="0" bIns="0"/>
+          <a:lstStyle/>
+          <a:p>
+            <a:pPr algn="ctr"/>
+            <a:r>
+              <a:rPr sz="1300" b="1">
+                <a:solidFill>
+                  <a:srgbClr val="FFFFFF"/>
+                </a:solidFill>
+                <a:latin typeface="Calibri"/>
+              </a:rPr>
+              <a:t>e.g.</a:t>
+            </a:r>
+          </a:p>
+        </p:txBody>
+      </p:sp>
+      <p:sp>
+        <p:nvSpPr>
+          <p:cNvPr id="9" name="TextBox 8"/>
+          <p:cNvSpPr txBox="1"/>
+          <p:nvPr/>
+        </p:nvSpPr>
+        <p:spPr>
+          <a:xfrm>
+            <a:off x="8046720" y="2560320"/>
+            <a:ext cx="3291840" cy="365760"/>
+          </a:xfrm>
+          <a:prstGeom prst="rect">
+            <a:avLst/>
+          </a:prstGeom>
+          <a:noFill/>
+        </p:spPr>
+        <p:txBody>
+          <a:bodyPr wrap="square" anchor="t" lIns="0" rIns="0" tIns="0" bIns="0"/>
+          <a:lstStyle/>
+          <a:p>
+            <a:pPr algn="l"/>
+            <a:r>
+              <a:rPr sz="1300" b="1" i="0">
+                <a:solidFill>
+                  <a:srgbClr val="A9C8F0"/>
+                </a:solidFill>
+                <a:latin typeface="Calibri"/>
+              </a:rPr>
+              <a:t>EXAMPLE</a:t>
+            </a:r>
+          </a:p>
+        </p:txBody>
+      </p:sp>
+      <p:sp>
+        <p:nvSpPr>
+          <p:cNvPr id="10" name="TextBox 9"/>
+          <p:cNvSpPr txBox="1"/>
+          <p:nvPr/>
+        </p:nvSpPr>
+        <p:spPr>
+          <a:xfrm>
+            <a:off x="8046720" y="2971800"/>
+            <a:ext cx="3291840" cy="2971800"/>
+          </a:xfrm>
+          <a:prstGeom prst="rect">
+            <a:avLst/>
+          </a:prstGeom>
+          <a:noFill/>
+        </p:spPr>
+        <p:txBody>
+          <a:bodyPr wrap="square" anchor="t" lIns="0" rIns="0" tIns="0" bIns="0"/>
+          <a:lstStyle/>
+          <a:p>
+            <a:pPr algn="l"/>
+            <a:r>
+              <a:rPr sz="1900" b="0" i="0">
+                <a:solidFill>
+                  <a:srgbClr val="FFFFFF"/>
+                </a:solidFill>
+                <a:latin typeface="Cambria"/>
+              </a:rPr>
+              <a:t>DFA: designing a cover to snap-fit instead of using six screws cuts assembly time from two minutes to ten seconds.</a:t>
+            </a:r>
+          </a:p>
+        </p:txBody>
+      </p:sp>
+    </p:spTree>
+  </p:cSld>
+  <p:clrMapOvr>
+    <a:masterClrMapping/>
+  </p:clrMapOvr>
+</p:sld>
+</file>
+
+<file path=ppt/slides/slide7.xml><?xml version="1.0" encoding="utf-8"?>
+<p:sld xmlns:a="http://schemas.openxmlformats.org/drawingml/2006/main" xmlns:p="http://schemas.openxmlformats.org/presentationml/2006/main" xmlns:r="http://schemas.openxmlformats.org/officeDocument/2006/relationships">
+  <p:cSld>
+    <p:bg>
+      <p:bgPr>
+        <a:solidFill>
+          <a:srgbClr val="FFFFFF"/>
+        </a:solidFill>
+        <a:effectLst/>
+      </p:bgPr>
+    </p:bg>
+    <p:spTree>
+      <p:nvGrpSpPr>
+        <p:cNvPr id="1" name=""/>
+        <p:cNvGrpSpPr/>
+        <p:nvPr/>
+      </p:nvGrpSpPr>
+      <p:grpSpPr/>
+      <p:sp>
+        <p:nvSpPr>
+          <p:cNvPr id="2" name="TextBox 1"/>
+          <p:cNvSpPr txBox="1"/>
+          <p:nvPr/>
+        </p:nvSpPr>
+        <p:spPr>
+          <a:xfrm>
+            <a:off x="548640" y="320040"/>
+            <a:ext cx="11094415" cy="274320"/>
+          </a:xfrm>
+          <a:prstGeom prst="rect">
+            <a:avLst/>
+          </a:prstGeom>
+          <a:noFill/>
+        </p:spPr>
+        <p:txBody>
+          <a:bodyPr wrap="square" anchor="t" lIns="0" rIns="0" tIns="0" bIns="0"/>
+          <a:lstStyle/>
+          <a:p>
+            <a:pPr algn="l"/>
+            <a:r>
+              <a:rPr sz="1100" b="1" i="0">
+                <a:solidFill>
+                  <a:srgbClr val="54595D"/>
+                </a:solidFill>
+                <a:latin typeface="Calibri"/>
+              </a:rPr>
+              <a:t>MECHANICAL ENGINEERING  ·  Mechanical: Knowledge criteria</a:t>
+            </a:r>
+          </a:p>
+        </p:txBody>
+      </p:sp>
+      <p:sp>
+        <p:nvSpPr>
+          <p:cNvPr id="3" name="TextBox 2"/>
+          <p:cNvSpPr txBox="1"/>
+          <p:nvPr/>
+        </p:nvSpPr>
+        <p:spPr>
+          <a:xfrm>
+            <a:off x="548640" y="566928"/>
+            <a:ext cx="11094415" cy="822960"/>
+          </a:xfrm>
+          <a:prstGeom prst="rect">
+            <a:avLst/>
+          </a:prstGeom>
+          <a:noFill/>
+        </p:spPr>
+        <p:txBody>
+          <a:bodyPr wrap="square" anchor="ctr" lIns="0" rIns="0" tIns="0" bIns="0"/>
+          <a:lstStyle/>
+          <a:p>
+            <a:pPr algn="l"/>
+            <a:r>
+              <a:rPr sz="3200" b="1" i="0">
+                <a:solidFill>
+                  <a:srgbClr val="03306E"/>
+                </a:solidFill>
+                <a:latin typeface="Cambria"/>
+              </a:rPr>
+              <a:t>Design methodologies</a:t>
+            </a:r>
+          </a:p>
+        </p:txBody>
+      </p:sp>
+      <p:sp>
+        <p:nvSpPr>
+          <p:cNvPr id="4" name="TextBox 3"/>
+          <p:cNvSpPr txBox="1"/>
+          <p:nvPr/>
+        </p:nvSpPr>
+        <p:spPr>
+          <a:xfrm>
+            <a:off x="548640" y="6446520"/>
+            <a:ext cx="8229600" cy="274320"/>
+          </a:xfrm>
+          <a:prstGeom prst="rect">
+            <a:avLst/>
+          </a:prstGeom>
+          <a:noFill/>
+        </p:spPr>
+        <p:txBody>
+          <a:bodyPr wrap="square" anchor="t" lIns="0" rIns="0" tIns="0" bIns="0"/>
+          <a:lstStyle/>
+          <a:p>
+            <a:pPr algn="l"/>
+            <a:r>
+              <a:rPr sz="1000" b="0" i="0">
+                <a:solidFill>
+                  <a:srgbClr val="54595D"/>
+                </a:solidFill>
+                <a:latin typeface="Calibri"/>
+              </a:rPr>
+              <a:t>Design and Development for Engineering and Manufacturing T Level  ·  Design Principles, Methodologies and Verification</a:t>
+            </a:r>
+          </a:p>
+        </p:txBody>
+      </p:sp>
+      <p:sp>
+        <p:nvSpPr>
+          <p:cNvPr id="5" name="TextBox 4"/>
+          <p:cNvSpPr txBox="1"/>
+          <p:nvPr/>
+        </p:nvSpPr>
+        <p:spPr>
+          <a:xfrm>
+            <a:off x="10728655" y="6446520"/>
+            <a:ext cx="914400" cy="274320"/>
+          </a:xfrm>
+          <a:prstGeom prst="rect">
+            <a:avLst/>
+          </a:prstGeom>
+          <a:noFill/>
+        </p:spPr>
+        <p:txBody>
+          <a:bodyPr wrap="square" anchor="t" lIns="0" rIns="0" tIns="0" bIns="0"/>
+          <a:lstStyle/>
+          <a:p>
+            <a:pPr algn="r"/>
+            <a:r>
+              <a:rPr sz="1000" b="0" i="0">
+                <a:solidFill>
+                  <a:srgbClr val="54595D"/>
+                </a:solidFill>
+                <a:latin typeface="Calibri"/>
+              </a:rPr>
+              <a:t>7</a:t>
             </a:r>
           </a:p>
         </p:txBody>
@@ -5990,1626 +10863,6 @@
 </p:sld>
 </file>
 
-<file path=ppt/slides/slide5.xml><?xml version="1.0" encoding="utf-8"?>
-<p:sld xmlns:a="http://schemas.openxmlformats.org/drawingml/2006/main" xmlns:p="http://schemas.openxmlformats.org/presentationml/2006/main" xmlns:r="http://schemas.openxmlformats.org/officeDocument/2006/relationships">
-  <p:cSld>
-    <p:bg>
-      <p:bgPr>
-        <a:solidFill>
-          <a:srgbClr val="FFFFFF"/>
-        </a:solidFill>
-        <a:effectLst/>
-      </p:bgPr>
-    </p:bg>
-    <p:spTree>
-      <p:nvGrpSpPr>
-        <p:cNvPr id="1" name=""/>
-        <p:cNvGrpSpPr/>
-        <p:nvPr/>
-      </p:nvGrpSpPr>
-      <p:grpSpPr/>
-      <p:sp>
-        <p:nvSpPr>
-          <p:cNvPr id="2" name="TextBox 1"/>
-          <p:cNvSpPr txBox="1"/>
-          <p:nvPr/>
-        </p:nvSpPr>
-        <p:spPr>
-          <a:xfrm>
-            <a:off x="548640" y="320040"/>
-            <a:ext cx="11094415" cy="274320"/>
-          </a:xfrm>
-          <a:prstGeom prst="rect">
-            <a:avLst/>
-          </a:prstGeom>
-          <a:noFill/>
-        </p:spPr>
-        <p:txBody>
-          <a:bodyPr wrap="square" anchor="t" lIns="0" rIns="0" tIns="0" bIns="0"/>
-          <a:lstStyle/>
-          <a:p>
-            <a:pPr algn="l"/>
-            <a:r>
-              <a:rPr sz="1100" b="1" i="0">
-                <a:solidFill>
-                  <a:srgbClr val="54595D"/>
-                </a:solidFill>
-                <a:latin typeface="Calibri"/>
-              </a:rPr>
-              <a:t>MECHANICAL ENGINEERING  ·  Mechanical: Knowledge criteria</a:t>
-            </a:r>
-          </a:p>
-        </p:txBody>
-      </p:sp>
-      <p:sp>
-        <p:nvSpPr>
-          <p:cNvPr id="3" name="TextBox 2"/>
-          <p:cNvSpPr txBox="1"/>
-          <p:nvPr/>
-        </p:nvSpPr>
-        <p:spPr>
-          <a:xfrm>
-            <a:off x="548640" y="566928"/>
-            <a:ext cx="11094415" cy="822960"/>
-          </a:xfrm>
-          <a:prstGeom prst="rect">
-            <a:avLst/>
-          </a:prstGeom>
-          <a:noFill/>
-        </p:spPr>
-        <p:txBody>
-          <a:bodyPr wrap="square" anchor="ctr" lIns="0" rIns="0" tIns="0" bIns="0"/>
-          <a:lstStyle/>
-          <a:p>
-            <a:pPr algn="l"/>
-            <a:r>
-              <a:rPr sz="3200" b="1" i="0">
-                <a:solidFill>
-                  <a:srgbClr val="03306E"/>
-                </a:solidFill>
-                <a:latin typeface="Cambria"/>
-              </a:rPr>
-              <a:t>Verification and validation</a:t>
-            </a:r>
-          </a:p>
-        </p:txBody>
-      </p:sp>
-      <p:sp>
-        <p:nvSpPr>
-          <p:cNvPr id="4" name="TextBox 3"/>
-          <p:cNvSpPr txBox="1"/>
-          <p:nvPr/>
-        </p:nvSpPr>
-        <p:spPr>
-          <a:xfrm>
-            <a:off x="548640" y="6446520"/>
-            <a:ext cx="8229600" cy="274320"/>
-          </a:xfrm>
-          <a:prstGeom prst="rect">
-            <a:avLst/>
-          </a:prstGeom>
-          <a:noFill/>
-        </p:spPr>
-        <p:txBody>
-          <a:bodyPr wrap="square" anchor="t" lIns="0" rIns="0" tIns="0" bIns="0"/>
-          <a:lstStyle/>
-          <a:p>
-            <a:pPr algn="l"/>
-            <a:r>
-              <a:rPr sz="1000" b="0" i="0">
-                <a:solidFill>
-                  <a:srgbClr val="54595D"/>
-                </a:solidFill>
-                <a:latin typeface="Calibri"/>
-              </a:rPr>
-              <a:t>Design and Development for Engineering and Manufacturing T Level  ·  Design Principles, Methodologies and Verification</a:t>
-            </a:r>
-          </a:p>
-        </p:txBody>
-      </p:sp>
-      <p:sp>
-        <p:nvSpPr>
-          <p:cNvPr id="5" name="TextBox 4"/>
-          <p:cNvSpPr txBox="1"/>
-          <p:nvPr/>
-        </p:nvSpPr>
-        <p:spPr>
-          <a:xfrm>
-            <a:off x="10728655" y="6446520"/>
-            <a:ext cx="914400" cy="274320"/>
-          </a:xfrm>
-          <a:prstGeom prst="rect">
-            <a:avLst/>
-          </a:prstGeom>
-          <a:noFill/>
-        </p:spPr>
-        <p:txBody>
-          <a:bodyPr wrap="square" anchor="t" lIns="0" rIns="0" tIns="0" bIns="0"/>
-          <a:lstStyle/>
-          <a:p>
-            <a:pPr algn="r"/>
-            <a:r>
-              <a:rPr sz="1000" b="0" i="0">
-                <a:solidFill>
-                  <a:srgbClr val="54595D"/>
-                </a:solidFill>
-                <a:latin typeface="Calibri"/>
-              </a:rPr>
-              <a:t>5</a:t>
-            </a:r>
-          </a:p>
-        </p:txBody>
-      </p:sp>
-      <p:sp>
-        <p:nvSpPr>
-          <p:cNvPr id="6" name="Rounded Rectangle 5"/>
-          <p:cNvSpPr/>
-          <p:nvPr/>
-        </p:nvSpPr>
-        <p:spPr>
-          <a:xfrm>
-            <a:off x="548640" y="1600200"/>
-            <a:ext cx="5364327" cy="640080"/>
-          </a:xfrm>
-          <a:prstGeom prst="roundRect">
-            <a:avLst>
-              <a:gd name="adj" fmla="val 15000"/>
-            </a:avLst>
-          </a:prstGeom>
-          <a:solidFill>
-            <a:srgbClr val="03306E"/>
-          </a:solidFill>
-          <a:ln>
-            <a:noFill/>
-          </a:ln>
-          <a:effectLst/>
-        </p:spPr>
-        <p:style>
-          <a:lnRef idx="1">
-            <a:schemeClr val="accent1"/>
-          </a:lnRef>
-          <a:fillRef idx="3">
-            <a:schemeClr val="accent1"/>
-          </a:fillRef>
-          <a:effectRef idx="2">
-            <a:schemeClr val="accent1"/>
-          </a:effectRef>
-          <a:fontRef idx="minor">
-            <a:schemeClr val="lt1"/>
-          </a:fontRef>
-        </p:style>
-        <p:txBody>
-          <a:bodyPr rtlCol="0" anchor="ctr"/>
-          <a:lstStyle/>
-          <a:p/>
-        </p:txBody>
-      </p:sp>
-      <p:sp>
-        <p:nvSpPr>
-          <p:cNvPr id="7" name="TextBox 6"/>
-          <p:cNvSpPr txBox="1"/>
-          <p:nvPr/>
-        </p:nvSpPr>
-        <p:spPr>
-          <a:xfrm>
-            <a:off x="777240" y="1600200"/>
-            <a:ext cx="4907127" cy="640080"/>
-          </a:xfrm>
-          <a:prstGeom prst="rect">
-            <a:avLst/>
-          </a:prstGeom>
-          <a:noFill/>
-        </p:spPr>
-        <p:txBody>
-          <a:bodyPr wrap="square" anchor="ctr" lIns="0" rIns="0" tIns="0" bIns="0"/>
-          <a:lstStyle/>
-          <a:p>
-            <a:pPr algn="l"/>
-            <a:r>
-              <a:rPr sz="2000" b="1" i="0">
-                <a:solidFill>
-                  <a:srgbClr val="FFFFFF"/>
-                </a:solidFill>
-                <a:latin typeface="Calibri"/>
-              </a:rPr>
-              <a:t>Verification</a:t>
-            </a:r>
-          </a:p>
-        </p:txBody>
-      </p:sp>
-      <p:sp>
-        <p:nvSpPr>
-          <p:cNvPr id="8" name="Rounded Rectangle 7"/>
-          <p:cNvSpPr/>
-          <p:nvPr/>
-        </p:nvSpPr>
-        <p:spPr>
-          <a:xfrm>
-            <a:off x="548640" y="2377440"/>
-            <a:ext cx="5364327" cy="3794760"/>
-          </a:xfrm>
-          <a:prstGeom prst="roundRect">
-            <a:avLst>
-              <a:gd name="adj" fmla="val 4000"/>
-            </a:avLst>
-          </a:prstGeom>
-          <a:solidFill>
-            <a:srgbClr val="EAF3FF"/>
-          </a:solidFill>
-          <a:ln>
-            <a:noFill/>
-          </a:ln>
-          <a:effectLst/>
-        </p:spPr>
-        <p:style>
-          <a:lnRef idx="1">
-            <a:schemeClr val="accent1"/>
-          </a:lnRef>
-          <a:fillRef idx="3">
-            <a:schemeClr val="accent1"/>
-          </a:fillRef>
-          <a:effectRef idx="2">
-            <a:schemeClr val="accent1"/>
-          </a:effectRef>
-          <a:fontRef idx="minor">
-            <a:schemeClr val="lt1"/>
-          </a:fontRef>
-        </p:style>
-        <p:txBody>
-          <a:bodyPr rtlCol="0" anchor="ctr"/>
-          <a:lstStyle/>
-          <a:p/>
-        </p:txBody>
-      </p:sp>
-      <p:sp>
-        <p:nvSpPr>
-          <p:cNvPr id="9" name="TextBox 8"/>
-          <p:cNvSpPr txBox="1"/>
-          <p:nvPr/>
-        </p:nvSpPr>
-        <p:spPr>
-          <a:xfrm>
-            <a:off x="822959" y="2606040"/>
-            <a:ext cx="4815687" cy="3337560"/>
-          </a:xfrm>
-          <a:prstGeom prst="rect">
-            <a:avLst/>
-          </a:prstGeom>
-          <a:noFill/>
-        </p:spPr>
-        <p:txBody>
-          <a:bodyPr wrap="square" lIns="0" rIns="0" tIns="0" bIns="0">
-            <a:spAutoFit/>
-          </a:bodyPr>
-          <a:lstStyle/>
-          <a:p>
-            <a:pPr marL="274320" indent="-274320">
-              <a:spcAft>
-                <a:spcPts val="990"/>
-              </a:spcAft>
-              <a:buClr>
-                <a:srgbClr val="0645AD"/>
-              </a:buClr>
-              <a:buFont typeface="Arial"/>
-              <a:buChar char="•"/>
-            </a:pPr>
-            <a:r>
-              <a:rPr sz="2200" b="0">
-                <a:solidFill>
-                  <a:srgbClr val="202122"/>
-                </a:solidFill>
-                <a:latin typeface="Calibri"/>
-              </a:rPr>
-              <a:t>Did we build it right?</a:t>
-            </a:r>
-          </a:p>
-          <a:p>
-            <a:pPr marL="274320" indent="-274320">
-              <a:spcAft>
-                <a:spcPts val="990"/>
-              </a:spcAft>
-              <a:buClr>
-                <a:srgbClr val="0645AD"/>
-              </a:buClr>
-              <a:buFont typeface="Arial"/>
-              <a:buChar char="•"/>
-            </a:pPr>
-            <a:r>
-              <a:rPr sz="2200" b="0">
-                <a:solidFill>
-                  <a:srgbClr val="202122"/>
-                </a:solidFill>
-                <a:latin typeface="Calibri"/>
-              </a:rPr>
-              <a:t>Checks the design against the specification</a:t>
-            </a:r>
-          </a:p>
-          <a:p>
-            <a:pPr marL="274320" indent="-274320">
-              <a:spcAft>
-                <a:spcPts val="990"/>
-              </a:spcAft>
-              <a:buClr>
-                <a:srgbClr val="0645AD"/>
-              </a:buClr>
-              <a:buFont typeface="Arial"/>
-              <a:buChar char="•"/>
-            </a:pPr>
-            <a:r>
-              <a:rPr sz="2200" b="0">
-                <a:solidFill>
-                  <a:srgbClr val="202122"/>
-                </a:solidFill>
-                <a:latin typeface="Calibri"/>
-              </a:rPr>
-              <a:t>Comparison matrices, functional tests, measurement</a:t>
-            </a:r>
-          </a:p>
-        </p:txBody>
-      </p:sp>
-      <p:sp>
-        <p:nvSpPr>
-          <p:cNvPr id="10" name="Rounded Rectangle 9"/>
-          <p:cNvSpPr/>
-          <p:nvPr/>
-        </p:nvSpPr>
-        <p:spPr>
-          <a:xfrm>
-            <a:off x="6278727" y="1600200"/>
-            <a:ext cx="5364327" cy="640080"/>
-          </a:xfrm>
-          <a:prstGeom prst="roundRect">
-            <a:avLst>
-              <a:gd name="adj" fmla="val 15000"/>
-            </a:avLst>
-          </a:prstGeom>
-          <a:solidFill>
-            <a:srgbClr val="0645AD"/>
-          </a:solidFill>
-          <a:ln>
-            <a:noFill/>
-          </a:ln>
-          <a:effectLst/>
-        </p:spPr>
-        <p:style>
-          <a:lnRef idx="1">
-            <a:schemeClr val="accent1"/>
-          </a:lnRef>
-          <a:fillRef idx="3">
-            <a:schemeClr val="accent1"/>
-          </a:fillRef>
-          <a:effectRef idx="2">
-            <a:schemeClr val="accent1"/>
-          </a:effectRef>
-          <a:fontRef idx="minor">
-            <a:schemeClr val="lt1"/>
-          </a:fontRef>
-        </p:style>
-        <p:txBody>
-          <a:bodyPr rtlCol="0" anchor="ctr"/>
-          <a:lstStyle/>
-          <a:p/>
-        </p:txBody>
-      </p:sp>
-      <p:sp>
-        <p:nvSpPr>
-          <p:cNvPr id="11" name="TextBox 10"/>
-          <p:cNvSpPr txBox="1"/>
-          <p:nvPr/>
-        </p:nvSpPr>
-        <p:spPr>
-          <a:xfrm>
-            <a:off x="6507327" y="1600200"/>
-            <a:ext cx="4907127" cy="640080"/>
-          </a:xfrm>
-          <a:prstGeom prst="rect">
-            <a:avLst/>
-          </a:prstGeom>
-          <a:noFill/>
-        </p:spPr>
-        <p:txBody>
-          <a:bodyPr wrap="square" anchor="ctr" lIns="0" rIns="0" tIns="0" bIns="0"/>
-          <a:lstStyle/>
-          <a:p>
-            <a:pPr algn="l"/>
-            <a:r>
-              <a:rPr sz="2000" b="1" i="0">
-                <a:solidFill>
-                  <a:srgbClr val="FFFFFF"/>
-                </a:solidFill>
-                <a:latin typeface="Calibri"/>
-              </a:rPr>
-              <a:t>Validation</a:t>
-            </a:r>
-          </a:p>
-        </p:txBody>
-      </p:sp>
-      <p:sp>
-        <p:nvSpPr>
-          <p:cNvPr id="12" name="Rounded Rectangle 11"/>
-          <p:cNvSpPr/>
-          <p:nvPr/>
-        </p:nvSpPr>
-        <p:spPr>
-          <a:xfrm>
-            <a:off x="6278727" y="2377440"/>
-            <a:ext cx="5364327" cy="3794760"/>
-          </a:xfrm>
-          <a:prstGeom prst="roundRect">
-            <a:avLst>
-              <a:gd name="adj" fmla="val 4000"/>
-            </a:avLst>
-          </a:prstGeom>
-          <a:solidFill>
-            <a:srgbClr val="EAF3FF"/>
-          </a:solidFill>
-          <a:ln>
-            <a:noFill/>
-          </a:ln>
-          <a:effectLst/>
-        </p:spPr>
-        <p:style>
-          <a:lnRef idx="1">
-            <a:schemeClr val="accent1"/>
-          </a:lnRef>
-          <a:fillRef idx="3">
-            <a:schemeClr val="accent1"/>
-          </a:fillRef>
-          <a:effectRef idx="2">
-            <a:schemeClr val="accent1"/>
-          </a:effectRef>
-          <a:fontRef idx="minor">
-            <a:schemeClr val="lt1"/>
-          </a:fontRef>
-        </p:style>
-        <p:txBody>
-          <a:bodyPr rtlCol="0" anchor="ctr"/>
-          <a:lstStyle/>
-          <a:p/>
-        </p:txBody>
-      </p:sp>
-      <p:sp>
-        <p:nvSpPr>
-          <p:cNvPr id="13" name="TextBox 12"/>
-          <p:cNvSpPr txBox="1"/>
-          <p:nvPr/>
-        </p:nvSpPr>
-        <p:spPr>
-          <a:xfrm>
-            <a:off x="6553047" y="2606040"/>
-            <a:ext cx="4815687" cy="3337560"/>
-          </a:xfrm>
-          <a:prstGeom prst="rect">
-            <a:avLst/>
-          </a:prstGeom>
-          <a:noFill/>
-        </p:spPr>
-        <p:txBody>
-          <a:bodyPr wrap="square" lIns="0" rIns="0" tIns="0" bIns="0">
-            <a:spAutoFit/>
-          </a:bodyPr>
-          <a:lstStyle/>
-          <a:p>
-            <a:pPr marL="274320" indent="-274320">
-              <a:spcAft>
-                <a:spcPts val="990"/>
-              </a:spcAft>
-              <a:buClr>
-                <a:srgbClr val="0645AD"/>
-              </a:buClr>
-              <a:buFont typeface="Arial"/>
-              <a:buChar char="•"/>
-            </a:pPr>
-            <a:r>
-              <a:rPr sz="2200" b="0">
-                <a:solidFill>
-                  <a:srgbClr val="202122"/>
-                </a:solidFill>
-                <a:latin typeface="Calibri"/>
-              </a:rPr>
-              <a:t>Did we build the right thing?</a:t>
-            </a:r>
-          </a:p>
-          <a:p>
-            <a:pPr marL="274320" indent="-274320">
-              <a:spcAft>
-                <a:spcPts val="990"/>
-              </a:spcAft>
-              <a:buClr>
-                <a:srgbClr val="0645AD"/>
-              </a:buClr>
-              <a:buFont typeface="Arial"/>
-              <a:buChar char="•"/>
-            </a:pPr>
-            <a:r>
-              <a:rPr sz="2200" b="0">
-                <a:solidFill>
-                  <a:srgbClr val="202122"/>
-                </a:solidFill>
-                <a:latin typeface="Calibri"/>
-              </a:rPr>
-              <a:t>Checks it meets the user's real needs</a:t>
-            </a:r>
-          </a:p>
-          <a:p>
-            <a:pPr marL="274320" indent="-274320">
-              <a:spcAft>
-                <a:spcPts val="990"/>
-              </a:spcAft>
-              <a:buClr>
-                <a:srgbClr val="0645AD"/>
-              </a:buClr>
-              <a:buFont typeface="Arial"/>
-              <a:buChar char="•"/>
-            </a:pPr>
-            <a:r>
-              <a:rPr sz="2200" b="0">
-                <a:solidFill>
-                  <a:srgbClr val="202122"/>
-                </a:solidFill>
-                <a:latin typeface="Calibri"/>
-              </a:rPr>
-              <a:t>User testing, ranking, decision trees</a:t>
-            </a:r>
-          </a:p>
-        </p:txBody>
-      </p:sp>
-    </p:spTree>
-  </p:cSld>
-  <p:clrMapOvr>
-    <a:masterClrMapping/>
-  </p:clrMapOvr>
-</p:sld>
-</file>
-
-<file path=ppt/slides/slide6.xml><?xml version="1.0" encoding="utf-8"?>
-<p:sld xmlns:a="http://schemas.openxmlformats.org/drawingml/2006/main" xmlns:p="http://schemas.openxmlformats.org/presentationml/2006/main" xmlns:r="http://schemas.openxmlformats.org/officeDocument/2006/relationships">
-  <p:cSld>
-    <p:bg>
-      <p:bgPr>
-        <a:solidFill>
-          <a:srgbClr val="FFFFFF"/>
-        </a:solidFill>
-        <a:effectLst/>
-      </p:bgPr>
-    </p:bg>
-    <p:spTree>
-      <p:nvGrpSpPr>
-        <p:cNvPr id="1" name=""/>
-        <p:cNvGrpSpPr/>
-        <p:nvPr/>
-      </p:nvGrpSpPr>
-      <p:grpSpPr/>
-      <p:sp>
-        <p:nvSpPr>
-          <p:cNvPr id="2" name="TextBox 1"/>
-          <p:cNvSpPr txBox="1"/>
-          <p:nvPr/>
-        </p:nvSpPr>
-        <p:spPr>
-          <a:xfrm>
-            <a:off x="548640" y="320040"/>
-            <a:ext cx="11094415" cy="274320"/>
-          </a:xfrm>
-          <a:prstGeom prst="rect">
-            <a:avLst/>
-          </a:prstGeom>
-          <a:noFill/>
-        </p:spPr>
-        <p:txBody>
-          <a:bodyPr wrap="square" anchor="t" lIns="0" rIns="0" tIns="0" bIns="0"/>
-          <a:lstStyle/>
-          <a:p>
-            <a:pPr algn="l"/>
-            <a:r>
-              <a:rPr sz="1100" b="1" i="0">
-                <a:solidFill>
-                  <a:srgbClr val="54595D"/>
-                </a:solidFill>
-                <a:latin typeface="Calibri"/>
-              </a:rPr>
-              <a:t>MECHANICAL ENGINEERING  ·  Mechanical: Knowledge criteria</a:t>
-            </a:r>
-          </a:p>
-        </p:txBody>
-      </p:sp>
-      <p:sp>
-        <p:nvSpPr>
-          <p:cNvPr id="3" name="TextBox 2"/>
-          <p:cNvSpPr txBox="1"/>
-          <p:nvPr/>
-        </p:nvSpPr>
-        <p:spPr>
-          <a:xfrm>
-            <a:off x="548640" y="566928"/>
-            <a:ext cx="11094415" cy="822960"/>
-          </a:xfrm>
-          <a:prstGeom prst="rect">
-            <a:avLst/>
-          </a:prstGeom>
-          <a:noFill/>
-        </p:spPr>
-        <p:txBody>
-          <a:bodyPr wrap="square" anchor="ctr" lIns="0" rIns="0" tIns="0" bIns="0"/>
-          <a:lstStyle/>
-          <a:p>
-            <a:pPr algn="l"/>
-            <a:r>
-              <a:rPr sz="3200" b="1" i="0">
-                <a:solidFill>
-                  <a:srgbClr val="03306E"/>
-                </a:solidFill>
-                <a:latin typeface="Cambria"/>
-              </a:rPr>
-              <a:t>Check your understanding</a:t>
-            </a:r>
-          </a:p>
-        </p:txBody>
-      </p:sp>
-      <p:sp>
-        <p:nvSpPr>
-          <p:cNvPr id="4" name="TextBox 3"/>
-          <p:cNvSpPr txBox="1"/>
-          <p:nvPr/>
-        </p:nvSpPr>
-        <p:spPr>
-          <a:xfrm>
-            <a:off x="548640" y="6446520"/>
-            <a:ext cx="8229600" cy="274320"/>
-          </a:xfrm>
-          <a:prstGeom prst="rect">
-            <a:avLst/>
-          </a:prstGeom>
-          <a:noFill/>
-        </p:spPr>
-        <p:txBody>
-          <a:bodyPr wrap="square" anchor="t" lIns="0" rIns="0" tIns="0" bIns="0"/>
-          <a:lstStyle/>
-          <a:p>
-            <a:pPr algn="l"/>
-            <a:r>
-              <a:rPr sz="1000" b="0" i="0">
-                <a:solidFill>
-                  <a:srgbClr val="54595D"/>
-                </a:solidFill>
-                <a:latin typeface="Calibri"/>
-              </a:rPr>
-              <a:t>Design and Development for Engineering and Manufacturing T Level  ·  Design Principles, Methodologies and Verification</a:t>
-            </a:r>
-          </a:p>
-        </p:txBody>
-      </p:sp>
-      <p:sp>
-        <p:nvSpPr>
-          <p:cNvPr id="5" name="TextBox 4"/>
-          <p:cNvSpPr txBox="1"/>
-          <p:nvPr/>
-        </p:nvSpPr>
-        <p:spPr>
-          <a:xfrm>
-            <a:off x="10728655" y="6446520"/>
-            <a:ext cx="914400" cy="274320"/>
-          </a:xfrm>
-          <a:prstGeom prst="rect">
-            <a:avLst/>
-          </a:prstGeom>
-          <a:noFill/>
-        </p:spPr>
-        <p:txBody>
-          <a:bodyPr wrap="square" anchor="t" lIns="0" rIns="0" tIns="0" bIns="0"/>
-          <a:lstStyle/>
-          <a:p>
-            <a:pPr algn="r"/>
-            <a:r>
-              <a:rPr sz="1000" b="0" i="0">
-                <a:solidFill>
-                  <a:srgbClr val="54595D"/>
-                </a:solidFill>
-                <a:latin typeface="Calibri"/>
-              </a:rPr>
-              <a:t>6</a:t>
-            </a:r>
-          </a:p>
-        </p:txBody>
-      </p:sp>
-      <p:sp>
-        <p:nvSpPr>
-          <p:cNvPr id="6" name="Oval 5"/>
-          <p:cNvSpPr/>
-          <p:nvPr/>
-        </p:nvSpPr>
-        <p:spPr>
-          <a:xfrm>
-            <a:off x="548640" y="1618488"/>
-            <a:ext cx="411480" cy="411480"/>
-          </a:xfrm>
-          <a:prstGeom prst="ellipse">
-            <a:avLst/>
-          </a:prstGeom>
-          <a:solidFill>
-            <a:srgbClr val="E0463A"/>
-          </a:solidFill>
-          <a:ln>
-            <a:noFill/>
-          </a:ln>
-          <a:effectLst/>
-        </p:spPr>
-        <p:style>
-          <a:lnRef idx="1">
-            <a:schemeClr val="accent1"/>
-          </a:lnRef>
-          <a:fillRef idx="3">
-            <a:schemeClr val="accent1"/>
-          </a:fillRef>
-          <a:effectRef idx="2">
-            <a:schemeClr val="accent1"/>
-          </a:effectRef>
-          <a:fontRef idx="minor">
-            <a:schemeClr val="lt1"/>
-          </a:fontRef>
-        </p:style>
-        <p:txBody>
-          <a:bodyPr rtlCol="0" anchor="ctr" lIns="0" rIns="0" tIns="0" bIns="0"/>
-          <a:lstStyle/>
-          <a:p>
-            <a:pPr algn="ctr"/>
-            <a:r>
-              <a:rPr sz="1400" b="1">
-                <a:solidFill>
-                  <a:srgbClr val="FFFFFF"/>
-                </a:solidFill>
-                <a:latin typeface="Calibri"/>
-              </a:rPr>
-              <a:t>1</a:t>
-            </a:r>
-          </a:p>
-        </p:txBody>
-      </p:sp>
-      <p:sp>
-        <p:nvSpPr>
-          <p:cNvPr id="7" name="TextBox 6"/>
-          <p:cNvSpPr txBox="1"/>
-          <p:nvPr/>
-        </p:nvSpPr>
-        <p:spPr>
-          <a:xfrm>
-            <a:off x="1234440" y="1600200"/>
-            <a:ext cx="10408615" cy="1030986"/>
-          </a:xfrm>
-          <a:prstGeom prst="rect">
-            <a:avLst/>
-          </a:prstGeom>
-          <a:noFill/>
-        </p:spPr>
-        <p:txBody>
-          <a:bodyPr wrap="square" anchor="t" lIns="0" rIns="0" tIns="0" bIns="0"/>
-          <a:lstStyle/>
-          <a:p>
-            <a:pPr algn="l"/>
-            <a:r>
-              <a:rPr sz="2200" b="0" i="0">
-                <a:solidFill>
-                  <a:srgbClr val="202122"/>
-                </a:solidFill>
-                <a:latin typeface="Calibri"/>
-              </a:rPr>
-              <a:t>Name three ways to identify client requirements.</a:t>
-            </a:r>
-          </a:p>
-        </p:txBody>
-      </p:sp>
-      <p:sp>
-        <p:nvSpPr>
-          <p:cNvPr id="8" name="Oval 7"/>
-          <p:cNvSpPr/>
-          <p:nvPr/>
-        </p:nvSpPr>
-        <p:spPr>
-          <a:xfrm>
-            <a:off x="548640" y="2814066"/>
-            <a:ext cx="411480" cy="411480"/>
-          </a:xfrm>
-          <a:prstGeom prst="ellipse">
-            <a:avLst/>
-          </a:prstGeom>
-          <a:solidFill>
-            <a:srgbClr val="E0463A"/>
-          </a:solidFill>
-          <a:ln>
-            <a:noFill/>
-          </a:ln>
-          <a:effectLst/>
-        </p:spPr>
-        <p:style>
-          <a:lnRef idx="1">
-            <a:schemeClr val="accent1"/>
-          </a:lnRef>
-          <a:fillRef idx="3">
-            <a:schemeClr val="accent1"/>
-          </a:fillRef>
-          <a:effectRef idx="2">
-            <a:schemeClr val="accent1"/>
-          </a:effectRef>
-          <a:fontRef idx="minor">
-            <a:schemeClr val="lt1"/>
-          </a:fontRef>
-        </p:style>
-        <p:txBody>
-          <a:bodyPr rtlCol="0" anchor="ctr" lIns="0" rIns="0" tIns="0" bIns="0"/>
-          <a:lstStyle/>
-          <a:p>
-            <a:pPr algn="ctr"/>
-            <a:r>
-              <a:rPr sz="1400" b="1">
-                <a:solidFill>
-                  <a:srgbClr val="FFFFFF"/>
-                </a:solidFill>
-                <a:latin typeface="Calibri"/>
-              </a:rPr>
-              <a:t>2</a:t>
-            </a:r>
-          </a:p>
-        </p:txBody>
-      </p:sp>
-      <p:sp>
-        <p:nvSpPr>
-          <p:cNvPr id="9" name="TextBox 8"/>
-          <p:cNvSpPr txBox="1"/>
-          <p:nvPr/>
-        </p:nvSpPr>
-        <p:spPr>
-          <a:xfrm>
-            <a:off x="1234440" y="2795778"/>
-            <a:ext cx="10408615" cy="1030986"/>
-          </a:xfrm>
-          <a:prstGeom prst="rect">
-            <a:avLst/>
-          </a:prstGeom>
-          <a:noFill/>
-        </p:spPr>
-        <p:txBody>
-          <a:bodyPr wrap="square" anchor="t" lIns="0" rIns="0" tIns="0" bIns="0"/>
-          <a:lstStyle/>
-          <a:p>
-            <a:pPr algn="l"/>
-            <a:r>
-              <a:rPr sz="2200" b="0" i="0">
-                <a:solidFill>
-                  <a:srgbClr val="202122"/>
-                </a:solidFill>
-                <a:latin typeface="Calibri"/>
-              </a:rPr>
-              <a:t>What is anthropometric data used for?</a:t>
-            </a:r>
-          </a:p>
-        </p:txBody>
-      </p:sp>
-      <p:sp>
-        <p:nvSpPr>
-          <p:cNvPr id="10" name="Oval 9"/>
-          <p:cNvSpPr/>
-          <p:nvPr/>
-        </p:nvSpPr>
-        <p:spPr>
-          <a:xfrm>
-            <a:off x="548640" y="4009644"/>
-            <a:ext cx="411480" cy="411480"/>
-          </a:xfrm>
-          <a:prstGeom prst="ellipse">
-            <a:avLst/>
-          </a:prstGeom>
-          <a:solidFill>
-            <a:srgbClr val="E0463A"/>
-          </a:solidFill>
-          <a:ln>
-            <a:noFill/>
-          </a:ln>
-          <a:effectLst/>
-        </p:spPr>
-        <p:style>
-          <a:lnRef idx="1">
-            <a:schemeClr val="accent1"/>
-          </a:lnRef>
-          <a:fillRef idx="3">
-            <a:schemeClr val="accent1"/>
-          </a:fillRef>
-          <a:effectRef idx="2">
-            <a:schemeClr val="accent1"/>
-          </a:effectRef>
-          <a:fontRef idx="minor">
-            <a:schemeClr val="lt1"/>
-          </a:fontRef>
-        </p:style>
-        <p:txBody>
-          <a:bodyPr rtlCol="0" anchor="ctr" lIns="0" rIns="0" tIns="0" bIns="0"/>
-          <a:lstStyle/>
-          <a:p>
-            <a:pPr algn="ctr"/>
-            <a:r>
-              <a:rPr sz="1400" b="1">
-                <a:solidFill>
-                  <a:srgbClr val="FFFFFF"/>
-                </a:solidFill>
-                <a:latin typeface="Calibri"/>
-              </a:rPr>
-              <a:t>3</a:t>
-            </a:r>
-          </a:p>
-        </p:txBody>
-      </p:sp>
-      <p:sp>
-        <p:nvSpPr>
-          <p:cNvPr id="11" name="TextBox 10"/>
-          <p:cNvSpPr txBox="1"/>
-          <p:nvPr/>
-        </p:nvSpPr>
-        <p:spPr>
-          <a:xfrm>
-            <a:off x="1234440" y="3991356"/>
-            <a:ext cx="10408615" cy="1030986"/>
-          </a:xfrm>
-          <a:prstGeom prst="rect">
-            <a:avLst/>
-          </a:prstGeom>
-          <a:noFill/>
-        </p:spPr>
-        <p:txBody>
-          <a:bodyPr wrap="square" anchor="t" lIns="0" rIns="0" tIns="0" bIns="0"/>
-          <a:lstStyle/>
-          <a:p>
-            <a:pPr algn="l"/>
-            <a:r>
-              <a:rPr sz="2200" b="0" i="0">
-                <a:solidFill>
-                  <a:srgbClr val="202122"/>
-                </a:solidFill>
-                <a:latin typeface="Calibri"/>
-              </a:rPr>
-              <a:t>What is planned obsolescence?</a:t>
-            </a:r>
-          </a:p>
-        </p:txBody>
-      </p:sp>
-      <p:sp>
-        <p:nvSpPr>
-          <p:cNvPr id="12" name="Oval 11"/>
-          <p:cNvSpPr/>
-          <p:nvPr/>
-        </p:nvSpPr>
-        <p:spPr>
-          <a:xfrm>
-            <a:off x="548640" y="5205221"/>
-            <a:ext cx="411480" cy="411480"/>
-          </a:xfrm>
-          <a:prstGeom prst="ellipse">
-            <a:avLst/>
-          </a:prstGeom>
-          <a:solidFill>
-            <a:srgbClr val="E0463A"/>
-          </a:solidFill>
-          <a:ln>
-            <a:noFill/>
-          </a:ln>
-          <a:effectLst/>
-        </p:spPr>
-        <p:style>
-          <a:lnRef idx="1">
-            <a:schemeClr val="accent1"/>
-          </a:lnRef>
-          <a:fillRef idx="3">
-            <a:schemeClr val="accent1"/>
-          </a:fillRef>
-          <a:effectRef idx="2">
-            <a:schemeClr val="accent1"/>
-          </a:effectRef>
-          <a:fontRef idx="minor">
-            <a:schemeClr val="lt1"/>
-          </a:fontRef>
-        </p:style>
-        <p:txBody>
-          <a:bodyPr rtlCol="0" anchor="ctr" lIns="0" rIns="0" tIns="0" bIns="0"/>
-          <a:lstStyle/>
-          <a:p>
-            <a:pPr algn="ctr"/>
-            <a:r>
-              <a:rPr sz="1400" b="1">
-                <a:solidFill>
-                  <a:srgbClr val="FFFFFF"/>
-                </a:solidFill>
-                <a:latin typeface="Calibri"/>
-              </a:rPr>
-              <a:t>4</a:t>
-            </a:r>
-          </a:p>
-        </p:txBody>
-      </p:sp>
-      <p:sp>
-        <p:nvSpPr>
-          <p:cNvPr id="13" name="TextBox 12"/>
-          <p:cNvSpPr txBox="1"/>
-          <p:nvPr/>
-        </p:nvSpPr>
-        <p:spPr>
-          <a:xfrm>
-            <a:off x="1234440" y="5186933"/>
-            <a:ext cx="10408615" cy="1030986"/>
-          </a:xfrm>
-          <a:prstGeom prst="rect">
-            <a:avLst/>
-          </a:prstGeom>
-          <a:noFill/>
-        </p:spPr>
-        <p:txBody>
-          <a:bodyPr wrap="square" anchor="t" lIns="0" rIns="0" tIns="0" bIns="0"/>
-          <a:lstStyle/>
-          <a:p>
-            <a:pPr algn="l"/>
-            <a:r>
-              <a:rPr sz="2200" b="0" i="0">
-                <a:solidFill>
-                  <a:srgbClr val="202122"/>
-                </a:solidFill>
-                <a:latin typeface="Calibri"/>
-              </a:rPr>
-              <a:t>Is checking a part against its drawing verification or validation?</a:t>
-            </a:r>
-          </a:p>
-        </p:txBody>
-      </p:sp>
-    </p:spTree>
-  </p:cSld>
-  <p:clrMapOvr>
-    <a:masterClrMapping/>
-  </p:clrMapOvr>
-</p:sld>
-</file>
-
-<file path=ppt/slides/slide7.xml><?xml version="1.0" encoding="utf-8"?>
-<p:sld xmlns:a="http://schemas.openxmlformats.org/drawingml/2006/main" xmlns:p="http://schemas.openxmlformats.org/presentationml/2006/main" xmlns:r="http://schemas.openxmlformats.org/officeDocument/2006/relationships">
-  <p:cSld>
-    <p:bg>
-      <p:bgPr>
-        <a:solidFill>
-          <a:srgbClr val="FFFFFF"/>
-        </a:solidFill>
-        <a:effectLst/>
-      </p:bgPr>
-    </p:bg>
-    <p:spTree>
-      <p:nvGrpSpPr>
-        <p:cNvPr id="1" name=""/>
-        <p:cNvGrpSpPr/>
-        <p:nvPr/>
-      </p:nvGrpSpPr>
-      <p:grpSpPr/>
-      <p:sp>
-        <p:nvSpPr>
-          <p:cNvPr id="2" name="TextBox 1"/>
-          <p:cNvSpPr txBox="1"/>
-          <p:nvPr/>
-        </p:nvSpPr>
-        <p:spPr>
-          <a:xfrm>
-            <a:off x="548640" y="320040"/>
-            <a:ext cx="11094415" cy="274320"/>
-          </a:xfrm>
-          <a:prstGeom prst="rect">
-            <a:avLst/>
-          </a:prstGeom>
-          <a:noFill/>
-        </p:spPr>
-        <p:txBody>
-          <a:bodyPr wrap="square" anchor="t" lIns="0" rIns="0" tIns="0" bIns="0"/>
-          <a:lstStyle/>
-          <a:p>
-            <a:pPr algn="l"/>
-            <a:r>
-              <a:rPr sz="1100" b="1" i="0">
-                <a:solidFill>
-                  <a:srgbClr val="54595D"/>
-                </a:solidFill>
-                <a:latin typeface="Calibri"/>
-              </a:rPr>
-              <a:t>MECHANICAL ENGINEERING  ·  Mechanical: Knowledge criteria</a:t>
-            </a:r>
-          </a:p>
-        </p:txBody>
-      </p:sp>
-      <p:sp>
-        <p:nvSpPr>
-          <p:cNvPr id="3" name="TextBox 2"/>
-          <p:cNvSpPr txBox="1"/>
-          <p:nvPr/>
-        </p:nvSpPr>
-        <p:spPr>
-          <a:xfrm>
-            <a:off x="548640" y="566928"/>
-            <a:ext cx="11094415" cy="822960"/>
-          </a:xfrm>
-          <a:prstGeom prst="rect">
-            <a:avLst/>
-          </a:prstGeom>
-          <a:noFill/>
-        </p:spPr>
-        <p:txBody>
-          <a:bodyPr wrap="square" anchor="ctr" lIns="0" rIns="0" tIns="0" bIns="0"/>
-          <a:lstStyle/>
-          <a:p>
-            <a:pPr algn="l"/>
-            <a:r>
-              <a:rPr sz="3200" b="1" i="0">
-                <a:solidFill>
-                  <a:srgbClr val="03306E"/>
-                </a:solidFill>
-                <a:latin typeface="Cambria"/>
-              </a:rPr>
-              <a:t>Answers</a:t>
-            </a:r>
-          </a:p>
-        </p:txBody>
-      </p:sp>
-      <p:sp>
-        <p:nvSpPr>
-          <p:cNvPr id="4" name="TextBox 3"/>
-          <p:cNvSpPr txBox="1"/>
-          <p:nvPr/>
-        </p:nvSpPr>
-        <p:spPr>
-          <a:xfrm>
-            <a:off x="548640" y="6446520"/>
-            <a:ext cx="8229600" cy="274320"/>
-          </a:xfrm>
-          <a:prstGeom prst="rect">
-            <a:avLst/>
-          </a:prstGeom>
-          <a:noFill/>
-        </p:spPr>
-        <p:txBody>
-          <a:bodyPr wrap="square" anchor="t" lIns="0" rIns="0" tIns="0" bIns="0"/>
-          <a:lstStyle/>
-          <a:p>
-            <a:pPr algn="l"/>
-            <a:r>
-              <a:rPr sz="1000" b="0" i="0">
-                <a:solidFill>
-                  <a:srgbClr val="54595D"/>
-                </a:solidFill>
-                <a:latin typeface="Calibri"/>
-              </a:rPr>
-              <a:t>Design and Development for Engineering and Manufacturing T Level  ·  Design Principles, Methodologies and Verification</a:t>
-            </a:r>
-          </a:p>
-        </p:txBody>
-      </p:sp>
-      <p:sp>
-        <p:nvSpPr>
-          <p:cNvPr id="5" name="TextBox 4"/>
-          <p:cNvSpPr txBox="1"/>
-          <p:nvPr/>
-        </p:nvSpPr>
-        <p:spPr>
-          <a:xfrm>
-            <a:off x="10728655" y="6446520"/>
-            <a:ext cx="914400" cy="274320"/>
-          </a:xfrm>
-          <a:prstGeom prst="rect">
-            <a:avLst/>
-          </a:prstGeom>
-          <a:noFill/>
-        </p:spPr>
-        <p:txBody>
-          <a:bodyPr wrap="square" anchor="t" lIns="0" rIns="0" tIns="0" bIns="0"/>
-          <a:lstStyle/>
-          <a:p>
-            <a:pPr algn="r"/>
-            <a:r>
-              <a:rPr sz="1000" b="0" i="0">
-                <a:solidFill>
-                  <a:srgbClr val="54595D"/>
-                </a:solidFill>
-                <a:latin typeface="Calibri"/>
-              </a:rPr>
-              <a:t>7</a:t>
-            </a:r>
-          </a:p>
-        </p:txBody>
-      </p:sp>
-      <p:sp>
-        <p:nvSpPr>
-          <p:cNvPr id="6" name="Oval 5"/>
-          <p:cNvSpPr/>
-          <p:nvPr/>
-        </p:nvSpPr>
-        <p:spPr>
-          <a:xfrm>
-            <a:off x="548640" y="1618488"/>
-            <a:ext cx="411480" cy="411480"/>
-          </a:xfrm>
-          <a:prstGeom prst="ellipse">
-            <a:avLst/>
-          </a:prstGeom>
-          <a:solidFill>
-            <a:srgbClr val="E0463A"/>
-          </a:solidFill>
-          <a:ln>
-            <a:noFill/>
-          </a:ln>
-          <a:effectLst/>
-        </p:spPr>
-        <p:style>
-          <a:lnRef idx="1">
-            <a:schemeClr val="accent1"/>
-          </a:lnRef>
-          <a:fillRef idx="3">
-            <a:schemeClr val="accent1"/>
-          </a:fillRef>
-          <a:effectRef idx="2">
-            <a:schemeClr val="accent1"/>
-          </a:effectRef>
-          <a:fontRef idx="minor">
-            <a:schemeClr val="lt1"/>
-          </a:fontRef>
-        </p:style>
-        <p:txBody>
-          <a:bodyPr rtlCol="0" anchor="ctr" lIns="0" rIns="0" tIns="0" bIns="0"/>
-          <a:lstStyle/>
-          <a:p>
-            <a:pPr algn="ctr"/>
-            <a:r>
-              <a:rPr sz="1400" b="1">
-                <a:solidFill>
-                  <a:srgbClr val="FFFFFF"/>
-                </a:solidFill>
-                <a:latin typeface="Calibri"/>
-              </a:rPr>
-              <a:t>1</a:t>
-            </a:r>
-          </a:p>
-        </p:txBody>
-      </p:sp>
-      <p:sp>
-        <p:nvSpPr>
-          <p:cNvPr id="7" name="TextBox 6"/>
-          <p:cNvSpPr txBox="1"/>
-          <p:nvPr/>
-        </p:nvSpPr>
-        <p:spPr>
-          <a:xfrm>
-            <a:off x="1234440" y="1600200"/>
-            <a:ext cx="10408615" cy="1030986"/>
-          </a:xfrm>
-          <a:prstGeom prst="rect">
-            <a:avLst/>
-          </a:prstGeom>
-          <a:noFill/>
-        </p:spPr>
-        <p:txBody>
-          <a:bodyPr wrap="square" anchor="t" lIns="0" rIns="0" tIns="0" bIns="0"/>
-          <a:lstStyle/>
-          <a:p>
-            <a:pPr algn="l"/>
-            <a:r>
-              <a:rPr sz="1800" b="0" i="0">
-                <a:solidFill>
-                  <a:srgbClr val="54595D"/>
-                </a:solidFill>
-                <a:latin typeface="Calibri"/>
-              </a:rPr>
-              <a:t>Name three ways to identify client requirements.</a:t>
-            </a:r>
-          </a:p>
-          <a:p>
-            <a:r>
-              <a:rPr sz="1800" b="1">
-                <a:solidFill>
-                  <a:srgbClr val="03306E"/>
-                </a:solidFill>
-                <a:latin typeface="Calibri"/>
-              </a:rPr>
-              <a:t>Market research, client interviews/observation, product analysis.</a:t>
-            </a:r>
-          </a:p>
-        </p:txBody>
-      </p:sp>
-      <p:sp>
-        <p:nvSpPr>
-          <p:cNvPr id="8" name="Oval 7"/>
-          <p:cNvSpPr/>
-          <p:nvPr/>
-        </p:nvSpPr>
-        <p:spPr>
-          <a:xfrm>
-            <a:off x="548640" y="2814066"/>
-            <a:ext cx="411480" cy="411480"/>
-          </a:xfrm>
-          <a:prstGeom prst="ellipse">
-            <a:avLst/>
-          </a:prstGeom>
-          <a:solidFill>
-            <a:srgbClr val="E0463A"/>
-          </a:solidFill>
-          <a:ln>
-            <a:noFill/>
-          </a:ln>
-          <a:effectLst/>
-        </p:spPr>
-        <p:style>
-          <a:lnRef idx="1">
-            <a:schemeClr val="accent1"/>
-          </a:lnRef>
-          <a:fillRef idx="3">
-            <a:schemeClr val="accent1"/>
-          </a:fillRef>
-          <a:effectRef idx="2">
-            <a:schemeClr val="accent1"/>
-          </a:effectRef>
-          <a:fontRef idx="minor">
-            <a:schemeClr val="lt1"/>
-          </a:fontRef>
-        </p:style>
-        <p:txBody>
-          <a:bodyPr rtlCol="0" anchor="ctr" lIns="0" rIns="0" tIns="0" bIns="0"/>
-          <a:lstStyle/>
-          <a:p>
-            <a:pPr algn="ctr"/>
-            <a:r>
-              <a:rPr sz="1400" b="1">
-                <a:solidFill>
-                  <a:srgbClr val="FFFFFF"/>
-                </a:solidFill>
-                <a:latin typeface="Calibri"/>
-              </a:rPr>
-              <a:t>2</a:t>
-            </a:r>
-          </a:p>
-        </p:txBody>
-      </p:sp>
-      <p:sp>
-        <p:nvSpPr>
-          <p:cNvPr id="9" name="TextBox 8"/>
-          <p:cNvSpPr txBox="1"/>
-          <p:nvPr/>
-        </p:nvSpPr>
-        <p:spPr>
-          <a:xfrm>
-            <a:off x="1234440" y="2795778"/>
-            <a:ext cx="10408615" cy="1030986"/>
-          </a:xfrm>
-          <a:prstGeom prst="rect">
-            <a:avLst/>
-          </a:prstGeom>
-          <a:noFill/>
-        </p:spPr>
-        <p:txBody>
-          <a:bodyPr wrap="square" anchor="t" lIns="0" rIns="0" tIns="0" bIns="0"/>
-          <a:lstStyle/>
-          <a:p>
-            <a:pPr algn="l"/>
-            <a:r>
-              <a:rPr sz="1800" b="0" i="0">
-                <a:solidFill>
-                  <a:srgbClr val="54595D"/>
-                </a:solidFill>
-                <a:latin typeface="Calibri"/>
-              </a:rPr>
-              <a:t>What is anthropometric data used for?</a:t>
-            </a:r>
-          </a:p>
-          <a:p>
-            <a:r>
-              <a:rPr sz="1800" b="1">
-                <a:solidFill>
-                  <a:srgbClr val="03306E"/>
-                </a:solidFill>
-                <a:latin typeface="Calibri"/>
-              </a:rPr>
-              <a:t>Designing products to fit human body sizes (ergonomics).</a:t>
-            </a:r>
-          </a:p>
-        </p:txBody>
-      </p:sp>
-      <p:sp>
-        <p:nvSpPr>
-          <p:cNvPr id="10" name="Oval 9"/>
-          <p:cNvSpPr/>
-          <p:nvPr/>
-        </p:nvSpPr>
-        <p:spPr>
-          <a:xfrm>
-            <a:off x="548640" y="4009644"/>
-            <a:ext cx="411480" cy="411480"/>
-          </a:xfrm>
-          <a:prstGeom prst="ellipse">
-            <a:avLst/>
-          </a:prstGeom>
-          <a:solidFill>
-            <a:srgbClr val="E0463A"/>
-          </a:solidFill>
-          <a:ln>
-            <a:noFill/>
-          </a:ln>
-          <a:effectLst/>
-        </p:spPr>
-        <p:style>
-          <a:lnRef idx="1">
-            <a:schemeClr val="accent1"/>
-          </a:lnRef>
-          <a:fillRef idx="3">
-            <a:schemeClr val="accent1"/>
-          </a:fillRef>
-          <a:effectRef idx="2">
-            <a:schemeClr val="accent1"/>
-          </a:effectRef>
-          <a:fontRef idx="minor">
-            <a:schemeClr val="lt1"/>
-          </a:fontRef>
-        </p:style>
-        <p:txBody>
-          <a:bodyPr rtlCol="0" anchor="ctr" lIns="0" rIns="0" tIns="0" bIns="0"/>
-          <a:lstStyle/>
-          <a:p>
-            <a:pPr algn="ctr"/>
-            <a:r>
-              <a:rPr sz="1400" b="1">
-                <a:solidFill>
-                  <a:srgbClr val="FFFFFF"/>
-                </a:solidFill>
-                <a:latin typeface="Calibri"/>
-              </a:rPr>
-              <a:t>3</a:t>
-            </a:r>
-          </a:p>
-        </p:txBody>
-      </p:sp>
-      <p:sp>
-        <p:nvSpPr>
-          <p:cNvPr id="11" name="TextBox 10"/>
-          <p:cNvSpPr txBox="1"/>
-          <p:nvPr/>
-        </p:nvSpPr>
-        <p:spPr>
-          <a:xfrm>
-            <a:off x="1234440" y="3991356"/>
-            <a:ext cx="10408615" cy="1030986"/>
-          </a:xfrm>
-          <a:prstGeom prst="rect">
-            <a:avLst/>
-          </a:prstGeom>
-          <a:noFill/>
-        </p:spPr>
-        <p:txBody>
-          <a:bodyPr wrap="square" anchor="t" lIns="0" rIns="0" tIns="0" bIns="0"/>
-          <a:lstStyle/>
-          <a:p>
-            <a:pPr algn="l"/>
-            <a:r>
-              <a:rPr sz="1800" b="0" i="0">
-                <a:solidFill>
-                  <a:srgbClr val="54595D"/>
-                </a:solidFill>
-                <a:latin typeface="Calibri"/>
-              </a:rPr>
-              <a:t>What is planned obsolescence?</a:t>
-            </a:r>
-          </a:p>
-          <a:p>
-            <a:r>
-              <a:rPr sz="1800" b="1">
-                <a:solidFill>
-                  <a:srgbClr val="03306E"/>
-                </a:solidFill>
-                <a:latin typeface="Calibri"/>
-              </a:rPr>
-              <a:t>Designing a product to have a limited life.</a:t>
-            </a:r>
-          </a:p>
-        </p:txBody>
-      </p:sp>
-      <p:sp>
-        <p:nvSpPr>
-          <p:cNvPr id="12" name="Oval 11"/>
-          <p:cNvSpPr/>
-          <p:nvPr/>
-        </p:nvSpPr>
-        <p:spPr>
-          <a:xfrm>
-            <a:off x="548640" y="5205221"/>
-            <a:ext cx="411480" cy="411480"/>
-          </a:xfrm>
-          <a:prstGeom prst="ellipse">
-            <a:avLst/>
-          </a:prstGeom>
-          <a:solidFill>
-            <a:srgbClr val="E0463A"/>
-          </a:solidFill>
-          <a:ln>
-            <a:noFill/>
-          </a:ln>
-          <a:effectLst/>
-        </p:spPr>
-        <p:style>
-          <a:lnRef idx="1">
-            <a:schemeClr val="accent1"/>
-          </a:lnRef>
-          <a:fillRef idx="3">
-            <a:schemeClr val="accent1"/>
-          </a:fillRef>
-          <a:effectRef idx="2">
-            <a:schemeClr val="accent1"/>
-          </a:effectRef>
-          <a:fontRef idx="minor">
-            <a:schemeClr val="lt1"/>
-          </a:fontRef>
-        </p:style>
-        <p:txBody>
-          <a:bodyPr rtlCol="0" anchor="ctr" lIns="0" rIns="0" tIns="0" bIns="0"/>
-          <a:lstStyle/>
-          <a:p>
-            <a:pPr algn="ctr"/>
-            <a:r>
-              <a:rPr sz="1400" b="1">
-                <a:solidFill>
-                  <a:srgbClr val="FFFFFF"/>
-                </a:solidFill>
-                <a:latin typeface="Calibri"/>
-              </a:rPr>
-              <a:t>4</a:t>
-            </a:r>
-          </a:p>
-        </p:txBody>
-      </p:sp>
-      <p:sp>
-        <p:nvSpPr>
-          <p:cNvPr id="13" name="TextBox 12"/>
-          <p:cNvSpPr txBox="1"/>
-          <p:nvPr/>
-        </p:nvSpPr>
-        <p:spPr>
-          <a:xfrm>
-            <a:off x="1234440" y="5186933"/>
-            <a:ext cx="10408615" cy="1030986"/>
-          </a:xfrm>
-          <a:prstGeom prst="rect">
-            <a:avLst/>
-          </a:prstGeom>
-          <a:noFill/>
-        </p:spPr>
-        <p:txBody>
-          <a:bodyPr wrap="square" anchor="t" lIns="0" rIns="0" tIns="0" bIns="0"/>
-          <a:lstStyle/>
-          <a:p>
-            <a:pPr algn="l"/>
-            <a:r>
-              <a:rPr sz="1800" b="0" i="0">
-                <a:solidFill>
-                  <a:srgbClr val="54595D"/>
-                </a:solidFill>
-                <a:latin typeface="Calibri"/>
-              </a:rPr>
-              <a:t>Is checking a part against its drawing verification or validation?</a:t>
-            </a:r>
-          </a:p>
-          <a:p>
-            <a:r>
-              <a:rPr sz="1800" b="1">
-                <a:solidFill>
-                  <a:srgbClr val="03306E"/>
-                </a:solidFill>
-                <a:latin typeface="Calibri"/>
-              </a:rPr>
-              <a:t>Verification.</a:t>
-            </a:r>
-          </a:p>
-        </p:txBody>
-      </p:sp>
-    </p:spTree>
-  </p:cSld>
-  <p:clrMapOvr>
-    <a:masterClrMapping/>
-  </p:clrMapOvr>
-</p:sld>
-</file>
-
 <file path=ppt/slides/slide8.xml><?xml version="1.0" encoding="utf-8"?>
 <p:sld xmlns:a="http://schemas.openxmlformats.org/drawingml/2006/main" xmlns:p="http://schemas.openxmlformats.org/presentationml/2006/main" xmlns:r="http://schemas.openxmlformats.org/officeDocument/2006/relationships">
   <p:cSld>
@@ -7689,7 +10942,7 @@
                 </a:solidFill>
                 <a:latin typeface="Cambria"/>
               </a:rPr>
-              <a:t>Activity: Better wheelbarrow</a:t>
+              <a:t>Quick check: Design methodologies</a:t>
             </a:r>
           </a:p>
         </p:txBody>
@@ -7762,19 +11015,17 @@
       </p:sp>
       <p:sp>
         <p:nvSpPr>
-          <p:cNvPr id="6" name="Rounded Rectangle 5"/>
+          <p:cNvPr id="6" name="Oval 5"/>
           <p:cNvSpPr/>
           <p:nvPr/>
         </p:nvSpPr>
         <p:spPr>
           <a:xfrm>
-            <a:off x="548640" y="1508760"/>
-            <a:ext cx="2011680" cy="457200"/>
-          </a:xfrm>
-          <a:prstGeom prst="roundRect">
-            <a:avLst>
-              <a:gd name="adj" fmla="val 50000"/>
-            </a:avLst>
+            <a:off x="548640" y="1691640"/>
+            <a:ext cx="502920" cy="502920"/>
+          </a:xfrm>
+          <a:prstGeom prst="ellipse">
+            <a:avLst/>
           </a:prstGeom>
           <a:solidFill>
             <a:srgbClr val="E0463A"/>
@@ -7799,9 +11050,20 @@
           </a:fontRef>
         </p:style>
         <p:txBody>
-          <a:bodyPr rtlCol="0" anchor="ctr"/>
-          <a:lstStyle/>
-          <a:p/>
+          <a:bodyPr rtlCol="0" anchor="ctr" lIns="0" rIns="0" tIns="0" bIns="0"/>
+          <a:lstStyle/>
+          <a:p>
+            <a:pPr algn="ctr"/>
+            <a:r>
+              <a:rPr sz="1600" b="1">
+                <a:solidFill>
+                  <a:srgbClr val="FFFFFF"/>
+                </a:solidFill>
+                <a:latin typeface="Calibri"/>
+              </a:rPr>
+              <a:t>1</a:t>
+            </a:r>
+          </a:p>
         </p:txBody>
       </p:sp>
       <p:sp>
@@ -7812,8 +11074,8 @@
         </p:nvSpPr>
         <p:spPr>
           <a:xfrm>
-            <a:off x="548640" y="1508760"/>
-            <a:ext cx="2011680" cy="457200"/>
+            <a:off x="1371600" y="1645920"/>
+            <a:ext cx="10271455" cy="1188720"/>
           </a:xfrm>
           <a:prstGeom prst="rect">
             <a:avLst/>
@@ -7821,71 +11083,38 @@
           <a:noFill/>
         </p:spPr>
         <p:txBody>
-          <a:bodyPr wrap="square" anchor="ctr" lIns="0" rIns="0" tIns="0" bIns="0"/>
-          <a:lstStyle/>
-          <a:p>
-            <a:pPr algn="ctr"/>
-            <a:r>
-              <a:rPr sz="1400" b="1" i="0">
-                <a:solidFill>
-                  <a:srgbClr val="FFFFFF"/>
-                </a:solidFill>
-                <a:latin typeface="Calibri"/>
-              </a:rPr>
-              <a:t>30 minutes</a:t>
-            </a:r>
-          </a:p>
-        </p:txBody>
-      </p:sp>
-      <p:sp>
-        <p:nvSpPr>
-          <p:cNvPr id="8" name="TextBox 7"/>
-          <p:cNvSpPr txBox="1"/>
-          <p:nvPr/>
-        </p:nvSpPr>
-        <p:spPr>
-          <a:xfrm>
-            <a:off x="2743200" y="1508760"/>
-            <a:ext cx="4754880" cy="457200"/>
-          </a:xfrm>
-          <a:prstGeom prst="rect">
-            <a:avLst/>
-          </a:prstGeom>
-          <a:noFill/>
-        </p:spPr>
-        <p:txBody>
-          <a:bodyPr wrap="square" anchor="ctr" lIns="0" rIns="0" tIns="0" bIns="0"/>
+          <a:bodyPr wrap="square" anchor="t" lIns="0" rIns="0" tIns="0" bIns="0"/>
           <a:lstStyle/>
           <a:p>
             <a:pPr algn="l"/>
             <a:r>
-              <a:rPr sz="1400" b="0" i="1">
-                <a:solidFill>
-                  <a:srgbClr val="54595D"/>
-                </a:solidFill>
-                <a:latin typeface="Calibri"/>
-              </a:rPr>
-              <a:t>Pairs</a:t>
-            </a:r>
-          </a:p>
-        </p:txBody>
-      </p:sp>
-      <p:sp>
-        <p:nvSpPr>
-          <p:cNvPr id="9" name="Oval 8"/>
+              <a:rPr sz="2400" b="0" i="0">
+                <a:solidFill>
+                  <a:srgbClr val="202122"/>
+                </a:solidFill>
+                <a:latin typeface="Calibri"/>
+              </a:rPr>
+              <a:t>Which methodology suits a gearbox?</a:t>
+            </a:r>
+          </a:p>
+        </p:txBody>
+      </p:sp>
+      <p:sp>
+        <p:nvSpPr>
+          <p:cNvPr id="8" name="Oval 7"/>
           <p:cNvSpPr/>
           <p:nvPr/>
         </p:nvSpPr>
         <p:spPr>
           <a:xfrm>
-            <a:off x="548640" y="2482596"/>
-            <a:ext cx="384048" cy="384048"/>
+            <a:off x="548640" y="3108960"/>
+            <a:ext cx="502920" cy="502920"/>
           </a:xfrm>
           <a:prstGeom prst="ellipse">
             <a:avLst/>
           </a:prstGeom>
           <a:solidFill>
-            <a:srgbClr val="0645AD"/>
+            <a:srgbClr val="E0463A"/>
           </a:solidFill>
           <a:ln>
             <a:noFill/>
@@ -7912,27 +11141,27 @@
           <a:p>
             <a:pPr algn="ctr"/>
             <a:r>
-              <a:rPr sz="1300" b="1">
+              <a:rPr sz="1600" b="1">
                 <a:solidFill>
                   <a:srgbClr val="FFFFFF"/>
                 </a:solidFill>
                 <a:latin typeface="Calibri"/>
               </a:rPr>
-              <a:t>1</a:t>
-            </a:r>
-          </a:p>
-        </p:txBody>
-      </p:sp>
-      <p:sp>
-        <p:nvSpPr>
-          <p:cNvPr id="10" name="TextBox 9"/>
+              <a:t>2</a:t>
+            </a:r>
+          </a:p>
+        </p:txBody>
+      </p:sp>
+      <p:sp>
+        <p:nvSpPr>
+          <p:cNvPr id="9" name="TextBox 8"/>
           <p:cNvSpPr txBox="1"/>
           <p:nvPr/>
         </p:nvSpPr>
         <p:spPr>
           <a:xfrm>
-            <a:off x="1143000" y="2240280"/>
-            <a:ext cx="5943600" cy="868680"/>
+            <a:off x="1371600" y="3063240"/>
+            <a:ext cx="10271455" cy="1188720"/>
           </a:xfrm>
           <a:prstGeom prst="rect">
             <a:avLst/>
@@ -7940,38 +11169,38 @@
           <a:noFill/>
         </p:spPr>
         <p:txBody>
-          <a:bodyPr wrap="square" anchor="ctr" lIns="0" rIns="0" tIns="0" bIns="0"/>
+          <a:bodyPr wrap="square" anchor="t" lIns="0" rIns="0" tIns="0" bIns="0"/>
           <a:lstStyle/>
           <a:p>
             <a:pPr algn="l"/>
             <a:r>
-              <a:rPr sz="1700" b="0" i="0">
+              <a:rPr sz="2400" b="0" i="0">
                 <a:solidFill>
                   <a:srgbClr val="202122"/>
                 </a:solidFill>
                 <a:latin typeface="Calibri"/>
               </a:rPr>
-              <a:t>Interview your partner as the client and record their requirements.</a:t>
-            </a:r>
-          </a:p>
-        </p:txBody>
-      </p:sp>
-      <p:sp>
-        <p:nvSpPr>
-          <p:cNvPr id="11" name="Oval 10"/>
+              <a:t>What is DFA?</a:t>
+            </a:r>
+          </a:p>
+        </p:txBody>
+      </p:sp>
+      <p:sp>
+        <p:nvSpPr>
+          <p:cNvPr id="10" name="Oval 9"/>
           <p:cNvSpPr/>
           <p:nvPr/>
         </p:nvSpPr>
         <p:spPr>
           <a:xfrm>
-            <a:off x="548640" y="3461004"/>
-            <a:ext cx="384048" cy="384048"/>
+            <a:off x="548640" y="4526280"/>
+            <a:ext cx="502920" cy="502920"/>
           </a:xfrm>
           <a:prstGeom prst="ellipse">
             <a:avLst/>
           </a:prstGeom>
           <a:solidFill>
-            <a:srgbClr val="0645AD"/>
+            <a:srgbClr val="E0463A"/>
           </a:solidFill>
           <a:ln>
             <a:noFill/>
@@ -7998,13 +11227,46 @@
           <a:p>
             <a:pPr algn="ctr"/>
             <a:r>
-              <a:rPr sz="1300" b="1">
+              <a:rPr sz="1600" b="1">
                 <a:solidFill>
                   <a:srgbClr val="FFFFFF"/>
                 </a:solidFill>
                 <a:latin typeface="Calibri"/>
               </a:rPr>
-              <a:t>2</a:t>
+              <a:t>3</a:t>
+            </a:r>
+          </a:p>
+        </p:txBody>
+      </p:sp>
+      <p:sp>
+        <p:nvSpPr>
+          <p:cNvPr id="11" name="TextBox 10"/>
+          <p:cNvSpPr txBox="1"/>
+          <p:nvPr/>
+        </p:nvSpPr>
+        <p:spPr>
+          <a:xfrm>
+            <a:off x="1371600" y="4480560"/>
+            <a:ext cx="10271455" cy="1188720"/>
+          </a:xfrm>
+          <a:prstGeom prst="rect">
+            <a:avLst/>
+          </a:prstGeom>
+          <a:noFill/>
+        </p:spPr>
+        <p:txBody>
+          <a:bodyPr wrap="square" anchor="t" lIns="0" rIns="0" tIns="0" bIns="0"/>
+          <a:lstStyle/>
+          <a:p>
+            <a:pPr algn="l"/>
+            <a:r>
+              <a:rPr sz="2400" b="0" i="0">
+                <a:solidFill>
+                  <a:srgbClr val="202122"/>
+                </a:solidFill>
+                <a:latin typeface="Calibri"/>
+              </a:rPr>
+              <a:t>What is planned obsolescence?</a:t>
             </a:r>
           </a:p>
         </p:txBody>
@@ -8017,8 +11279,8 @@
         </p:nvSpPr>
         <p:spPr>
           <a:xfrm>
-            <a:off x="1143000" y="3218688"/>
-            <a:ext cx="5943600" cy="868680"/>
+            <a:off x="548640" y="5852160"/>
+            <a:ext cx="11094415" cy="365760"/>
           </a:xfrm>
           <a:prstGeom prst="rect">
             <a:avLst/>
@@ -8026,353 +11288,18 @@
           <a:noFill/>
         </p:spPr>
         <p:txBody>
-          <a:bodyPr wrap="square" anchor="ctr" lIns="0" rIns="0" tIns="0" bIns="0"/>
+          <a:bodyPr wrap="square" anchor="t" lIns="0" rIns="0" tIns="0" bIns="0"/>
           <a:lstStyle/>
           <a:p>
             <a:pPr algn="l"/>
             <a:r>
-              <a:rPr sz="1700" b="0" i="0">
-                <a:solidFill>
-                  <a:srgbClr val="202122"/>
-                </a:solidFill>
-                <a:latin typeface="Calibri"/>
-              </a:rPr>
-              <a:t>Write a specification with measurable criteria.</a:t>
-            </a:r>
-          </a:p>
-        </p:txBody>
-      </p:sp>
-      <p:sp>
-        <p:nvSpPr>
-          <p:cNvPr id="13" name="Oval 12"/>
-          <p:cNvSpPr/>
-          <p:nvPr/>
-        </p:nvSpPr>
-        <p:spPr>
-          <a:xfrm>
-            <a:off x="548640" y="4439412"/>
-            <a:ext cx="384048" cy="384048"/>
-          </a:xfrm>
-          <a:prstGeom prst="ellipse">
-            <a:avLst/>
-          </a:prstGeom>
-          <a:solidFill>
-            <a:srgbClr val="0645AD"/>
-          </a:solidFill>
-          <a:ln>
-            <a:noFill/>
-          </a:ln>
-          <a:effectLst/>
-        </p:spPr>
-        <p:style>
-          <a:lnRef idx="1">
-            <a:schemeClr val="accent1"/>
-          </a:lnRef>
-          <a:fillRef idx="3">
-            <a:schemeClr val="accent1"/>
-          </a:fillRef>
-          <a:effectRef idx="2">
-            <a:schemeClr val="accent1"/>
-          </a:effectRef>
-          <a:fontRef idx="minor">
-            <a:schemeClr val="lt1"/>
-          </a:fontRef>
-        </p:style>
-        <p:txBody>
-          <a:bodyPr rtlCol="0" anchor="ctr" lIns="0" rIns="0" tIns="0" bIns="0"/>
-          <a:lstStyle/>
-          <a:p>
-            <a:pPr algn="ctr"/>
-            <a:r>
-              <a:rPr sz="1300" b="1">
-                <a:solidFill>
-                  <a:srgbClr val="FFFFFF"/>
-                </a:solidFill>
-                <a:latin typeface="Calibri"/>
-              </a:rPr>
-              <a:t>3</a:t>
-            </a:r>
-          </a:p>
-        </p:txBody>
-      </p:sp>
-      <p:sp>
-        <p:nvSpPr>
-          <p:cNvPr id="14" name="TextBox 13"/>
-          <p:cNvSpPr txBox="1"/>
-          <p:nvPr/>
-        </p:nvSpPr>
-        <p:spPr>
-          <a:xfrm>
-            <a:off x="1143000" y="4197096"/>
-            <a:ext cx="5943600" cy="868680"/>
-          </a:xfrm>
-          <a:prstGeom prst="rect">
-            <a:avLst/>
-          </a:prstGeom>
-          <a:noFill/>
-        </p:spPr>
-        <p:txBody>
-          <a:bodyPr wrap="square" anchor="ctr" lIns="0" rIns="0" tIns="0" bIns="0"/>
-          <a:lstStyle/>
-          <a:p>
-            <a:pPr algn="l"/>
-            <a:r>
-              <a:rPr sz="1700" b="0" i="0">
-                <a:solidFill>
-                  <a:srgbClr val="202122"/>
-                </a:solidFill>
-                <a:latin typeface="Calibri"/>
-              </a:rPr>
-              <a:t>Use an anthropometric table to size the handles.</a:t>
-            </a:r>
-          </a:p>
-        </p:txBody>
-      </p:sp>
-      <p:sp>
-        <p:nvSpPr>
-          <p:cNvPr id="15" name="Oval 14"/>
-          <p:cNvSpPr/>
-          <p:nvPr/>
-        </p:nvSpPr>
-        <p:spPr>
-          <a:xfrm>
-            <a:off x="548640" y="5417820"/>
-            <a:ext cx="384048" cy="384048"/>
-          </a:xfrm>
-          <a:prstGeom prst="ellipse">
-            <a:avLst/>
-          </a:prstGeom>
-          <a:solidFill>
-            <a:srgbClr val="0645AD"/>
-          </a:solidFill>
-          <a:ln>
-            <a:noFill/>
-          </a:ln>
-          <a:effectLst/>
-        </p:spPr>
-        <p:style>
-          <a:lnRef idx="1">
-            <a:schemeClr val="accent1"/>
-          </a:lnRef>
-          <a:fillRef idx="3">
-            <a:schemeClr val="accent1"/>
-          </a:fillRef>
-          <a:effectRef idx="2">
-            <a:schemeClr val="accent1"/>
-          </a:effectRef>
-          <a:fontRef idx="minor">
-            <a:schemeClr val="lt1"/>
-          </a:fontRef>
-        </p:style>
-        <p:txBody>
-          <a:bodyPr rtlCol="0" anchor="ctr" lIns="0" rIns="0" tIns="0" bIns="0"/>
-          <a:lstStyle/>
-          <a:p>
-            <a:pPr algn="ctr"/>
-            <a:r>
-              <a:rPr sz="1300" b="1">
-                <a:solidFill>
-                  <a:srgbClr val="FFFFFF"/>
-                </a:solidFill>
-                <a:latin typeface="Calibri"/>
-              </a:rPr>
-              <a:t>4</a:t>
-            </a:r>
-          </a:p>
-        </p:txBody>
-      </p:sp>
-      <p:sp>
-        <p:nvSpPr>
-          <p:cNvPr id="16" name="TextBox 15"/>
-          <p:cNvSpPr txBox="1"/>
-          <p:nvPr/>
-        </p:nvSpPr>
-        <p:spPr>
-          <a:xfrm>
-            <a:off x="1143000" y="5175504"/>
-            <a:ext cx="5943600" cy="868680"/>
-          </a:xfrm>
-          <a:prstGeom prst="rect">
-            <a:avLst/>
-          </a:prstGeom>
-          <a:noFill/>
-        </p:spPr>
-        <p:txBody>
-          <a:bodyPr wrap="square" anchor="ctr" lIns="0" rIns="0" tIns="0" bIns="0"/>
-          <a:lstStyle/>
-          <a:p>
-            <a:pPr algn="l"/>
-            <a:r>
-              <a:rPr sz="1700" b="0" i="0">
-                <a:solidFill>
-                  <a:srgbClr val="202122"/>
-                </a:solidFill>
-                <a:latin typeface="Calibri"/>
-              </a:rPr>
-              <a:t>Build a comparison matrix to verify one concept against the specification.</a:t>
-            </a:r>
-          </a:p>
-        </p:txBody>
-      </p:sp>
-      <p:sp>
-        <p:nvSpPr>
-          <p:cNvPr id="17" name="Rounded Rectangle 16"/>
-          <p:cNvSpPr/>
-          <p:nvPr/>
-        </p:nvSpPr>
-        <p:spPr>
-          <a:xfrm>
-            <a:off x="7772400" y="1508760"/>
-            <a:ext cx="3867912" cy="4572000"/>
-          </a:xfrm>
-          <a:prstGeom prst="roundRect">
-            <a:avLst>
-              <a:gd name="adj" fmla="val 8000"/>
-            </a:avLst>
-          </a:prstGeom>
-          <a:solidFill>
-            <a:srgbClr val="EAF3FF"/>
-          </a:solidFill>
-          <a:ln>
-            <a:noFill/>
-          </a:ln>
-          <a:effectLst/>
-        </p:spPr>
-        <p:style>
-          <a:lnRef idx="1">
-            <a:schemeClr val="accent1"/>
-          </a:lnRef>
-          <a:fillRef idx="3">
-            <a:schemeClr val="accent1"/>
-          </a:fillRef>
-          <a:effectRef idx="2">
-            <a:schemeClr val="accent1"/>
-          </a:effectRef>
-          <a:fontRef idx="minor">
-            <a:schemeClr val="lt1"/>
-          </a:fontRef>
-        </p:style>
-        <p:txBody>
-          <a:bodyPr rtlCol="0" anchor="ctr"/>
-          <a:lstStyle/>
-          <a:p/>
-        </p:txBody>
-      </p:sp>
-      <p:sp>
-        <p:nvSpPr>
-          <p:cNvPr id="18" name="TextBox 17"/>
-          <p:cNvSpPr txBox="1"/>
-          <p:nvPr/>
-        </p:nvSpPr>
-        <p:spPr>
-          <a:xfrm>
-            <a:off x="8046720" y="1737360"/>
-            <a:ext cx="3291840" cy="365760"/>
-          </a:xfrm>
-          <a:prstGeom prst="rect">
-            <a:avLst/>
-          </a:prstGeom>
-          <a:noFill/>
-        </p:spPr>
-        <p:txBody>
-          <a:bodyPr wrap="square" anchor="t" lIns="0" rIns="0" tIns="0" bIns="0"/>
-          <a:lstStyle/>
-          <a:p>
-            <a:pPr algn="l"/>
-            <a:r>
-              <a:rPr sz="1300" b="1" i="0">
-                <a:solidFill>
-                  <a:srgbClr val="0645AD"/>
-                </a:solidFill>
-                <a:latin typeface="Calibri"/>
-              </a:rPr>
-              <a:t>SUCCESS CRITERIA</a:t>
-            </a:r>
-          </a:p>
-        </p:txBody>
-      </p:sp>
-      <p:sp>
-        <p:nvSpPr>
-          <p:cNvPr id="19" name="TextBox 18"/>
-          <p:cNvSpPr txBox="1"/>
-          <p:nvPr/>
-        </p:nvSpPr>
-        <p:spPr>
-          <a:xfrm>
-            <a:off x="8046720" y="2240280"/>
-            <a:ext cx="3337560" cy="3657600"/>
-          </a:xfrm>
-          <a:prstGeom prst="rect">
-            <a:avLst/>
-          </a:prstGeom>
-          <a:noFill/>
-        </p:spPr>
-        <p:txBody>
-          <a:bodyPr wrap="square" lIns="0" rIns="0" tIns="0" bIns="0">
-            <a:spAutoFit/>
-          </a:bodyPr>
-          <a:lstStyle/>
-          <a:p>
-            <a:pPr marL="274320" indent="-274320">
-              <a:spcAft>
-                <a:spcPts val="810"/>
-              </a:spcAft>
-              <a:buClr>
-                <a:srgbClr val="0645AD"/>
-              </a:buClr>
-              <a:buFont typeface="Arial"/>
-              <a:buChar char="•"/>
-            </a:pPr>
-            <a:r>
-              <a:rPr sz="1800" b="0">
-                <a:solidFill>
-                  <a:srgbClr val="202122"/>
-                </a:solidFill>
-                <a:latin typeface="Calibri"/>
-              </a:rPr>
-              <a:t>Requirements are measurable</a:t>
-            </a:r>
-          </a:p>
-          <a:p>
-            <a:pPr marL="274320" indent="-274320">
-              <a:spcAft>
-                <a:spcPts val="810"/>
-              </a:spcAft>
-              <a:buClr>
-                <a:srgbClr val="0645AD"/>
-              </a:buClr>
-              <a:buFont typeface="Arial"/>
-              <a:buChar char="•"/>
-            </a:pPr>
-            <a:r>
-              <a:rPr sz="1800" b="0">
-                <a:solidFill>
-                  <a:srgbClr val="202122"/>
-                </a:solidFill>
-                <a:latin typeface="Calibri"/>
-              </a:rPr>
-              <a:t>Anthropometric data used correctly</a:t>
-            </a:r>
-          </a:p>
-          <a:p>
-            <a:pPr marL="274320" indent="-274320">
-              <a:spcAft>
-                <a:spcPts val="810"/>
-              </a:spcAft>
-              <a:buClr>
-                <a:srgbClr val="0645AD"/>
-              </a:buClr>
-              <a:buFont typeface="Arial"/>
-              <a:buChar char="•"/>
-            </a:pPr>
-            <a:r>
-              <a:rPr sz="1800" b="0">
-                <a:solidFill>
-                  <a:srgbClr val="202122"/>
-                </a:solidFill>
-                <a:latin typeface="Calibri"/>
-              </a:rPr>
-              <a:t>Matrix scores justified</a:t>
+              <a:rPr sz="1300" b="0" i="1">
+                <a:solidFill>
+                  <a:srgbClr val="54595D"/>
+                </a:solidFill>
+                <a:latin typeface="Calibri"/>
+              </a:rPr>
+              <a:t>Answer on mini whiteboards or in your book. Answers are in the speaker notes.</a:t>
             </a:r>
           </a:p>
         </p:txBody>
@@ -8391,7 +11318,7 @@
     <p:bg>
       <p:bgPr>
         <a:solidFill>
-          <a:srgbClr val="03306E"/>
+          <a:srgbClr val="FFFFFF"/>
         </a:solidFill>
         <a:effectLst/>
       </p:bgPr>
@@ -8427,7 +11354,7 @@
             <a:r>
               <a:rPr sz="1100" b="1" i="0">
                 <a:solidFill>
-                  <a:srgbClr val="A9C8F0"/>
+                  <a:srgbClr val="54595D"/>
                 </a:solidFill>
                 <a:latin typeface="Calibri"/>
               </a:rPr>
@@ -8460,25 +11387,206 @@
             <a:r>
               <a:rPr sz="3200" b="1" i="0">
                 <a:solidFill>
-                  <a:srgbClr val="FFFFFF"/>
+                  <a:srgbClr val="03306E"/>
                 </a:solidFill>
                 <a:latin typeface="Cambria"/>
               </a:rPr>
-              <a:t>Exit ticket</a:t>
-            </a:r>
-          </a:p>
-        </p:txBody>
-      </p:sp>
-      <p:sp>
-        <p:nvSpPr>
-          <p:cNvPr id="4" name="Oval 3"/>
+              <a:t>Verification and validation</a:t>
+            </a:r>
+          </a:p>
+        </p:txBody>
+      </p:sp>
+      <p:sp>
+        <p:nvSpPr>
+          <p:cNvPr id="4" name="TextBox 3"/>
+          <p:cNvSpPr txBox="1"/>
+          <p:nvPr/>
+        </p:nvSpPr>
+        <p:spPr>
+          <a:xfrm>
+            <a:off x="548640" y="6446520"/>
+            <a:ext cx="8229600" cy="274320"/>
+          </a:xfrm>
+          <a:prstGeom prst="rect">
+            <a:avLst/>
+          </a:prstGeom>
+          <a:noFill/>
+        </p:spPr>
+        <p:txBody>
+          <a:bodyPr wrap="square" anchor="t" lIns="0" rIns="0" tIns="0" bIns="0"/>
+          <a:lstStyle/>
+          <a:p>
+            <a:pPr algn="l"/>
+            <a:r>
+              <a:rPr sz="1000" b="0" i="0">
+                <a:solidFill>
+                  <a:srgbClr val="54595D"/>
+                </a:solidFill>
+                <a:latin typeface="Calibri"/>
+              </a:rPr>
+              <a:t>Design and Development for Engineering and Manufacturing T Level  ·  Design Principles, Methodologies and Verification</a:t>
+            </a:r>
+          </a:p>
+        </p:txBody>
+      </p:sp>
+      <p:sp>
+        <p:nvSpPr>
+          <p:cNvPr id="5" name="TextBox 4"/>
+          <p:cNvSpPr txBox="1"/>
+          <p:nvPr/>
+        </p:nvSpPr>
+        <p:spPr>
+          <a:xfrm>
+            <a:off x="10728655" y="6446520"/>
+            <a:ext cx="914400" cy="274320"/>
+          </a:xfrm>
+          <a:prstGeom prst="rect">
+            <a:avLst/>
+          </a:prstGeom>
+          <a:noFill/>
+        </p:spPr>
+        <p:txBody>
+          <a:bodyPr wrap="square" anchor="t" lIns="0" rIns="0" tIns="0" bIns="0"/>
+          <a:lstStyle/>
+          <a:p>
+            <a:pPr algn="r"/>
+            <a:r>
+              <a:rPr sz="1000" b="0" i="0">
+                <a:solidFill>
+                  <a:srgbClr val="54595D"/>
+                </a:solidFill>
+                <a:latin typeface="Calibri"/>
+              </a:rPr>
+              <a:t>9</a:t>
+            </a:r>
+          </a:p>
+        </p:txBody>
+      </p:sp>
+      <p:sp>
+        <p:nvSpPr>
+          <p:cNvPr id="6" name="TextBox 5"/>
+          <p:cNvSpPr txBox="1"/>
+          <p:nvPr/>
+        </p:nvSpPr>
+        <p:spPr>
+          <a:xfrm>
+            <a:off x="548640" y="1554480"/>
+            <a:ext cx="6720840" cy="4617720"/>
+          </a:xfrm>
+          <a:prstGeom prst="rect">
+            <a:avLst/>
+          </a:prstGeom>
+          <a:noFill/>
+        </p:spPr>
+        <p:txBody>
+          <a:bodyPr wrap="square" lIns="0" rIns="0" tIns="0" bIns="0">
+            <a:spAutoFit/>
+          </a:bodyPr>
+          <a:lstStyle/>
+          <a:p>
+            <a:pPr>
+              <a:spcAft>
+                <a:spcPts val="1320"/>
+              </a:spcAft>
+            </a:pPr>
+            <a:r>
+              <a:rPr sz="2200" b="0">
+                <a:solidFill>
+                  <a:srgbClr val="202122"/>
+                </a:solidFill>
+                <a:latin typeface="Calibri"/>
+              </a:rPr>
+              <a:t>Verification asks 'did we build it right?'. It checks the design meets its specification, using comparison matrices, measurements and functional tests.</a:t>
+            </a:r>
+          </a:p>
+          <a:p>
+            <a:pPr>
+              <a:spcAft>
+                <a:spcPts val="1320"/>
+              </a:spcAft>
+            </a:pPr>
+            <a:r>
+              <a:rPr sz="2200" b="0">
+                <a:solidFill>
+                  <a:srgbClr val="202122"/>
+                </a:solidFill>
+                <a:latin typeface="Calibri"/>
+              </a:rPr>
+              <a:t>Validation asks 'did we build the right thing?'. It checks the product meets the user's real needs, using user testing, ranking and decision trees.</a:t>
+            </a:r>
+          </a:p>
+          <a:p>
+            <a:pPr>
+              <a:spcAft>
+                <a:spcPts val="1320"/>
+              </a:spcAft>
+            </a:pPr>
+            <a:r>
+              <a:rPr sz="2200" b="0">
+                <a:solidFill>
+                  <a:srgbClr val="202122"/>
+                </a:solidFill>
+                <a:latin typeface="Calibri"/>
+              </a:rPr>
+              <a:t>Both are needed at every stage: a part can meet every dimension on the drawing (verified) yet still be awkward to use (not validated).</a:t>
+            </a:r>
+          </a:p>
+        </p:txBody>
+      </p:sp>
+      <p:sp>
+        <p:nvSpPr>
+          <p:cNvPr id="7" name="Rounded Rectangle 6"/>
           <p:cNvSpPr/>
           <p:nvPr/>
         </p:nvSpPr>
         <p:spPr>
           <a:xfrm>
-            <a:off x="548640" y="1737360"/>
-            <a:ext cx="502920" cy="502920"/>
+            <a:off x="7772400" y="1554480"/>
+            <a:ext cx="3867912" cy="4526280"/>
+          </a:xfrm>
+          <a:prstGeom prst="roundRect">
+            <a:avLst>
+              <a:gd name="adj" fmla="val 8000"/>
+            </a:avLst>
+          </a:prstGeom>
+          <a:solidFill>
+            <a:srgbClr val="03306E"/>
+          </a:solidFill>
+          <a:ln>
+            <a:noFill/>
+          </a:ln>
+          <a:effectLst/>
+        </p:spPr>
+        <p:style>
+          <a:lnRef idx="1">
+            <a:schemeClr val="accent1"/>
+          </a:lnRef>
+          <a:fillRef idx="3">
+            <a:schemeClr val="accent1"/>
+          </a:fillRef>
+          <a:effectRef idx="2">
+            <a:schemeClr val="accent1"/>
+          </a:effectRef>
+          <a:fontRef idx="minor">
+            <a:schemeClr val="lt1"/>
+          </a:fontRef>
+        </p:style>
+        <p:txBody>
+          <a:bodyPr rtlCol="0" anchor="ctr"/>
+          <a:lstStyle/>
+          <a:p/>
+        </p:txBody>
+      </p:sp>
+      <p:sp>
+        <p:nvSpPr>
+          <p:cNvPr id="8" name="Oval 7"/>
+          <p:cNvSpPr/>
+          <p:nvPr/>
+        </p:nvSpPr>
+        <p:spPr>
+          <a:xfrm>
+            <a:off x="8046720" y="1828800"/>
+            <a:ext cx="548640" cy="548640"/>
           </a:xfrm>
           <a:prstGeom prst="ellipse">
             <a:avLst/>
@@ -8511,185 +11619,13 @@
           <a:p>
             <a:pPr algn="ctr"/>
             <a:r>
-              <a:rPr sz="1700" b="1">
+              <a:rPr sz="1300" b="1">
                 <a:solidFill>
                   <a:srgbClr val="FFFFFF"/>
                 </a:solidFill>
                 <a:latin typeface="Calibri"/>
               </a:rPr>
-              <a:t>1</a:t>
-            </a:r>
-          </a:p>
-        </p:txBody>
-      </p:sp>
-      <p:sp>
-        <p:nvSpPr>
-          <p:cNvPr id="5" name="TextBox 4"/>
-          <p:cNvSpPr txBox="1"/>
-          <p:nvPr/>
-        </p:nvSpPr>
-        <p:spPr>
-          <a:xfrm>
-            <a:off x="1325880" y="1645920"/>
-            <a:ext cx="6583680" cy="822960"/>
-          </a:xfrm>
-          <a:prstGeom prst="rect">
-            <a:avLst/>
-          </a:prstGeom>
-          <a:noFill/>
-        </p:spPr>
-        <p:txBody>
-          <a:bodyPr wrap="square" anchor="ctr" lIns="0" rIns="0" tIns="0" bIns="0"/>
-          <a:lstStyle/>
-          <a:p>
-            <a:pPr algn="l"/>
-            <a:r>
-              <a:rPr sz="2000" b="0" i="0">
-                <a:solidFill>
-                  <a:srgbClr val="FFFFFF"/>
-                </a:solidFill>
-                <a:latin typeface="Calibri"/>
-              </a:rPr>
-              <a:t>Which methodology suits a gearbox, and why?</a:t>
-            </a:r>
-          </a:p>
-        </p:txBody>
-      </p:sp>
-      <p:sp>
-        <p:nvSpPr>
-          <p:cNvPr id="6" name="Oval 5"/>
-          <p:cNvSpPr/>
-          <p:nvPr/>
-        </p:nvSpPr>
-        <p:spPr>
-          <a:xfrm>
-            <a:off x="548640" y="2697480"/>
-            <a:ext cx="502920" cy="502920"/>
-          </a:xfrm>
-          <a:prstGeom prst="ellipse">
-            <a:avLst/>
-          </a:prstGeom>
-          <a:solidFill>
-            <a:srgbClr val="E0463A"/>
-          </a:solidFill>
-          <a:ln>
-            <a:noFill/>
-          </a:ln>
-          <a:effectLst/>
-        </p:spPr>
-        <p:style>
-          <a:lnRef idx="1">
-            <a:schemeClr val="accent1"/>
-          </a:lnRef>
-          <a:fillRef idx="3">
-            <a:schemeClr val="accent1"/>
-          </a:fillRef>
-          <a:effectRef idx="2">
-            <a:schemeClr val="accent1"/>
-          </a:effectRef>
-          <a:fontRef idx="minor">
-            <a:schemeClr val="lt1"/>
-          </a:fontRef>
-        </p:style>
-        <p:txBody>
-          <a:bodyPr rtlCol="0" anchor="ctr" lIns="0" rIns="0" tIns="0" bIns="0"/>
-          <a:lstStyle/>
-          <a:p>
-            <a:pPr algn="ctr"/>
-            <a:r>
-              <a:rPr sz="1700" b="1">
-                <a:solidFill>
-                  <a:srgbClr val="FFFFFF"/>
-                </a:solidFill>
-                <a:latin typeface="Calibri"/>
-              </a:rPr>
-              <a:t>2</a:t>
-            </a:r>
-          </a:p>
-        </p:txBody>
-      </p:sp>
-      <p:sp>
-        <p:nvSpPr>
-          <p:cNvPr id="7" name="TextBox 6"/>
-          <p:cNvSpPr txBox="1"/>
-          <p:nvPr/>
-        </p:nvSpPr>
-        <p:spPr>
-          <a:xfrm>
-            <a:off x="1325880" y="2606040"/>
-            <a:ext cx="6583680" cy="822960"/>
-          </a:xfrm>
-          <a:prstGeom prst="rect">
-            <a:avLst/>
-          </a:prstGeom>
-          <a:noFill/>
-        </p:spPr>
-        <p:txBody>
-          <a:bodyPr wrap="square" anchor="ctr" lIns="0" rIns="0" tIns="0" bIns="0"/>
-          <a:lstStyle/>
-          <a:p>
-            <a:pPr algn="l"/>
-            <a:r>
-              <a:rPr sz="2000" b="0" i="0">
-                <a:solidFill>
-                  <a:srgbClr val="FFFFFF"/>
-                </a:solidFill>
-                <a:latin typeface="Calibri"/>
-              </a:rPr>
-              <a:t>Why can't you skip validation?</a:t>
-            </a:r>
-          </a:p>
-        </p:txBody>
-      </p:sp>
-      <p:sp>
-        <p:nvSpPr>
-          <p:cNvPr id="8" name="Oval 7"/>
-          <p:cNvSpPr/>
-          <p:nvPr/>
-        </p:nvSpPr>
-        <p:spPr>
-          <a:xfrm>
-            <a:off x="548640" y="3657600"/>
-            <a:ext cx="502920" cy="502920"/>
-          </a:xfrm>
-          <a:prstGeom prst="ellipse">
-            <a:avLst/>
-          </a:prstGeom>
-          <a:solidFill>
-            <a:srgbClr val="E0463A"/>
-          </a:solidFill>
-          <a:ln>
-            <a:noFill/>
-          </a:ln>
-          <a:effectLst/>
-        </p:spPr>
-        <p:style>
-          <a:lnRef idx="1">
-            <a:schemeClr val="accent1"/>
-          </a:lnRef>
-          <a:fillRef idx="3">
-            <a:schemeClr val="accent1"/>
-          </a:fillRef>
-          <a:effectRef idx="2">
-            <a:schemeClr val="accent1"/>
-          </a:effectRef>
-          <a:fontRef idx="minor">
-            <a:schemeClr val="lt1"/>
-          </a:fontRef>
-        </p:style>
-        <p:txBody>
-          <a:bodyPr rtlCol="0" anchor="ctr" lIns="0" rIns="0" tIns="0" bIns="0"/>
-          <a:lstStyle/>
-          <a:p>
-            <a:pPr algn="ctr"/>
-            <a:r>
-              <a:rPr sz="1700" b="1">
-                <a:solidFill>
-                  <a:srgbClr val="FFFFFF"/>
-                </a:solidFill>
-                <a:latin typeface="Calibri"/>
-              </a:rPr>
-              <a:t>3</a:t>
+              <a:t>e.g.</a:t>
             </a:r>
           </a:p>
         </p:txBody>
@@ -8702,8 +11638,8 @@
         </p:nvSpPr>
         <p:spPr>
           <a:xfrm>
-            <a:off x="1325880" y="3566160"/>
-            <a:ext cx="6583680" cy="822960"/>
+            <a:off x="8046720" y="2560320"/>
+            <a:ext cx="3291840" cy="365760"/>
           </a:xfrm>
           <a:prstGeom prst="rect">
             <a:avLst/>
@@ -8711,194 +11647,51 @@
           <a:noFill/>
         </p:spPr>
         <p:txBody>
-          <a:bodyPr wrap="square" anchor="ctr" lIns="0" rIns="0" tIns="0" bIns="0"/>
+          <a:bodyPr wrap="square" anchor="t" lIns="0" rIns="0" tIns="0" bIns="0"/>
           <a:lstStyle/>
           <a:p>
             <a:pPr algn="l"/>
             <a:r>
-              <a:rPr sz="2000" b="0" i="0">
+              <a:rPr sz="1300" b="1" i="0">
+                <a:solidFill>
+                  <a:srgbClr val="A9C8F0"/>
+                </a:solidFill>
+                <a:latin typeface="Calibri"/>
+              </a:rPr>
+              <a:t>EXAMPLE</a:t>
+            </a:r>
+          </a:p>
+        </p:txBody>
+      </p:sp>
+      <p:sp>
+        <p:nvSpPr>
+          <p:cNvPr id="10" name="TextBox 9"/>
+          <p:cNvSpPr txBox="1"/>
+          <p:nvPr/>
+        </p:nvSpPr>
+        <p:spPr>
+          <a:xfrm>
+            <a:off x="8046720" y="2971800"/>
+            <a:ext cx="3291840" cy="2971800"/>
+          </a:xfrm>
+          <a:prstGeom prst="rect">
+            <a:avLst/>
+          </a:prstGeom>
+          <a:noFill/>
+        </p:spPr>
+        <p:txBody>
+          <a:bodyPr wrap="square" anchor="t" lIns="0" rIns="0" tIns="0" bIns="0"/>
+          <a:lstStyle/>
+          <a:p>
+            <a:pPr algn="l"/>
+            <a:r>
+              <a:rPr sz="1900" b="0" i="0">
                 <a:solidFill>
                   <a:srgbClr val="FFFFFF"/>
                 </a:solidFill>
-                <a:latin typeface="Calibri"/>
-              </a:rPr>
-              <a:t>How do tolerances affect DFA?</a:t>
-            </a:r>
-          </a:p>
-        </p:txBody>
-      </p:sp>
-      <p:sp>
-        <p:nvSpPr>
-          <p:cNvPr id="10" name="Rounded Rectangle 9"/>
-          <p:cNvSpPr/>
-          <p:nvPr/>
-        </p:nvSpPr>
-        <p:spPr>
-          <a:xfrm>
-            <a:off x="8229600" y="1645920"/>
-            <a:ext cx="3410712" cy="2926080"/>
-          </a:xfrm>
-          <a:prstGeom prst="roundRect">
-            <a:avLst>
-              <a:gd name="adj" fmla="val 8000"/>
-            </a:avLst>
-          </a:prstGeom>
-          <a:solidFill>
-            <a:srgbClr val="0645AD"/>
-          </a:solidFill>
-          <a:ln>
-            <a:noFill/>
-          </a:ln>
-          <a:effectLst/>
-        </p:spPr>
-        <p:style>
-          <a:lnRef idx="1">
-            <a:schemeClr val="accent1"/>
-          </a:lnRef>
-          <a:fillRef idx="3">
-            <a:schemeClr val="accent1"/>
-          </a:fillRef>
-          <a:effectRef idx="2">
-            <a:schemeClr val="accent1"/>
-          </a:effectRef>
-          <a:fontRef idx="minor">
-            <a:schemeClr val="lt1"/>
-          </a:fontRef>
-        </p:style>
-        <p:txBody>
-          <a:bodyPr rtlCol="0" anchor="ctr"/>
-          <a:lstStyle/>
-          <a:p/>
-        </p:txBody>
-      </p:sp>
-      <p:sp>
-        <p:nvSpPr>
-          <p:cNvPr id="11" name="TextBox 10"/>
-          <p:cNvSpPr txBox="1"/>
-          <p:nvPr/>
-        </p:nvSpPr>
-        <p:spPr>
-          <a:xfrm>
-            <a:off x="8503920" y="1874519"/>
-            <a:ext cx="2926080" cy="365760"/>
-          </a:xfrm>
-          <a:prstGeom prst="rect">
-            <a:avLst/>
-          </a:prstGeom>
-          <a:noFill/>
-        </p:spPr>
-        <p:txBody>
-          <a:bodyPr wrap="square" anchor="t" lIns="0" rIns="0" tIns="0" bIns="0"/>
-          <a:lstStyle/>
-          <a:p>
-            <a:pPr algn="l"/>
-            <a:r>
-              <a:rPr sz="1300" b="1" i="0">
-                <a:solidFill>
-                  <a:srgbClr val="A9C8F0"/>
-                </a:solidFill>
-                <a:latin typeface="Calibri"/>
-              </a:rPr>
-              <a:t>REVISE THIS TOPIC</a:t>
-            </a:r>
-          </a:p>
-        </p:txBody>
-      </p:sp>
-      <p:sp>
-        <p:nvSpPr>
-          <p:cNvPr id="12" name="TextBox 11"/>
-          <p:cNvSpPr txBox="1"/>
-          <p:nvPr/>
-        </p:nvSpPr>
-        <p:spPr>
-          <a:xfrm>
-            <a:off x="8503920" y="2286000"/>
-            <a:ext cx="2926080" cy="548640"/>
-          </a:xfrm>
-          <a:prstGeom prst="rect">
-            <a:avLst/>
-          </a:prstGeom>
-          <a:noFill/>
-        </p:spPr>
-        <p:txBody>
-          <a:bodyPr wrap="square" anchor="t" lIns="0" rIns="0" tIns="0" bIns="0"/>
-          <a:lstStyle/>
-          <a:p>
-            <a:pPr algn="l"/>
-            <a:r>
-              <a:rPr sz="1400" b="0" i="0">
-                <a:solidFill>
-                  <a:srgbClr val="FFFFFF"/>
-                </a:solidFill>
-                <a:latin typeface="Calibri"/>
-              </a:rPr>
-              <a:t>Revision notes for this lesson are on the study wiki:</a:t>
-            </a:r>
-          </a:p>
-        </p:txBody>
-      </p:sp>
-      <p:sp>
-        <p:nvSpPr>
-          <p:cNvPr id="13" name="TextBox 12"/>
-          <p:cNvSpPr txBox="1"/>
-          <p:nvPr/>
-        </p:nvSpPr>
-        <p:spPr>
-          <a:xfrm>
-            <a:off x="8503920" y="2926080"/>
-            <a:ext cx="2926080" cy="1463040"/>
-          </a:xfrm>
-          <a:prstGeom prst="rect">
-            <a:avLst/>
-          </a:prstGeom>
-          <a:noFill/>
-        </p:spPr>
-        <p:txBody>
-          <a:bodyPr wrap="square" anchor="t" lIns="0" rIns="0" tIns="0" bIns="0"/>
-          <a:lstStyle/>
-          <a:p>
-            <a:pPr algn="l"/>
-            <a:r>
-              <a:rPr sz="2000" b="1" i="0">
-                <a:solidFill>
-                  <a:srgbClr val="FFFFFF"/>
-                </a:solidFill>
                 <a:latin typeface="Cambria"/>
               </a:rPr>
-              <a:t>Knowledge Criteria</a:t>
-            </a:r>
-          </a:p>
-        </p:txBody>
-      </p:sp>
-      <p:sp>
-        <p:nvSpPr>
-          <p:cNvPr id="14" name="TextBox 13"/>
-          <p:cNvSpPr txBox="1"/>
-          <p:nvPr/>
-        </p:nvSpPr>
-        <p:spPr>
-          <a:xfrm>
-            <a:off x="548640" y="5669280"/>
-            <a:ext cx="11094415" cy="548640"/>
-          </a:xfrm>
-          <a:prstGeom prst="rect">
-            <a:avLst/>
-          </a:prstGeom>
-          <a:noFill/>
-        </p:spPr>
-        <p:txBody>
-          <a:bodyPr wrap="square" anchor="t" lIns="0" rIns="0" tIns="0" bIns="0"/>
-          <a:lstStyle/>
-          <a:p>
-            <a:pPr algn="l"/>
-            <a:r>
-              <a:rPr sz="1200" b="0" i="0">
-                <a:solidFill>
-                  <a:srgbClr val="A9C8F0"/>
-                </a:solidFill>
-                <a:latin typeface="Calibri"/>
-              </a:rPr>
-              <a:t>https://lana6478.github.io/T-level-Design-Development-Engineering-Manufacturing/#/02-occupational-specialism/01-knowledge-criteria.md</a:t>
+              <a:t>A handle is measured and matches the drawing (verified), but user tests show it hurts after ten minutes (not validated), so it's redesigned.</a:t>
             </a:r>
           </a:p>
         </p:txBody>
